--- a/Documents/Original/FlexChroma_Tour_Guide_EN.pptx
+++ b/Documents/Original/FlexChroma_Tour_Guide_EN.pptx
@@ -7382,8 +7382,8 @@
         </p:nvSpPr>
         <p:spPr>
           <a:xfrm>
-            <a:off x="0" y="0"/>
-            <a:ext cx="6858000" cy="9144000"/>
+            <a:off x="33951" y="45268"/>
+            <a:ext cx="6790099" cy="9053465"/>
           </a:xfrm>
           <a:prstGeom prst="rect">
             <a:avLst/>
@@ -7445,7 +7445,7 @@
         </p:nvSpPr>
         <p:spPr>
           <a:xfrm>
-            <a:off x="0" y="0"/>
+            <a:off x="22692" y="9938"/>
             <a:ext cx="6858000" cy="9144000"/>
           </a:xfrm>
           <a:custGeom>
@@ -8476,8 +8476,8 @@
         </p:nvSpPr>
         <p:spPr>
           <a:xfrm>
-            <a:off x="0" y="0"/>
-            <a:ext cx="6858000" cy="9144000"/>
+            <a:off x="33951" y="45268"/>
+            <a:ext cx="6790099" cy="9053465"/>
           </a:xfrm>
           <a:prstGeom prst="rect">
             <a:avLst/>
@@ -8539,7 +8539,7 @@
         </p:nvSpPr>
         <p:spPr>
           <a:xfrm>
-            <a:off x="-3232" y="0"/>
+            <a:off x="-37182" y="0"/>
             <a:ext cx="6861231" cy="9144000"/>
           </a:xfrm>
           <a:custGeom>
@@ -9123,7 +9123,19 @@
           <p:nvPr/>
         </p:nvPicPr>
         <p:blipFill>
-          <a:blip r:embed="rId2"/>
+          <a:blip r:embed="rId2">
+            <a:extLst>
+              <a:ext uri="{BEBA8EAE-BF5A-486C-A8C5-ECC9F3942E4B}">
+                <a14:imgProps xmlns:a14="http://schemas.microsoft.com/office/drawing/2010/main">
+                  <a14:imgLayer r:embed="rId3">
+                    <a14:imgEffect>
+                      <a14:saturation sat="50000"/>
+                    </a14:imgEffect>
+                  </a14:imgLayer>
+                </a14:imgProps>
+              </a:ext>
+            </a:extLst>
+          </a:blip>
           <a:stretch>
             <a:fillRect/>
           </a:stretch>
@@ -9153,7 +9165,7 @@
           <p:nvPr/>
         </p:nvPicPr>
         <p:blipFill>
-          <a:blip r:embed="rId3"/>
+          <a:blip r:embed="rId4"/>
           <a:stretch>
             <a:fillRect/>
           </a:stretch>
@@ -9183,7 +9195,19 @@
           <p:nvPr/>
         </p:nvPicPr>
         <p:blipFill>
-          <a:blip r:embed="rId4"/>
+          <a:blip r:embed="rId5">
+            <a:extLst>
+              <a:ext uri="{BEBA8EAE-BF5A-486C-A8C5-ECC9F3942E4B}">
+                <a14:imgProps xmlns:a14="http://schemas.microsoft.com/office/drawing/2010/main">
+                  <a14:imgLayer r:embed="rId6">
+                    <a14:imgEffect>
+                      <a14:saturation sat="50000"/>
+                    </a14:imgEffect>
+                  </a14:imgLayer>
+                </a14:imgProps>
+              </a:ext>
+            </a:extLst>
+          </a:blip>
           <a:stretch>
             <a:fillRect/>
           </a:stretch>
@@ -9248,8 +9272,8 @@
         </p:nvSpPr>
         <p:spPr>
           <a:xfrm>
-            <a:off x="0" y="0"/>
-            <a:ext cx="6858000" cy="9144000"/>
+            <a:off x="33951" y="45268"/>
+            <a:ext cx="6790099" cy="9053465"/>
           </a:xfrm>
           <a:prstGeom prst="rect">
             <a:avLst/>
@@ -9311,7 +9335,7 @@
         </p:nvSpPr>
         <p:spPr>
           <a:xfrm>
-            <a:off x="-3232" y="0"/>
+            <a:off x="-3231" y="0"/>
             <a:ext cx="6861231" cy="9144000"/>
           </a:xfrm>
           <a:custGeom>
@@ -9810,7 +9834,19 @@
           <p:nvPr/>
         </p:nvPicPr>
         <p:blipFill>
-          <a:blip r:embed="rId3"/>
+          <a:blip r:embed="rId3">
+            <a:extLst>
+              <a:ext uri="{BEBA8EAE-BF5A-486C-A8C5-ECC9F3942E4B}">
+                <a14:imgProps xmlns:a14="http://schemas.microsoft.com/office/drawing/2010/main">
+                  <a14:imgLayer r:embed="rId4">
+                    <a14:imgEffect>
+                      <a14:saturation sat="50000"/>
+                    </a14:imgEffect>
+                  </a14:imgLayer>
+                </a14:imgProps>
+              </a:ext>
+            </a:extLst>
+          </a:blip>
           <a:stretch>
             <a:fillRect/>
           </a:stretch>

--- a/Documents/Original/FlexChroma_Tour_Guide_EN.pptx
+++ b/Documents/Original/FlexChroma_Tour_Guide_EN.pptx
@@ -10,7 +10,7 @@
     <p:sldId id="258" r:id="rId4"/>
     <p:sldId id="259" r:id="rId5"/>
     <p:sldId id="263" r:id="rId6"/>
-    <p:sldId id="261" r:id="rId7"/>
+    <p:sldId id="264" r:id="rId7"/>
     <p:sldId id="262" r:id="rId8"/>
   </p:sldIdLst>
   <p:sldSz cx="6858000" cy="9144000" type="screen4x3"/>
@@ -7445,7 +7445,7 @@
         </p:nvSpPr>
         <p:spPr>
           <a:xfrm>
-            <a:off x="22692" y="9938"/>
+            <a:off x="0" y="9938"/>
             <a:ext cx="6858000" cy="9144000"/>
           </a:xfrm>
           <a:custGeom>
@@ -8447,7 +8447,7 @@
         <p:cNvPr id="1" name="">
           <a:extLst>
             <a:ext uri="{FF2B5EF4-FFF2-40B4-BE49-F238E27FC236}">
-              <a16:creationId xmlns:a16="http://schemas.microsoft.com/office/drawing/2014/main" id="{7F70219F-CA99-178C-3A74-1E55D7D3F744}"/>
+              <a16:creationId xmlns:a16="http://schemas.microsoft.com/office/drawing/2014/main" id="{FDED8CF6-698C-0611-6FE9-D8447E17F739}"/>
             </a:ext>
           </a:extLst>
         </p:cNvPr>
@@ -8467,7 +8467,7 @@
           <p:cNvPr id="4" name="正方形/長方形 3">
             <a:extLst>
               <a:ext uri="{FF2B5EF4-FFF2-40B4-BE49-F238E27FC236}">
-                <a16:creationId xmlns:a16="http://schemas.microsoft.com/office/drawing/2014/main" id="{128E2F72-F757-7A46-539C-7F25D8F53354}"/>
+                <a16:creationId xmlns:a16="http://schemas.microsoft.com/office/drawing/2014/main" id="{CC74F156-4B5C-E445-A645-2E2ACF34FAFE}"/>
               </a:ext>
             </a:extLst>
           </p:cNvPr>
@@ -8527,10 +8527,10 @@
       </p:sp>
       <p:sp>
         <p:nvSpPr>
-          <p:cNvPr id="23" name="フリーフォーム: 図形 22">
+          <p:cNvPr id="35" name="フリーフォーム: 図形 34">
             <a:extLst>
               <a:ext uri="{FF2B5EF4-FFF2-40B4-BE49-F238E27FC236}">
-                <a16:creationId xmlns:a16="http://schemas.microsoft.com/office/drawing/2014/main" id="{1D1614BA-8BF0-AD97-3180-3DE7A8D9DC31}"/>
+                <a16:creationId xmlns:a16="http://schemas.microsoft.com/office/drawing/2014/main" id="{3AFC7783-D5E1-ECCC-D344-D4ECFBFDECDF}"/>
               </a:ext>
             </a:extLst>
           </p:cNvPr>
@@ -8539,63 +8539,63 @@
         </p:nvSpPr>
         <p:spPr>
           <a:xfrm>
-            <a:off x="-37182" y="0"/>
-            <a:ext cx="6861231" cy="9144000"/>
+            <a:off x="-4389" y="0"/>
+            <a:ext cx="6862389" cy="9144000"/>
           </a:xfrm>
           <a:custGeom>
             <a:avLst/>
             <a:gdLst>
-              <a:gd name="connsiteX0" fmla="*/ 3738075 w 6858000"/>
+              <a:gd name="connsiteX0" fmla="*/ 3739233 w 6862389"/>
               <a:gd name="connsiteY0" fmla="*/ 8661917 h 9144000"/>
-              <a:gd name="connsiteX1" fmla="*/ 3738075 w 6858000"/>
+              <a:gd name="connsiteX1" fmla="*/ 3739233 w 6862389"/>
               <a:gd name="connsiteY1" fmla="*/ 8715917 h 9144000"/>
-              <a:gd name="connsiteX2" fmla="*/ 6330075 w 6858000"/>
+              <a:gd name="connsiteX2" fmla="*/ 6331233 w 6862389"/>
               <a:gd name="connsiteY2" fmla="*/ 8715917 h 9144000"/>
-              <a:gd name="connsiteX3" fmla="*/ 6330075 w 6858000"/>
+              <a:gd name="connsiteX3" fmla="*/ 6331233 w 6862389"/>
               <a:gd name="connsiteY3" fmla="*/ 8661917 h 9144000"/>
-              <a:gd name="connsiteX4" fmla="*/ 557769 w 6858000"/>
+              <a:gd name="connsiteX4" fmla="*/ 558927 w 6862389"/>
               <a:gd name="connsiteY4" fmla="*/ 8661917 h 9144000"/>
-              <a:gd name="connsiteX5" fmla="*/ 557769 w 6858000"/>
+              <a:gd name="connsiteX5" fmla="*/ 558927 w 6862389"/>
               <a:gd name="connsiteY5" fmla="*/ 8715917 h 9144000"/>
-              <a:gd name="connsiteX6" fmla="*/ 3149769 w 6858000"/>
+              <a:gd name="connsiteX6" fmla="*/ 3150927 w 6862389"/>
               <a:gd name="connsiteY6" fmla="*/ 8715917 h 9144000"/>
-              <a:gd name="connsiteX7" fmla="*/ 3149769 w 6858000"/>
+              <a:gd name="connsiteX7" fmla="*/ 3150927 w 6862389"/>
               <a:gd name="connsiteY7" fmla="*/ 8661917 h 9144000"/>
-              <a:gd name="connsiteX8" fmla="*/ 671741 w 6858000"/>
-              <a:gd name="connsiteY8" fmla="*/ 2850671 h 9144000"/>
-              <a:gd name="connsiteX9" fmla="*/ 569406 w 6858000"/>
-              <a:gd name="connsiteY9" fmla="*/ 2953006 h 9144000"/>
-              <a:gd name="connsiteX10" fmla="*/ 671741 w 6858000"/>
-              <a:gd name="connsiteY10" fmla="*/ 3055341 h 9144000"/>
-              <a:gd name="connsiteX11" fmla="*/ 774076 w 6858000"/>
-              <a:gd name="connsiteY11" fmla="*/ 2953006 h 9144000"/>
-              <a:gd name="connsiteX12" fmla="*/ 671741 w 6858000"/>
-              <a:gd name="connsiteY12" fmla="*/ 2850671 h 9144000"/>
-              <a:gd name="connsiteX13" fmla="*/ 671741 w 6858000"/>
-              <a:gd name="connsiteY13" fmla="*/ 677902 h 9144000"/>
-              <a:gd name="connsiteX14" fmla="*/ 569406 w 6858000"/>
-              <a:gd name="connsiteY14" fmla="*/ 780237 h 9144000"/>
-              <a:gd name="connsiteX15" fmla="*/ 671741 w 6858000"/>
-              <a:gd name="connsiteY15" fmla="*/ 882572 h 9144000"/>
-              <a:gd name="connsiteX16" fmla="*/ 774076 w 6858000"/>
-              <a:gd name="connsiteY16" fmla="*/ 780237 h 9144000"/>
-              <a:gd name="connsiteX17" fmla="*/ 671741 w 6858000"/>
-              <a:gd name="connsiteY17" fmla="*/ 677902 h 9144000"/>
-              <a:gd name="connsiteX18" fmla="*/ 557768 w 6858000"/>
+              <a:gd name="connsiteX8" fmla="*/ 672899 w 6862389"/>
+              <a:gd name="connsiteY8" fmla="*/ 2635259 h 9144000"/>
+              <a:gd name="connsiteX9" fmla="*/ 570564 w 6862389"/>
+              <a:gd name="connsiteY9" fmla="*/ 2737594 h 9144000"/>
+              <a:gd name="connsiteX10" fmla="*/ 672899 w 6862389"/>
+              <a:gd name="connsiteY10" fmla="*/ 2839929 h 9144000"/>
+              <a:gd name="connsiteX11" fmla="*/ 775234 w 6862389"/>
+              <a:gd name="connsiteY11" fmla="*/ 2737594 h 9144000"/>
+              <a:gd name="connsiteX12" fmla="*/ 672899 w 6862389"/>
+              <a:gd name="connsiteY12" fmla="*/ 2635259 h 9144000"/>
+              <a:gd name="connsiteX13" fmla="*/ 672899 w 6862389"/>
+              <a:gd name="connsiteY13" fmla="*/ 671552 h 9144000"/>
+              <a:gd name="connsiteX14" fmla="*/ 570564 w 6862389"/>
+              <a:gd name="connsiteY14" fmla="*/ 773887 h 9144000"/>
+              <a:gd name="connsiteX15" fmla="*/ 672899 w 6862389"/>
+              <a:gd name="connsiteY15" fmla="*/ 876222 h 9144000"/>
+              <a:gd name="connsiteX16" fmla="*/ 775234 w 6862389"/>
+              <a:gd name="connsiteY16" fmla="*/ 773887 h 9144000"/>
+              <a:gd name="connsiteX17" fmla="*/ 672899 w 6862389"/>
+              <a:gd name="connsiteY17" fmla="*/ 671552 h 9144000"/>
+              <a:gd name="connsiteX18" fmla="*/ 558926 w 6862389"/>
               <a:gd name="connsiteY18" fmla="*/ 452468 h 9144000"/>
-              <a:gd name="connsiteX19" fmla="*/ 557768 w 6858000"/>
+              <a:gd name="connsiteX19" fmla="*/ 558926 w 6862389"/>
               <a:gd name="connsiteY19" fmla="*/ 506468 h 9144000"/>
-              <a:gd name="connsiteX20" fmla="*/ 6313961 w 6858000"/>
+              <a:gd name="connsiteX20" fmla="*/ 6315119 w 6862389"/>
               <a:gd name="connsiteY20" fmla="*/ 506468 h 9144000"/>
-              <a:gd name="connsiteX21" fmla="*/ 6313961 w 6858000"/>
+              <a:gd name="connsiteX21" fmla="*/ 6315119 w 6862389"/>
               <a:gd name="connsiteY21" fmla="*/ 452468 h 9144000"/>
-              <a:gd name="connsiteX22" fmla="*/ 0 w 6858000"/>
+              <a:gd name="connsiteX22" fmla="*/ 0 w 6862389"/>
               <a:gd name="connsiteY22" fmla="*/ 0 h 9144000"/>
-              <a:gd name="connsiteX23" fmla="*/ 6858000 w 6858000"/>
+              <a:gd name="connsiteX23" fmla="*/ 6862389 w 6862389"/>
               <a:gd name="connsiteY23" fmla="*/ 0 h 9144000"/>
-              <a:gd name="connsiteX24" fmla="*/ 6858000 w 6858000"/>
+              <a:gd name="connsiteX24" fmla="*/ 6862389 w 6862389"/>
               <a:gd name="connsiteY24" fmla="*/ 9144000 h 9144000"/>
-              <a:gd name="connsiteX25" fmla="*/ 0 w 6858000"/>
+              <a:gd name="connsiteX25" fmla="*/ 0 w 6862389"/>
               <a:gd name="connsiteY25" fmla="*/ 9144000 h 9144000"/>
             </a:gdLst>
             <a:ahLst/>
@@ -8681,102 +8681,102 @@
             </a:cxnLst>
             <a:rect l="l" t="t" r="r" b="b"/>
             <a:pathLst>
-              <a:path w="6858000" h="9144000">
+              <a:path w="6862389" h="9144000">
                 <a:moveTo>
-                  <a:pt x="3738075" y="8661917"/>
+                  <a:pt x="3739233" y="8661917"/>
                 </a:moveTo>
                 <a:lnTo>
-                  <a:pt x="3738075" y="8715917"/>
+                  <a:pt x="3739233" y="8715917"/>
                 </a:lnTo>
                 <a:lnTo>
-                  <a:pt x="6330075" y="8715917"/>
+                  <a:pt x="6331233" y="8715917"/>
                 </a:lnTo>
                 <a:lnTo>
-                  <a:pt x="6330075" y="8661917"/>
+                  <a:pt x="6331233" y="8661917"/>
                 </a:lnTo>
                 <a:close/>
                 <a:moveTo>
-                  <a:pt x="557769" y="8661917"/>
+                  <a:pt x="558927" y="8661917"/>
                 </a:moveTo>
                 <a:lnTo>
-                  <a:pt x="557769" y="8715917"/>
+                  <a:pt x="558927" y="8715917"/>
                 </a:lnTo>
                 <a:lnTo>
-                  <a:pt x="3149769" y="8715917"/>
+                  <a:pt x="3150927" y="8715917"/>
                 </a:lnTo>
                 <a:lnTo>
-                  <a:pt x="3149769" y="8661917"/>
+                  <a:pt x="3150927" y="8661917"/>
                 </a:lnTo>
                 <a:close/>
                 <a:moveTo>
-                  <a:pt x="671741" y="2850671"/>
+                  <a:pt x="672899" y="2635259"/>
                 </a:moveTo>
                 <a:cubicBezTo>
-                  <a:pt x="615223" y="2850671"/>
-                  <a:pt x="569406" y="2896488"/>
-                  <a:pt x="569406" y="2953006"/>
+                  <a:pt x="616381" y="2635259"/>
+                  <a:pt x="570564" y="2681076"/>
+                  <a:pt x="570564" y="2737594"/>
                 </a:cubicBezTo>
                 <a:cubicBezTo>
-                  <a:pt x="569406" y="3009524"/>
-                  <a:pt x="615223" y="3055341"/>
-                  <a:pt x="671741" y="3055341"/>
+                  <a:pt x="570564" y="2794112"/>
+                  <a:pt x="616381" y="2839929"/>
+                  <a:pt x="672899" y="2839929"/>
                 </a:cubicBezTo>
                 <a:cubicBezTo>
-                  <a:pt x="728259" y="3055341"/>
-                  <a:pt x="774076" y="3009524"/>
-                  <a:pt x="774076" y="2953006"/>
+                  <a:pt x="729417" y="2839929"/>
+                  <a:pt x="775234" y="2794112"/>
+                  <a:pt x="775234" y="2737594"/>
                 </a:cubicBezTo>
                 <a:cubicBezTo>
-                  <a:pt x="774076" y="2896488"/>
-                  <a:pt x="728259" y="2850671"/>
-                  <a:pt x="671741" y="2850671"/>
+                  <a:pt x="775234" y="2681076"/>
+                  <a:pt x="729417" y="2635259"/>
+                  <a:pt x="672899" y="2635259"/>
                 </a:cubicBezTo>
                 <a:close/>
                 <a:moveTo>
-                  <a:pt x="671741" y="677902"/>
+                  <a:pt x="672899" y="671552"/>
                 </a:moveTo>
                 <a:cubicBezTo>
-                  <a:pt x="615223" y="677902"/>
-                  <a:pt x="569406" y="723719"/>
-                  <a:pt x="569406" y="780237"/>
+                  <a:pt x="616381" y="671552"/>
+                  <a:pt x="570564" y="717369"/>
+                  <a:pt x="570564" y="773887"/>
                 </a:cubicBezTo>
                 <a:cubicBezTo>
-                  <a:pt x="569406" y="836755"/>
-                  <a:pt x="615223" y="882572"/>
-                  <a:pt x="671741" y="882572"/>
+                  <a:pt x="570564" y="830405"/>
+                  <a:pt x="616381" y="876222"/>
+                  <a:pt x="672899" y="876222"/>
                 </a:cubicBezTo>
                 <a:cubicBezTo>
-                  <a:pt x="728259" y="882572"/>
-                  <a:pt x="774076" y="836755"/>
-                  <a:pt x="774076" y="780237"/>
+                  <a:pt x="729417" y="876222"/>
+                  <a:pt x="775234" y="830405"/>
+                  <a:pt x="775234" y="773887"/>
                 </a:cubicBezTo>
                 <a:cubicBezTo>
-                  <a:pt x="774076" y="723719"/>
-                  <a:pt x="728259" y="677902"/>
-                  <a:pt x="671741" y="677902"/>
+                  <a:pt x="775234" y="717369"/>
+                  <a:pt x="729417" y="671552"/>
+                  <a:pt x="672899" y="671552"/>
                 </a:cubicBezTo>
                 <a:close/>
                 <a:moveTo>
-                  <a:pt x="557768" y="452468"/>
+                  <a:pt x="558926" y="452468"/>
                 </a:moveTo>
                 <a:lnTo>
-                  <a:pt x="557768" y="506468"/>
+                  <a:pt x="558926" y="506468"/>
                 </a:lnTo>
                 <a:lnTo>
-                  <a:pt x="6313961" y="506468"/>
+                  <a:pt x="6315119" y="506468"/>
                 </a:lnTo>
                 <a:lnTo>
-                  <a:pt x="6313961" y="452468"/>
+                  <a:pt x="6315119" y="452468"/>
                 </a:lnTo>
                 <a:close/>
                 <a:moveTo>
                   <a:pt x="0" y="0"/>
                 </a:moveTo>
                 <a:lnTo>
-                  <a:pt x="6858000" y="0"/>
+                  <a:pt x="6862389" y="0"/>
                 </a:lnTo>
                 <a:lnTo>
-                  <a:pt x="6858000" y="9144000"/>
+                  <a:pt x="6862389" y="9144000"/>
                 </a:lnTo>
                 <a:lnTo>
                   <a:pt x="0" y="9144000"/>
@@ -8824,7 +8824,7 @@
           <p:cNvPr id="17" name="テキスト ボックス 16">
             <a:extLst>
               <a:ext uri="{FF2B5EF4-FFF2-40B4-BE49-F238E27FC236}">
-                <a16:creationId xmlns:a16="http://schemas.microsoft.com/office/drawing/2014/main" id="{15BBE0F2-F893-A968-7B67-ABCF07365994}"/>
+                <a16:creationId xmlns:a16="http://schemas.microsoft.com/office/drawing/2014/main" id="{981E22E0-F0C3-8FD5-9B53-0AE823C53A48}"/>
               </a:ext>
             </a:extLst>
           </p:cNvPr>
@@ -8833,7 +8833,7 @@
         </p:nvSpPr>
         <p:spPr>
           <a:xfrm>
-            <a:off x="3163826" y="8511531"/>
+            <a:off x="3150021" y="8521283"/>
             <a:ext cx="575734" cy="369332"/>
           </a:xfrm>
           <a:prstGeom prst="rect">
@@ -8858,10 +8858,10 @@
       </p:sp>
       <p:sp>
         <p:nvSpPr>
-          <p:cNvPr id="18" name="テキスト ボックス 17">
+          <p:cNvPr id="2" name="テキスト ボックス 1">
             <a:extLst>
               <a:ext uri="{FF2B5EF4-FFF2-40B4-BE49-F238E27FC236}">
-                <a16:creationId xmlns:a16="http://schemas.microsoft.com/office/drawing/2014/main" id="{96F8CF2C-8A09-3A23-47CB-4C2F03EFB49E}"/>
+                <a16:creationId xmlns:a16="http://schemas.microsoft.com/office/drawing/2014/main" id="{E9D719DD-DE7E-DED6-A18B-B084A027B2DE}"/>
               </a:ext>
             </a:extLst>
           </p:cNvPr>
@@ -8900,10 +8900,10 @@
       </p:sp>
       <p:sp>
         <p:nvSpPr>
-          <p:cNvPr id="19" name="テキスト ボックス 18">
+          <p:cNvPr id="3" name="テキスト ボックス 2">
             <a:extLst>
               <a:ext uri="{FF2B5EF4-FFF2-40B4-BE49-F238E27FC236}">
-                <a16:creationId xmlns:a16="http://schemas.microsoft.com/office/drawing/2014/main" id="{97352D4E-CAE1-FEE6-AC68-B9E1309C3004}"/>
+                <a16:creationId xmlns:a16="http://schemas.microsoft.com/office/drawing/2014/main" id="{9F86F671-02C9-9E9B-5F0D-DC2FAC11DD2F}"/>
               </a:ext>
             </a:extLst>
           </p:cNvPr>
@@ -8912,7 +8912,7 @@
         </p:nvSpPr>
         <p:spPr>
           <a:xfrm>
-            <a:off x="668508" y="1032957"/>
+            <a:off x="668508" y="950188"/>
             <a:ext cx="5649491" cy="400110"/>
           </a:xfrm>
           <a:prstGeom prst="rect">
@@ -8957,10 +8957,10 @@
       </p:sp>
       <p:sp>
         <p:nvSpPr>
-          <p:cNvPr id="21" name="テキスト ボックス 20">
+          <p:cNvPr id="11" name="テキスト ボックス 10">
             <a:extLst>
               <a:ext uri="{FF2B5EF4-FFF2-40B4-BE49-F238E27FC236}">
-                <a16:creationId xmlns:a16="http://schemas.microsoft.com/office/drawing/2014/main" id="{064CA7F6-68CE-A4EE-92AC-A8DC532DAECA}"/>
+                <a16:creationId xmlns:a16="http://schemas.microsoft.com/office/drawing/2014/main" id="{9331D375-CC72-3463-7EBE-AD9BD8A9AFDD}"/>
               </a:ext>
             </a:extLst>
           </p:cNvPr>
@@ -8969,7 +8969,7 @@
         </p:nvSpPr>
         <p:spPr>
           <a:xfrm>
-            <a:off x="770844" y="2782786"/>
+            <a:off x="770844" y="2574192"/>
             <a:ext cx="2379177" cy="400110"/>
           </a:xfrm>
           <a:prstGeom prst="rect">
@@ -8999,10 +8999,10 @@
       </p:sp>
       <p:sp>
         <p:nvSpPr>
-          <p:cNvPr id="22" name="テキスト ボックス 21">
+          <p:cNvPr id="12" name="テキスト ボックス 11">
             <a:extLst>
               <a:ext uri="{FF2B5EF4-FFF2-40B4-BE49-F238E27FC236}">
-                <a16:creationId xmlns:a16="http://schemas.microsoft.com/office/drawing/2014/main" id="{68CB7496-0DB9-CFC6-D75D-C69B4D55AF3A}"/>
+                <a16:creationId xmlns:a16="http://schemas.microsoft.com/office/drawing/2014/main" id="{53F77DD3-6423-8DE1-AC87-0DD7AF777795}"/>
               </a:ext>
             </a:extLst>
           </p:cNvPr>
@@ -9011,7 +9011,7 @@
         </p:nvSpPr>
         <p:spPr>
           <a:xfrm>
-            <a:off x="668509" y="3162437"/>
+            <a:off x="668509" y="2953843"/>
             <a:ext cx="5642222" cy="1169551"/>
           </a:xfrm>
           <a:prstGeom prst="rect">
@@ -9072,10 +9072,10 @@
       </p:sp>
       <p:sp>
         <p:nvSpPr>
-          <p:cNvPr id="25" name="テキスト ボックス 24">
+          <p:cNvPr id="23" name="テキスト ボックス 22">
             <a:extLst>
               <a:ext uri="{FF2B5EF4-FFF2-40B4-BE49-F238E27FC236}">
-                <a16:creationId xmlns:a16="http://schemas.microsoft.com/office/drawing/2014/main" id="{009F7EB1-1CD3-5D92-55F5-1AEAACC5A374}"/>
+                <a16:creationId xmlns:a16="http://schemas.microsoft.com/office/drawing/2014/main" id="{4115F0A8-4267-0FEB-9B1F-41BC20F962C4}"/>
               </a:ext>
             </a:extLst>
           </p:cNvPr>
@@ -9084,7 +9084,7 @@
         </p:nvSpPr>
         <p:spPr>
           <a:xfrm>
-            <a:off x="675778" y="5274317"/>
+            <a:off x="668508" y="5046262"/>
             <a:ext cx="5642222" cy="246221"/>
           </a:xfrm>
           <a:prstGeom prst="rect">
@@ -9110,10 +9110,57 @@
       </p:sp>
       <p:pic>
         <p:nvPicPr>
-          <p:cNvPr id="29" name="図 28">
+          <p:cNvPr id="26" name="図 25">
             <a:extLst>
               <a:ext uri="{FF2B5EF4-FFF2-40B4-BE49-F238E27FC236}">
-                <a16:creationId xmlns:a16="http://schemas.microsoft.com/office/drawing/2014/main" id="{11699ABF-7927-D2AB-1B49-99921D1077E7}"/>
+                <a16:creationId xmlns:a16="http://schemas.microsoft.com/office/drawing/2014/main" id="{D599B3A6-5BF1-475A-455C-4CE16066520F}"/>
+              </a:ext>
+            </a:extLst>
+          </p:cNvPr>
+          <p:cNvPicPr>
+            <a:picLocks noChangeAspect="1" noChangeArrowheads="1"/>
+          </p:cNvPicPr>
+          <p:nvPr/>
+        </p:nvPicPr>
+        <p:blipFill>
+          <a:blip r:embed="rId2">
+            <a:extLst>
+              <a:ext uri="{28A0092B-C50C-407E-A947-70E740481C1C}">
+                <a14:useLocalDpi xmlns:a14="http://schemas.microsoft.com/office/drawing/2010/main" val="0"/>
+              </a:ext>
+            </a:extLst>
+          </a:blip>
+          <a:srcRect/>
+          <a:stretch>
+            <a:fillRect/>
+          </a:stretch>
+        </p:blipFill>
+        <p:spPr bwMode="auto">
+          <a:xfrm>
+            <a:off x="770844" y="5325050"/>
+            <a:ext cx="5264196" cy="3270393"/>
+          </a:xfrm>
+          <a:prstGeom prst="rect">
+            <a:avLst/>
+          </a:prstGeom>
+          <a:noFill/>
+          <a:extLst>
+            <a:ext uri="{909E8E84-426E-40DD-AFC4-6F175D3DCCD1}">
+              <a14:hiddenFill xmlns:a14="http://schemas.microsoft.com/office/drawing/2010/main">
+                <a:solidFill>
+                  <a:srgbClr val="FFFFFF"/>
+                </a:solidFill>
+              </a14:hiddenFill>
+            </a:ext>
+          </a:extLst>
+        </p:spPr>
+      </p:pic>
+      <p:pic>
+        <p:nvPicPr>
+          <p:cNvPr id="27" name="図 26">
+            <a:extLst>
+              <a:ext uri="{FF2B5EF4-FFF2-40B4-BE49-F238E27FC236}">
+                <a16:creationId xmlns:a16="http://schemas.microsoft.com/office/drawing/2014/main" id="{E2340787-D511-DF21-3720-E71FFAD3D13E}"/>
               </a:ext>
             </a:extLst>
           </p:cNvPr>
@@ -9123,27 +9170,15 @@
           <p:nvPr/>
         </p:nvPicPr>
         <p:blipFill>
-          <a:blip r:embed="rId2">
-            <a:extLst>
-              <a:ext uri="{BEBA8EAE-BF5A-486C-A8C5-ECC9F3942E4B}">
-                <a14:imgProps xmlns:a14="http://schemas.microsoft.com/office/drawing/2010/main">
-                  <a14:imgLayer r:embed="rId3">
-                    <a14:imgEffect>
-                      <a14:saturation sat="50000"/>
-                    </a14:imgEffect>
-                  </a14:imgLayer>
-                </a14:imgProps>
-              </a:ext>
-            </a:extLst>
-          </a:blip>
+          <a:blip r:embed="rId3"/>
           <a:stretch>
             <a:fillRect/>
           </a:stretch>
         </p:blipFill>
         <p:spPr>
           <a:xfrm>
-            <a:off x="554537" y="1452789"/>
-            <a:ext cx="5770732" cy="1233898"/>
+            <a:off x="709884" y="4100534"/>
+            <a:ext cx="5325156" cy="831813"/>
           </a:xfrm>
           <a:prstGeom prst="rect">
             <a:avLst/>
@@ -9152,80 +9187,55 @@
       </p:pic>
       <p:pic>
         <p:nvPicPr>
-          <p:cNvPr id="31" name="図 30">
+          <p:cNvPr id="38" name="図 37">
             <a:extLst>
               <a:ext uri="{FF2B5EF4-FFF2-40B4-BE49-F238E27FC236}">
-                <a16:creationId xmlns:a16="http://schemas.microsoft.com/office/drawing/2014/main" id="{5E2B18A3-4301-6A85-953E-22FF827D423A}"/>
+                <a16:creationId xmlns:a16="http://schemas.microsoft.com/office/drawing/2014/main" id="{24EE4D19-C95F-DECA-987F-D6FD0CAF2F69}"/>
               </a:ext>
             </a:extLst>
           </p:cNvPr>
           <p:cNvPicPr>
-            <a:picLocks noChangeAspect="1"/>
+            <a:picLocks noChangeAspect="1" noChangeArrowheads="1"/>
           </p:cNvPicPr>
           <p:nvPr/>
         </p:nvPicPr>
-        <p:blipFill>
-          <a:blip r:embed="rId4"/>
+        <p:blipFill rotWithShape="1">
+          <a:blip r:embed="rId4">
+            <a:extLst>
+              <a:ext uri="{28A0092B-C50C-407E-A947-70E740481C1C}">
+                <a14:useLocalDpi xmlns:a14="http://schemas.microsoft.com/office/drawing/2010/main" val="0"/>
+              </a:ext>
+            </a:extLst>
+          </a:blip>
+          <a:srcRect l="1747" r="2095" b="10009"/>
           <a:stretch>
             <a:fillRect/>
           </a:stretch>
         </p:blipFill>
-        <p:spPr>
-          <a:xfrm>
-            <a:off x="554537" y="4296577"/>
-            <a:ext cx="5756193" cy="888877"/>
+        <p:spPr bwMode="auto">
+          <a:xfrm>
+            <a:off x="1091915" y="1374795"/>
+            <a:ext cx="4561094" cy="1014727"/>
           </a:xfrm>
           <a:prstGeom prst="rect">
             <a:avLst/>
           </a:prstGeom>
-        </p:spPr>
-      </p:pic>
-      <p:pic>
-        <p:nvPicPr>
-          <p:cNvPr id="33" name="図 32">
-            <a:extLst>
-              <a:ext uri="{FF2B5EF4-FFF2-40B4-BE49-F238E27FC236}">
-                <a16:creationId xmlns:a16="http://schemas.microsoft.com/office/drawing/2014/main" id="{8AE90FD0-2C77-668A-0B39-DA712A4A930D}"/>
-              </a:ext>
-            </a:extLst>
-          </p:cNvPr>
-          <p:cNvPicPr>
-            <a:picLocks noChangeAspect="1"/>
-          </p:cNvPicPr>
-          <p:nvPr/>
-        </p:nvPicPr>
-        <p:blipFill>
-          <a:blip r:embed="rId5">
-            <a:extLst>
-              <a:ext uri="{BEBA8EAE-BF5A-486C-A8C5-ECC9F3942E4B}">
-                <a14:imgProps xmlns:a14="http://schemas.microsoft.com/office/drawing/2010/main">
-                  <a14:imgLayer r:embed="rId6">
-                    <a14:imgEffect>
-                      <a14:saturation sat="50000"/>
-                    </a14:imgEffect>
-                  </a14:imgLayer>
-                </a14:imgProps>
-              </a:ext>
-            </a:extLst>
-          </a:blip>
-          <a:stretch>
-            <a:fillRect/>
-          </a:stretch>
-        </p:blipFill>
-        <p:spPr>
-          <a:xfrm>
-            <a:off x="652060" y="5505815"/>
-            <a:ext cx="5464000" cy="3048554"/>
-          </a:xfrm>
-          <a:prstGeom prst="rect">
-            <a:avLst/>
-          </a:prstGeom>
+          <a:noFill/>
+          <a:extLst>
+            <a:ext uri="{909E8E84-426E-40DD-AFC4-6F175D3DCCD1}">
+              <a14:hiddenFill xmlns:a14="http://schemas.microsoft.com/office/drawing/2010/main">
+                <a:solidFill>
+                  <a:srgbClr val="FFFFFF"/>
+                </a:solidFill>
+              </a14:hiddenFill>
+            </a:ext>
+          </a:extLst>
         </p:spPr>
       </p:pic>
     </p:spTree>
     <p:extLst>
       <p:ext uri="{BB962C8B-B14F-4D97-AF65-F5344CB8AC3E}">
-        <p14:creationId xmlns:p14="http://schemas.microsoft.com/office/powerpoint/2010/main" val="3495934252"/>
+        <p14:creationId xmlns:p14="http://schemas.microsoft.com/office/powerpoint/2010/main" val="1711923920"/>
       </p:ext>
     </p:extLst>
   </p:cSld>
@@ -9791,36 +9801,6 @@
       </p:sp>
       <p:pic>
         <p:nvPicPr>
-          <p:cNvPr id="3" name="図 2">
-            <a:extLst>
-              <a:ext uri="{FF2B5EF4-FFF2-40B4-BE49-F238E27FC236}">
-                <a16:creationId xmlns:a16="http://schemas.microsoft.com/office/drawing/2014/main" id="{9F66C794-274A-5CDC-3301-7C7598F1E259}"/>
-              </a:ext>
-            </a:extLst>
-          </p:cNvPr>
-          <p:cNvPicPr>
-            <a:picLocks noChangeAspect="1"/>
-          </p:cNvPicPr>
-          <p:nvPr/>
-        </p:nvPicPr>
-        <p:blipFill>
-          <a:blip r:embed="rId2"/>
-          <a:stretch>
-            <a:fillRect/>
-          </a:stretch>
-        </p:blipFill>
-        <p:spPr>
-          <a:xfrm>
-            <a:off x="539999" y="1823254"/>
-            <a:ext cx="5695701" cy="1013806"/>
-          </a:xfrm>
-          <a:prstGeom prst="rect">
-            <a:avLst/>
-          </a:prstGeom>
-        </p:spPr>
-      </p:pic>
-      <p:pic>
-        <p:nvPicPr>
           <p:cNvPr id="12" name="図 11">
             <a:extLst>
               <a:ext uri="{FF2B5EF4-FFF2-40B4-BE49-F238E27FC236}">
@@ -9834,11 +9814,11 @@
           <p:nvPr/>
         </p:nvPicPr>
         <p:blipFill>
-          <a:blip r:embed="rId3">
+          <a:blip r:embed="rId2">
             <a:extLst>
               <a:ext uri="{BEBA8EAE-BF5A-486C-A8C5-ECC9F3942E4B}">
                 <a14:imgProps xmlns:a14="http://schemas.microsoft.com/office/drawing/2010/main">
-                  <a14:imgLayer r:embed="rId4">
+                  <a14:imgLayer r:embed="rId3">
                     <a14:imgEffect>
                       <a14:saturation sat="50000"/>
                     </a14:imgEffect>
@@ -9956,6 +9936,83 @@
           </a:p>
         </p:txBody>
       </p:sp>
+      <p:pic>
+        <p:nvPicPr>
+          <p:cNvPr id="2" name="図 1">
+            <a:extLst>
+              <a:ext uri="{FF2B5EF4-FFF2-40B4-BE49-F238E27FC236}">
+                <a16:creationId xmlns:a16="http://schemas.microsoft.com/office/drawing/2014/main" id="{09F0FDF5-AAE0-F652-01A1-9A4F73C8F036}"/>
+              </a:ext>
+            </a:extLst>
+          </p:cNvPr>
+          <p:cNvPicPr>
+            <a:picLocks noChangeAspect="1"/>
+          </p:cNvPicPr>
+          <p:nvPr/>
+        </p:nvPicPr>
+        <p:blipFill>
+          <a:blip r:embed="rId4"/>
+          <a:stretch>
+            <a:fillRect/>
+          </a:stretch>
+        </p:blipFill>
+        <p:spPr>
+          <a:xfrm>
+            <a:off x="633073" y="1909692"/>
+            <a:ext cx="5588622" cy="913760"/>
+          </a:xfrm>
+          <a:prstGeom prst="rect">
+            <a:avLst/>
+          </a:prstGeom>
+        </p:spPr>
+      </p:pic>
+      <p:pic>
+        <p:nvPicPr>
+          <p:cNvPr id="8" name="図 7">
+            <a:extLst>
+              <a:ext uri="{FF2B5EF4-FFF2-40B4-BE49-F238E27FC236}">
+                <a16:creationId xmlns:a16="http://schemas.microsoft.com/office/drawing/2014/main" id="{3CA4C0E2-35C7-1340-C094-C4C5C416A183}"/>
+              </a:ext>
+            </a:extLst>
+          </p:cNvPr>
+          <p:cNvPicPr>
+            <a:picLocks noChangeAspect="1" noChangeArrowheads="1"/>
+          </p:cNvPicPr>
+          <p:nvPr/>
+        </p:nvPicPr>
+        <p:blipFill>
+          <a:blip r:embed="rId5">
+            <a:extLst>
+              <a:ext uri="{28A0092B-C50C-407E-A947-70E740481C1C}">
+                <a14:useLocalDpi xmlns:a14="http://schemas.microsoft.com/office/drawing/2010/main" val="0"/>
+              </a:ext>
+            </a:extLst>
+          </a:blip>
+          <a:srcRect/>
+          <a:stretch>
+            <a:fillRect/>
+          </a:stretch>
+        </p:blipFill>
+        <p:spPr bwMode="auto">
+          <a:xfrm>
+            <a:off x="587545" y="3188861"/>
+            <a:ext cx="5679677" cy="4002590"/>
+          </a:xfrm>
+          <a:prstGeom prst="rect">
+            <a:avLst/>
+          </a:prstGeom>
+          <a:noFill/>
+          <a:extLst>
+            <a:ext uri="{909E8E84-426E-40DD-AFC4-6F175D3DCCD1}">
+              <a14:hiddenFill xmlns:a14="http://schemas.microsoft.com/office/drawing/2010/main">
+                <a:solidFill>
+                  <a:srgbClr val="FFFFFF"/>
+                </a:solidFill>
+              </a14:hiddenFill>
+            </a:ext>
+          </a:extLst>
+        </p:spPr>
+      </p:pic>
     </p:spTree>
     <p:extLst>
       <p:ext uri="{BB962C8B-B14F-4D97-AF65-F5344CB8AC3E}">

--- a/Documents/Original/FlexChroma_Tour_Guide_EN.pptx
+++ b/Documents/Original/FlexChroma_Tour_Guide_EN.pptx
@@ -3281,22 +3281,22 @@
         </p:nvSpPr>
         <p:spPr>
           <a:xfrm>
-            <a:off x="0" y="0"/>
-            <a:ext cx="6858000" cy="9144000"/>
+            <a:off x="33951" y="45268"/>
+            <a:ext cx="6790099" cy="9053465"/>
           </a:xfrm>
           <a:prstGeom prst="rect">
             <a:avLst/>
           </a:prstGeom>
           <a:gradFill>
             <a:gsLst>
-              <a:gs pos="60000">
-                <a:srgbClr val="5800E1"/>
+              <a:gs pos="50000">
+                <a:srgbClr val="6200E8"/>
               </a:gs>
-              <a:gs pos="5000">
-                <a:srgbClr val="EC008C"/>
+              <a:gs pos="10000">
+                <a:srgbClr val="EE00B0"/>
               </a:gs>
-              <a:gs pos="95000">
-                <a:srgbClr val="0086D6"/>
+              <a:gs pos="90000">
+                <a:srgbClr val="0095E5"/>
               </a:gs>
             </a:gsLst>
             <a:lin ang="1800000" scaled="0"/>
@@ -3326,7 +3326,7 @@
           <a:lstStyle/>
           <a:p>
             <a:pPr algn="ctr"/>
-            <a:endParaRPr kumimoji="1" lang="ja-JP" altLang="en-US"/>
+            <a:endParaRPr kumimoji="1" lang="ja-JP" altLang="en-US" dirty="0"/>
           </a:p>
         </p:txBody>
       </p:sp>
@@ -3344,7 +3344,7 @@
         </p:nvSpPr>
         <p:spPr>
           <a:xfrm>
-            <a:off x="0" y="0"/>
+            <a:off x="16975" y="0"/>
             <a:ext cx="6858000" cy="9144000"/>
           </a:xfrm>
           <a:prstGeom prst="rect">
@@ -3860,10 +3860,10 @@
       </p:grpSpPr>
       <p:sp>
         <p:nvSpPr>
-          <p:cNvPr id="4" name="正方形/長方形 3">
+          <p:cNvPr id="32" name="正方形/長方形 31">
             <a:extLst>
               <a:ext uri="{FF2B5EF4-FFF2-40B4-BE49-F238E27FC236}">
-                <a16:creationId xmlns:a16="http://schemas.microsoft.com/office/drawing/2014/main" id="{FD7BBD50-91B1-398B-05F5-EF6FB391642D}"/>
+                <a16:creationId xmlns:a16="http://schemas.microsoft.com/office/drawing/2014/main" id="{CD9029B2-D1D6-26F4-0BA3-DE439C520D10}"/>
               </a:ext>
             </a:extLst>
           </p:cNvPr>
@@ -3880,14 +3880,14 @@
           </a:prstGeom>
           <a:gradFill>
             <a:gsLst>
-              <a:gs pos="60000">
-                <a:srgbClr val="5800E1"/>
+              <a:gs pos="50000">
+                <a:srgbClr val="6200E8"/>
               </a:gs>
-              <a:gs pos="5000">
-                <a:srgbClr val="EC008C"/>
+              <a:gs pos="10000">
+                <a:srgbClr val="EE00B0"/>
               </a:gs>
-              <a:gs pos="95000">
-                <a:srgbClr val="0086D6"/>
+              <a:gs pos="90000">
+                <a:srgbClr val="0095E5"/>
               </a:gs>
             </a:gsLst>
             <a:lin ang="1800000" scaled="0"/>
@@ -3917,7 +3917,7 @@
           <a:lstStyle/>
           <a:p>
             <a:pPr algn="ctr"/>
-            <a:endParaRPr kumimoji="1" lang="ja-JP" altLang="en-US"/>
+            <a:endParaRPr kumimoji="1" lang="ja-JP" altLang="en-US" dirty="0"/>
           </a:p>
         </p:txBody>
       </p:sp>
@@ -3935,7 +3935,7 @@
         </p:nvSpPr>
         <p:spPr>
           <a:xfrm>
-            <a:off x="0" y="0"/>
+            <a:off x="7269" y="0"/>
             <a:ext cx="6858000" cy="9144000"/>
           </a:xfrm>
           <a:prstGeom prst="rect">
@@ -4769,36 +4769,6 @@
           </a:p>
         </p:txBody>
       </p:sp>
-      <p:pic>
-        <p:nvPicPr>
-          <p:cNvPr id="24" name="図 23">
-            <a:extLst>
-              <a:ext uri="{FF2B5EF4-FFF2-40B4-BE49-F238E27FC236}">
-                <a16:creationId xmlns:a16="http://schemas.microsoft.com/office/drawing/2014/main" id="{6516A146-7FD4-4FEF-0035-48EC8599DF32}"/>
-              </a:ext>
-            </a:extLst>
-          </p:cNvPr>
-          <p:cNvPicPr>
-            <a:picLocks noChangeAspect="1"/>
-          </p:cNvPicPr>
-          <p:nvPr/>
-        </p:nvPicPr>
-        <p:blipFill>
-          <a:blip r:embed="rId2"/>
-          <a:stretch>
-            <a:fillRect/>
-          </a:stretch>
-        </p:blipFill>
-        <p:spPr>
-          <a:xfrm>
-            <a:off x="551490" y="5293717"/>
-            <a:ext cx="5759241" cy="1144558"/>
-          </a:xfrm>
-          <a:prstGeom prst="rect">
-            <a:avLst/>
-          </a:prstGeom>
-        </p:spPr>
-      </p:pic>
       <p:sp>
         <p:nvSpPr>
           <p:cNvPr id="25" name="テキスト ボックス 24">
@@ -5332,6 +5302,36 @@
           </a:p>
         </p:txBody>
       </p:sp>
+      <p:pic>
+        <p:nvPicPr>
+          <p:cNvPr id="33" name="図 32">
+            <a:extLst>
+              <a:ext uri="{FF2B5EF4-FFF2-40B4-BE49-F238E27FC236}">
+                <a16:creationId xmlns:a16="http://schemas.microsoft.com/office/drawing/2014/main" id="{373E7CFB-7ECE-1E91-69A3-DE952354F20A}"/>
+              </a:ext>
+            </a:extLst>
+          </p:cNvPr>
+          <p:cNvPicPr>
+            <a:picLocks noChangeAspect="1"/>
+          </p:cNvPicPr>
+          <p:nvPr/>
+        </p:nvPicPr>
+        <p:blipFill>
+          <a:blip r:embed="rId2"/>
+          <a:stretch>
+            <a:fillRect/>
+          </a:stretch>
+        </p:blipFill>
+        <p:spPr>
+          <a:xfrm>
+            <a:off x="551490" y="5293717"/>
+            <a:ext cx="5759241" cy="1144558"/>
+          </a:xfrm>
+          <a:prstGeom prst="rect">
+            <a:avLst/>
+          </a:prstGeom>
+        </p:spPr>
+      </p:pic>
     </p:spTree>
     <p:extLst>
       <p:ext uri="{BB962C8B-B14F-4D97-AF65-F5344CB8AC3E}">
@@ -5370,10 +5370,10 @@
       </p:grpSpPr>
       <p:sp>
         <p:nvSpPr>
-          <p:cNvPr id="4" name="正方形/長方形 3">
+          <p:cNvPr id="2" name="正方形/長方形 1">
             <a:extLst>
               <a:ext uri="{FF2B5EF4-FFF2-40B4-BE49-F238E27FC236}">
-                <a16:creationId xmlns:a16="http://schemas.microsoft.com/office/drawing/2014/main" id="{ED81001E-B6D3-99C8-5E0B-F466D9B756A5}"/>
+                <a16:creationId xmlns:a16="http://schemas.microsoft.com/office/drawing/2014/main" id="{10A76A69-7EBA-24AD-3805-2A372CFEEAE8}"/>
               </a:ext>
             </a:extLst>
           </p:cNvPr>
@@ -5390,14 +5390,14 @@
           </a:prstGeom>
           <a:gradFill>
             <a:gsLst>
-              <a:gs pos="60000">
-                <a:srgbClr val="5800E1"/>
+              <a:gs pos="50000">
+                <a:srgbClr val="6200E8"/>
               </a:gs>
-              <a:gs pos="5000">
-                <a:srgbClr val="EC008C"/>
+              <a:gs pos="10000">
+                <a:srgbClr val="EE00B0"/>
               </a:gs>
-              <a:gs pos="95000">
-                <a:srgbClr val="0086D6"/>
+              <a:gs pos="90000">
+                <a:srgbClr val="0095E5"/>
               </a:gs>
             </a:gsLst>
             <a:lin ang="1800000" scaled="0"/>
@@ -5427,7 +5427,7 @@
           <a:lstStyle/>
           <a:p>
             <a:pPr algn="ctr"/>
-            <a:endParaRPr kumimoji="1" lang="ja-JP" altLang="en-US"/>
+            <a:endParaRPr kumimoji="1" lang="ja-JP" altLang="en-US" dirty="0"/>
           </a:p>
         </p:txBody>
       </p:sp>
@@ -5445,7 +5445,7 @@
         </p:nvSpPr>
         <p:spPr>
           <a:xfrm>
-            <a:off x="4389" y="0"/>
+            <a:off x="7269" y="0"/>
             <a:ext cx="6858000" cy="9144000"/>
           </a:xfrm>
           <a:prstGeom prst="rect">
@@ -5971,105 +5971,6 @@
       </p:sp>
       <p:sp>
         <p:nvSpPr>
-          <p:cNvPr id="18" name="テキスト ボックス 17">
-            <a:extLst>
-              <a:ext uri="{FF2B5EF4-FFF2-40B4-BE49-F238E27FC236}">
-                <a16:creationId xmlns:a16="http://schemas.microsoft.com/office/drawing/2014/main" id="{1AA2F528-1AFC-8E42-75C8-73644041C22B}"/>
-              </a:ext>
-            </a:extLst>
-          </p:cNvPr>
-          <p:cNvSpPr txBox="1"/>
-          <p:nvPr/>
-        </p:nvSpPr>
-        <p:spPr>
-          <a:xfrm>
-            <a:off x="770844" y="610017"/>
-            <a:ext cx="2613216" cy="400110"/>
-          </a:xfrm>
-          <a:prstGeom prst="rect">
-            <a:avLst/>
-          </a:prstGeom>
-          <a:noFill/>
-        </p:spPr>
-        <p:txBody>
-          <a:bodyPr wrap="none" rtlCol="0">
-            <a:spAutoFit/>
-          </a:bodyPr>
-          <a:lstStyle/>
-          <a:p>
-            <a:r>
-              <a:rPr lang="en-US" altLang="ja-JP" sz="2000" dirty="0">
-                <a:latin typeface="IBM Plex Sans JP SemiBold" panose="020B0703050203000203" pitchFamily="50" charset="-128"/>
-                <a:ea typeface="IBM Plex Sans JP SemiBold" panose="020B0703050203000203" pitchFamily="50" charset="-128"/>
-              </a:rPr>
-              <a:t>3. FlexChroma HUB</a:t>
-            </a:r>
-            <a:endParaRPr kumimoji="1" lang="ja-JP" altLang="en-US" sz="2400" b="1" dirty="0">
-              <a:latin typeface="IBM Plex Sans JP SemiBold" panose="020B0703050203000203" pitchFamily="50" charset="-128"/>
-              <a:ea typeface="IBM Plex Sans JP SemiBold" panose="020B0703050203000203" pitchFamily="50" charset="-128"/>
-            </a:endParaRPr>
-          </a:p>
-        </p:txBody>
-      </p:sp>
-      <p:sp>
-        <p:nvSpPr>
-          <p:cNvPr id="19" name="テキスト ボックス 18">
-            <a:extLst>
-              <a:ext uri="{FF2B5EF4-FFF2-40B4-BE49-F238E27FC236}">
-                <a16:creationId xmlns:a16="http://schemas.microsoft.com/office/drawing/2014/main" id="{75DA2E9C-168B-3466-7614-65A6E3B87DA9}"/>
-              </a:ext>
-            </a:extLst>
-          </p:cNvPr>
-          <p:cNvSpPr txBox="1"/>
-          <p:nvPr/>
-        </p:nvSpPr>
-        <p:spPr>
-          <a:xfrm>
-            <a:off x="668508" y="1032957"/>
-            <a:ext cx="5649491" cy="400110"/>
-          </a:xfrm>
-          <a:prstGeom prst="rect">
-            <a:avLst/>
-          </a:prstGeom>
-          <a:noFill/>
-        </p:spPr>
-        <p:txBody>
-          <a:bodyPr wrap="square" rtlCol="0">
-            <a:spAutoFit/>
-          </a:bodyPr>
-          <a:lstStyle/>
-          <a:p>
-            <a:r>
-              <a:rPr lang="en-US" altLang="ja-JP" sz="1000" dirty="0">
-                <a:latin typeface="IBM Plex Sans JP" panose="020B0503050203000203" pitchFamily="50" charset="-128"/>
-                <a:ea typeface="IBM Plex Sans JP" panose="020B0503050203000203" pitchFamily="50" charset="-128"/>
-              </a:rPr>
-              <a:t>The </a:t>
-            </a:r>
-            <a:r>
-              <a:rPr lang="en-US" altLang="ja-JP" sz="1000" dirty="0">
-                <a:latin typeface="Segoe UI Semibold" panose="020B0702040204020203" pitchFamily="34" charset="0"/>
-                <a:ea typeface="IBM Plex Sans JP" panose="020B0503050203000203" pitchFamily="50" charset="-128"/>
-                <a:cs typeface="Segoe UI Semibold" panose="020B0702040204020203" pitchFamily="34" charset="0"/>
-              </a:rPr>
-              <a:t>FlexChroma HUB </a:t>
-            </a:r>
-            <a:r>
-              <a:rPr lang="en-US" altLang="ja-JP" sz="1000" dirty="0">
-                <a:latin typeface="IBM Plex Sans JP" panose="020B0503050203000203" pitchFamily="50" charset="-128"/>
-                <a:ea typeface="IBM Plex Sans JP" panose="020B0503050203000203" pitchFamily="50" charset="-128"/>
-              </a:rPr>
-              <a:t>is the main entry point on MakerWorld, providing access to all Series and external portals. If you are unsure where to start, open this model first.</a:t>
-            </a:r>
-            <a:endParaRPr kumimoji="1" lang="ja-JP" altLang="en-US" sz="500" b="1" dirty="0">
-              <a:latin typeface="IBM Plex Sans JP" panose="020B0503050203000203" pitchFamily="50" charset="-128"/>
-              <a:ea typeface="IBM Plex Sans JP" panose="020B0503050203000203" pitchFamily="50" charset="-128"/>
-            </a:endParaRPr>
-          </a:p>
-        </p:txBody>
-      </p:sp>
-      <p:sp>
-        <p:nvSpPr>
           <p:cNvPr id="20" name="楕円 19">
             <a:extLst>
               <a:ext uri="{FF2B5EF4-FFF2-40B4-BE49-F238E27FC236}">
@@ -6082,7 +5983,7 @@
         </p:nvSpPr>
         <p:spPr>
           <a:xfrm>
-            <a:off x="566175" y="2850671"/>
+            <a:off x="566175" y="2644750"/>
             <a:ext cx="204669" cy="204669"/>
           </a:xfrm>
           <a:prstGeom prst="ellipse">
@@ -6116,10 +6017,10 @@
       </p:sp>
       <p:sp>
         <p:nvSpPr>
-          <p:cNvPr id="21" name="テキスト ボックス 20">
+          <p:cNvPr id="3" name="テキスト ボックス 2">
             <a:extLst>
               <a:ext uri="{FF2B5EF4-FFF2-40B4-BE49-F238E27FC236}">
-                <a16:creationId xmlns:a16="http://schemas.microsoft.com/office/drawing/2014/main" id="{9A74ED78-4D09-93B7-5187-266F72FE0C06}"/>
+                <a16:creationId xmlns:a16="http://schemas.microsoft.com/office/drawing/2014/main" id="{BE721B25-AF01-358E-3AF5-DD53E680BEA4}"/>
               </a:ext>
             </a:extLst>
           </p:cNvPr>
@@ -6128,7 +6029,106 @@
         </p:nvSpPr>
         <p:spPr>
           <a:xfrm>
-            <a:off x="770844" y="2782786"/>
+            <a:off x="770844" y="610017"/>
+            <a:ext cx="2613216" cy="400110"/>
+          </a:xfrm>
+          <a:prstGeom prst="rect">
+            <a:avLst/>
+          </a:prstGeom>
+          <a:noFill/>
+        </p:spPr>
+        <p:txBody>
+          <a:bodyPr wrap="none" rtlCol="0">
+            <a:spAutoFit/>
+          </a:bodyPr>
+          <a:lstStyle/>
+          <a:p>
+            <a:r>
+              <a:rPr lang="en-US" altLang="ja-JP" sz="2000" dirty="0">
+                <a:latin typeface="IBM Plex Sans JP SemiBold" panose="020B0703050203000203" pitchFamily="50" charset="-128"/>
+                <a:ea typeface="IBM Plex Sans JP SemiBold" panose="020B0703050203000203" pitchFamily="50" charset="-128"/>
+              </a:rPr>
+              <a:t>3. FlexChroma HUB</a:t>
+            </a:r>
+            <a:endParaRPr kumimoji="1" lang="ja-JP" altLang="en-US" sz="2400" b="1" dirty="0">
+              <a:latin typeface="IBM Plex Sans JP SemiBold" panose="020B0703050203000203" pitchFamily="50" charset="-128"/>
+              <a:ea typeface="IBM Plex Sans JP SemiBold" panose="020B0703050203000203" pitchFamily="50" charset="-128"/>
+            </a:endParaRPr>
+          </a:p>
+        </p:txBody>
+      </p:sp>
+      <p:sp>
+        <p:nvSpPr>
+          <p:cNvPr id="11" name="テキスト ボックス 10">
+            <a:extLst>
+              <a:ext uri="{FF2B5EF4-FFF2-40B4-BE49-F238E27FC236}">
+                <a16:creationId xmlns:a16="http://schemas.microsoft.com/office/drawing/2014/main" id="{A4E1C011-7C36-5F21-4954-43ED394E75BA}"/>
+              </a:ext>
+            </a:extLst>
+          </p:cNvPr>
+          <p:cNvSpPr txBox="1"/>
+          <p:nvPr/>
+        </p:nvSpPr>
+        <p:spPr>
+          <a:xfrm>
+            <a:off x="668508" y="950188"/>
+            <a:ext cx="5649491" cy="400110"/>
+          </a:xfrm>
+          <a:prstGeom prst="rect">
+            <a:avLst/>
+          </a:prstGeom>
+          <a:noFill/>
+        </p:spPr>
+        <p:txBody>
+          <a:bodyPr wrap="square" rtlCol="0">
+            <a:spAutoFit/>
+          </a:bodyPr>
+          <a:lstStyle/>
+          <a:p>
+            <a:r>
+              <a:rPr lang="en-US" altLang="ja-JP" sz="1000" dirty="0">
+                <a:latin typeface="IBM Plex Sans JP" panose="020B0503050203000203" pitchFamily="50" charset="-128"/>
+                <a:ea typeface="IBM Plex Sans JP" panose="020B0503050203000203" pitchFamily="50" charset="-128"/>
+              </a:rPr>
+              <a:t>The </a:t>
+            </a:r>
+            <a:r>
+              <a:rPr lang="en-US" altLang="ja-JP" sz="1000" dirty="0">
+                <a:latin typeface="Segoe UI Semibold" panose="020B0702040204020203" pitchFamily="34" charset="0"/>
+                <a:ea typeface="IBM Plex Sans JP" panose="020B0503050203000203" pitchFamily="50" charset="-128"/>
+                <a:cs typeface="Segoe UI Semibold" panose="020B0702040204020203" pitchFamily="34" charset="0"/>
+              </a:rPr>
+              <a:t>FlexChroma HUB </a:t>
+            </a:r>
+            <a:r>
+              <a:rPr lang="en-US" altLang="ja-JP" sz="1000" dirty="0">
+                <a:latin typeface="IBM Plex Sans JP" panose="020B0503050203000203" pitchFamily="50" charset="-128"/>
+                <a:ea typeface="IBM Plex Sans JP" panose="020B0503050203000203" pitchFamily="50" charset="-128"/>
+              </a:rPr>
+              <a:t>is the main entry point on MakerWorld, providing access to all Series and external portals. If you are unsure where to start, open this model first.</a:t>
+            </a:r>
+            <a:endParaRPr kumimoji="1" lang="ja-JP" altLang="en-US" sz="500" b="1" dirty="0">
+              <a:latin typeface="IBM Plex Sans JP" panose="020B0503050203000203" pitchFamily="50" charset="-128"/>
+              <a:ea typeface="IBM Plex Sans JP" panose="020B0503050203000203" pitchFamily="50" charset="-128"/>
+            </a:endParaRPr>
+          </a:p>
+        </p:txBody>
+      </p:sp>
+      <p:sp>
+        <p:nvSpPr>
+          <p:cNvPr id="12" name="テキスト ボックス 11">
+            <a:extLst>
+              <a:ext uri="{FF2B5EF4-FFF2-40B4-BE49-F238E27FC236}">
+                <a16:creationId xmlns:a16="http://schemas.microsoft.com/office/drawing/2014/main" id="{C2FB48DC-10F4-2185-6930-78B6977A0BD2}"/>
+              </a:ext>
+            </a:extLst>
+          </p:cNvPr>
+          <p:cNvSpPr txBox="1"/>
+          <p:nvPr/>
+        </p:nvSpPr>
+        <p:spPr>
+          <a:xfrm>
+            <a:off x="770844" y="2574192"/>
             <a:ext cx="2379177" cy="400110"/>
           </a:xfrm>
           <a:prstGeom prst="rect">
@@ -6158,10 +6158,10 @@
       </p:sp>
       <p:sp>
         <p:nvSpPr>
-          <p:cNvPr id="22" name="テキスト ボックス 21">
+          <p:cNvPr id="23" name="テキスト ボックス 22">
             <a:extLst>
               <a:ext uri="{FF2B5EF4-FFF2-40B4-BE49-F238E27FC236}">
-                <a16:creationId xmlns:a16="http://schemas.microsoft.com/office/drawing/2014/main" id="{7BC3A39D-2C74-E00C-4387-9CC908F40D8B}"/>
+                <a16:creationId xmlns:a16="http://schemas.microsoft.com/office/drawing/2014/main" id="{83844719-2CDC-AB32-6FBF-9DC0B5690794}"/>
               </a:ext>
             </a:extLst>
           </p:cNvPr>
@@ -6170,7 +6170,7 @@
         </p:nvSpPr>
         <p:spPr>
           <a:xfrm>
-            <a:off x="668509" y="3162437"/>
+            <a:off x="668509" y="2953843"/>
             <a:ext cx="5642222" cy="1169551"/>
           </a:xfrm>
           <a:prstGeom prst="rect">
@@ -6231,10 +6231,10 @@
       </p:sp>
       <p:sp>
         <p:nvSpPr>
-          <p:cNvPr id="25" name="テキスト ボックス 24">
+          <p:cNvPr id="24" name="テキスト ボックス 23">
             <a:extLst>
               <a:ext uri="{FF2B5EF4-FFF2-40B4-BE49-F238E27FC236}">
-                <a16:creationId xmlns:a16="http://schemas.microsoft.com/office/drawing/2014/main" id="{45CC0883-1DA5-4A86-6756-80C64F8D1477}"/>
+                <a16:creationId xmlns:a16="http://schemas.microsoft.com/office/drawing/2014/main" id="{2FB90F5E-7734-F19F-FF8C-E8AC00A4C515}"/>
               </a:ext>
             </a:extLst>
           </p:cNvPr>
@@ -6243,7 +6243,7 @@
         </p:nvSpPr>
         <p:spPr>
           <a:xfrm>
-            <a:off x="675778" y="5274317"/>
+            <a:off x="668508" y="5046262"/>
             <a:ext cx="5642222" cy="246221"/>
           </a:xfrm>
           <a:prstGeom prst="rect">
@@ -6269,40 +6269,57 @@
       </p:sp>
       <p:pic>
         <p:nvPicPr>
-          <p:cNvPr id="29" name="図 28">
+          <p:cNvPr id="26" name="図 25">
             <a:extLst>
               <a:ext uri="{FF2B5EF4-FFF2-40B4-BE49-F238E27FC236}">
-                <a16:creationId xmlns:a16="http://schemas.microsoft.com/office/drawing/2014/main" id="{7F6D8160-20C1-33BC-415D-25B50E830B7E}"/>
+                <a16:creationId xmlns:a16="http://schemas.microsoft.com/office/drawing/2014/main" id="{23874BB3-E688-0DEB-EE2D-8445FA682C78}"/>
               </a:ext>
             </a:extLst>
           </p:cNvPr>
           <p:cNvPicPr>
-            <a:picLocks noChangeAspect="1"/>
+            <a:picLocks noChangeAspect="1" noChangeArrowheads="1"/>
           </p:cNvPicPr>
           <p:nvPr/>
         </p:nvPicPr>
         <p:blipFill>
-          <a:blip r:embed="rId2"/>
+          <a:blip r:embed="rId2">
+            <a:extLst>
+              <a:ext uri="{28A0092B-C50C-407E-A947-70E740481C1C}">
+                <a14:useLocalDpi xmlns:a14="http://schemas.microsoft.com/office/drawing/2010/main" val="0"/>
+              </a:ext>
+            </a:extLst>
+          </a:blip>
+          <a:srcRect/>
           <a:stretch>
             <a:fillRect/>
           </a:stretch>
         </p:blipFill>
-        <p:spPr>
-          <a:xfrm>
-            <a:off x="554537" y="1452789"/>
-            <a:ext cx="5770732" cy="1233898"/>
+        <p:spPr bwMode="auto">
+          <a:xfrm>
+            <a:off x="770844" y="5325050"/>
+            <a:ext cx="5264196" cy="3270393"/>
           </a:xfrm>
           <a:prstGeom prst="rect">
             <a:avLst/>
           </a:prstGeom>
+          <a:noFill/>
+          <a:extLst>
+            <a:ext uri="{909E8E84-426E-40DD-AFC4-6F175D3DCCD1}">
+              <a14:hiddenFill xmlns:a14="http://schemas.microsoft.com/office/drawing/2010/main">
+                <a:solidFill>
+                  <a:srgbClr val="FFFFFF"/>
+                </a:solidFill>
+              </a14:hiddenFill>
+            </a:ext>
+          </a:extLst>
         </p:spPr>
       </p:pic>
       <p:pic>
         <p:nvPicPr>
-          <p:cNvPr id="31" name="図 30">
+          <p:cNvPr id="27" name="図 26">
             <a:extLst>
               <a:ext uri="{FF2B5EF4-FFF2-40B4-BE49-F238E27FC236}">
-                <a16:creationId xmlns:a16="http://schemas.microsoft.com/office/drawing/2014/main" id="{08263E98-8A17-21DA-72A0-4FFFE32AE3BA}"/>
+                <a16:creationId xmlns:a16="http://schemas.microsoft.com/office/drawing/2014/main" id="{EBD6A209-2D06-7463-8165-69E2412B2F21}"/>
               </a:ext>
             </a:extLst>
           </p:cNvPr>
@@ -6319,8 +6336,8 @@
         </p:blipFill>
         <p:spPr>
           <a:xfrm>
-            <a:off x="554537" y="4296577"/>
-            <a:ext cx="5756193" cy="888877"/>
+            <a:off x="709884" y="4100534"/>
+            <a:ext cx="5325156" cy="831813"/>
           </a:xfrm>
           <a:prstGeom prst="rect">
             <a:avLst/>
@@ -6329,32 +6346,49 @@
       </p:pic>
       <p:pic>
         <p:nvPicPr>
-          <p:cNvPr id="33" name="図 32">
+          <p:cNvPr id="28" name="図 27">
             <a:extLst>
               <a:ext uri="{FF2B5EF4-FFF2-40B4-BE49-F238E27FC236}">
-                <a16:creationId xmlns:a16="http://schemas.microsoft.com/office/drawing/2014/main" id="{48D95018-44AF-5B79-3242-99208120D247}"/>
+                <a16:creationId xmlns:a16="http://schemas.microsoft.com/office/drawing/2014/main" id="{1382655B-80C9-15F1-61E0-4D073DBA1664}"/>
               </a:ext>
             </a:extLst>
           </p:cNvPr>
           <p:cNvPicPr>
-            <a:picLocks noChangeAspect="1"/>
+            <a:picLocks noChangeAspect="1" noChangeArrowheads="1"/>
           </p:cNvPicPr>
           <p:nvPr/>
         </p:nvPicPr>
-        <p:blipFill>
-          <a:blip r:embed="rId4"/>
+        <p:blipFill rotWithShape="1">
+          <a:blip r:embed="rId4">
+            <a:extLst>
+              <a:ext uri="{28A0092B-C50C-407E-A947-70E740481C1C}">
+                <a14:useLocalDpi xmlns:a14="http://schemas.microsoft.com/office/drawing/2010/main" val="0"/>
+              </a:ext>
+            </a:extLst>
+          </a:blip>
+          <a:srcRect l="1747" r="2095" b="10009"/>
           <a:stretch>
             <a:fillRect/>
           </a:stretch>
         </p:blipFill>
-        <p:spPr>
-          <a:xfrm>
-            <a:off x="652060" y="5505815"/>
-            <a:ext cx="5464000" cy="3048554"/>
+        <p:spPr bwMode="auto">
+          <a:xfrm>
+            <a:off x="1091915" y="1374795"/>
+            <a:ext cx="4561094" cy="1014727"/>
           </a:xfrm>
           <a:prstGeom prst="rect">
             <a:avLst/>
           </a:prstGeom>
+          <a:noFill/>
+          <a:extLst>
+            <a:ext uri="{909E8E84-426E-40DD-AFC4-6F175D3DCCD1}">
+              <a14:hiddenFill xmlns:a14="http://schemas.microsoft.com/office/drawing/2010/main">
+                <a:solidFill>
+                  <a:srgbClr val="FFFFFF"/>
+                </a:solidFill>
+              </a14:hiddenFill>
+            </a:ext>
+          </a:extLst>
         </p:spPr>
       </p:pic>
     </p:spTree>
@@ -6395,10 +6429,10 @@
       </p:grpSpPr>
       <p:sp>
         <p:nvSpPr>
-          <p:cNvPr id="4" name="正方形/長方形 3">
+          <p:cNvPr id="30" name="正方形/長方形 29">
             <a:extLst>
               <a:ext uri="{FF2B5EF4-FFF2-40B4-BE49-F238E27FC236}">
-                <a16:creationId xmlns:a16="http://schemas.microsoft.com/office/drawing/2014/main" id="{1053F3CB-B9EE-984E-2589-EA35449EF839}"/>
+                <a16:creationId xmlns:a16="http://schemas.microsoft.com/office/drawing/2014/main" id="{76991F79-EF9D-214D-22CC-3EE4375C1316}"/>
               </a:ext>
             </a:extLst>
           </p:cNvPr>
@@ -6407,22 +6441,22 @@
         </p:nvSpPr>
         <p:spPr>
           <a:xfrm>
-            <a:off x="0" y="0"/>
-            <a:ext cx="6858000" cy="9144000"/>
+            <a:off x="51086" y="45268"/>
+            <a:ext cx="6790099" cy="9053465"/>
           </a:xfrm>
           <a:prstGeom prst="rect">
             <a:avLst/>
           </a:prstGeom>
           <a:gradFill>
             <a:gsLst>
-              <a:gs pos="60000">
-                <a:srgbClr val="5800E1"/>
+              <a:gs pos="50000">
+                <a:srgbClr val="6200E8"/>
               </a:gs>
-              <a:gs pos="5000">
-                <a:srgbClr val="EC008C"/>
+              <a:gs pos="10000">
+                <a:srgbClr val="EE00B0"/>
               </a:gs>
-              <a:gs pos="95000">
-                <a:srgbClr val="0086D6"/>
+              <a:gs pos="90000">
+                <a:srgbClr val="0095E5"/>
               </a:gs>
             </a:gsLst>
             <a:lin ang="1800000" scaled="0"/>
@@ -6452,7 +6486,7 @@
           <a:lstStyle/>
           <a:p>
             <a:pPr algn="ctr"/>
-            <a:endParaRPr kumimoji="1" lang="ja-JP" altLang="en-US"/>
+            <a:endParaRPr kumimoji="1" lang="ja-JP" altLang="en-US" dirty="0"/>
           </a:p>
         </p:txBody>
       </p:sp>
@@ -6470,7 +6504,7 @@
         </p:nvSpPr>
         <p:spPr>
           <a:xfrm>
-            <a:off x="4389" y="0"/>
+            <a:off x="17051" y="5531"/>
             <a:ext cx="6858000" cy="9144000"/>
           </a:xfrm>
           <a:prstGeom prst="rect">
@@ -6996,203 +7030,6 @@
       </p:sp>
       <p:sp>
         <p:nvSpPr>
-          <p:cNvPr id="18" name="テキスト ボックス 17">
-            <a:extLst>
-              <a:ext uri="{FF2B5EF4-FFF2-40B4-BE49-F238E27FC236}">
-                <a16:creationId xmlns:a16="http://schemas.microsoft.com/office/drawing/2014/main" id="{72E9D853-4C50-6454-71B3-5C48ECA0EAD9}"/>
-              </a:ext>
-            </a:extLst>
-          </p:cNvPr>
-          <p:cNvSpPr txBox="1"/>
-          <p:nvPr/>
-        </p:nvSpPr>
-        <p:spPr>
-          <a:xfrm>
-            <a:off x="770844" y="610017"/>
-            <a:ext cx="2739853" cy="400110"/>
-          </a:xfrm>
-          <a:prstGeom prst="rect">
-            <a:avLst/>
-          </a:prstGeom>
-          <a:noFill/>
-        </p:spPr>
-        <p:txBody>
-          <a:bodyPr wrap="none" rtlCol="0">
-            <a:spAutoFit/>
-          </a:bodyPr>
-          <a:lstStyle/>
-          <a:p>
-            <a:r>
-              <a:rPr lang="en-US" altLang="ja-JP" sz="2000" dirty="0">
-                <a:latin typeface="IBM Plex Sans JP SemiBold" panose="020B0703050203000203" pitchFamily="50" charset="-128"/>
-                <a:ea typeface="IBM Plex Sans JP SemiBold" panose="020B0703050203000203" pitchFamily="50" charset="-128"/>
-              </a:rPr>
-              <a:t>5. Gradient Filament</a:t>
-            </a:r>
-            <a:endParaRPr kumimoji="1" lang="ja-JP" altLang="en-US" sz="2400" b="1" dirty="0">
-              <a:latin typeface="IBM Plex Sans JP SemiBold" panose="020B0703050203000203" pitchFamily="50" charset="-128"/>
-              <a:ea typeface="IBM Plex Sans JP SemiBold" panose="020B0703050203000203" pitchFamily="50" charset="-128"/>
-            </a:endParaRPr>
-          </a:p>
-        </p:txBody>
-      </p:sp>
-      <p:sp>
-        <p:nvSpPr>
-          <p:cNvPr id="19" name="テキスト ボックス 18">
-            <a:extLst>
-              <a:ext uri="{FF2B5EF4-FFF2-40B4-BE49-F238E27FC236}">
-                <a16:creationId xmlns:a16="http://schemas.microsoft.com/office/drawing/2014/main" id="{7CCD7C32-49B9-6248-827D-772DCDA5E4CB}"/>
-              </a:ext>
-            </a:extLst>
-          </p:cNvPr>
-          <p:cNvSpPr txBox="1"/>
-          <p:nvPr/>
-        </p:nvSpPr>
-        <p:spPr>
-          <a:xfrm>
-            <a:off x="668508" y="1032957"/>
-            <a:ext cx="5649491" cy="861774"/>
-          </a:xfrm>
-          <a:prstGeom prst="rect">
-            <a:avLst/>
-          </a:prstGeom>
-          <a:noFill/>
-        </p:spPr>
-        <p:txBody>
-          <a:bodyPr wrap="square" rtlCol="0">
-            <a:spAutoFit/>
-          </a:bodyPr>
-          <a:lstStyle/>
-          <a:p>
-            <a:r>
-              <a:rPr lang="en-US" altLang="ja-JP" sz="1000" dirty="0">
-                <a:latin typeface="IBM Plex Sans JP" panose="020B0503050203000203" pitchFamily="50" charset="-128"/>
-                <a:ea typeface="IBM Plex Sans JP" panose="020B0503050203000203" pitchFamily="50" charset="-128"/>
-              </a:rPr>
-              <a:t>The Gradient Filament Series provides multiple color-changing Profiles and Plates with different cycle counts. Details vary by model, so please refer to each model’s description.</a:t>
-            </a:r>
-          </a:p>
-          <a:p>
-            <a:endParaRPr lang="en-US" altLang="ja-JP" sz="1000" dirty="0">
-              <a:latin typeface="IBM Plex Sans JP" panose="020B0503050203000203" pitchFamily="50" charset="-128"/>
-              <a:ea typeface="IBM Plex Sans JP" panose="020B0503050203000203" pitchFamily="50" charset="-128"/>
-            </a:endParaRPr>
-          </a:p>
-          <a:p>
-            <a:r>
-              <a:rPr lang="en-US" altLang="ja-JP" sz="1000" dirty="0">
-                <a:latin typeface="IBM Plex Sans JP" panose="020B0503050203000203" pitchFamily="50" charset="-128"/>
-                <a:ea typeface="IBM Plex Sans JP" panose="020B0503050203000203" pitchFamily="50" charset="-128"/>
-              </a:rPr>
-              <a:t>Example: To create a fast-cycle gradient filament using cyan and magenta, select an S4 Model, choose a 4-cycle Plate, and use the Vivid curve Profile due to the high color contrast.</a:t>
-            </a:r>
-            <a:endParaRPr kumimoji="1" lang="ja-JP" altLang="en-US" sz="1000" b="1" dirty="0">
-              <a:latin typeface="IBM Plex Sans JP" panose="020B0503050203000203" pitchFamily="50" charset="-128"/>
-              <a:ea typeface="IBM Plex Sans JP" panose="020B0503050203000203" pitchFamily="50" charset="-128"/>
-            </a:endParaRPr>
-          </a:p>
-        </p:txBody>
-      </p:sp>
-      <p:sp>
-        <p:nvSpPr>
-          <p:cNvPr id="25" name="テキスト ボックス 24">
-            <a:extLst>
-              <a:ext uri="{FF2B5EF4-FFF2-40B4-BE49-F238E27FC236}">
-                <a16:creationId xmlns:a16="http://schemas.microsoft.com/office/drawing/2014/main" id="{BAF97127-F08A-576F-5EC3-785D677AF148}"/>
-              </a:ext>
-            </a:extLst>
-          </p:cNvPr>
-          <p:cNvSpPr txBox="1"/>
-          <p:nvPr/>
-        </p:nvSpPr>
-        <p:spPr>
-          <a:xfrm>
-            <a:off x="675778" y="3011477"/>
-            <a:ext cx="5642222" cy="246221"/>
-          </a:xfrm>
-          <a:prstGeom prst="rect">
-            <a:avLst/>
-          </a:prstGeom>
-          <a:noFill/>
-        </p:spPr>
-        <p:txBody>
-          <a:bodyPr wrap="square" rtlCol="0">
-            <a:spAutoFit/>
-          </a:bodyPr>
-          <a:lstStyle/>
-          <a:p>
-            <a:r>
-              <a:rPr lang="en-US" altLang="ja-JP" sz="1000" dirty="0">
-                <a:latin typeface="IBM Plex Sans JP" panose="020B0503050203000203" pitchFamily="50" charset="-128"/>
-                <a:ea typeface="IBM Plex Sans JP" panose="020B0503050203000203" pitchFamily="50" charset="-128"/>
-              </a:rPr>
-              <a:t>The following is the model configuration for Gradient Filament.</a:t>
-            </a:r>
-          </a:p>
-        </p:txBody>
-      </p:sp>
-      <p:pic>
-        <p:nvPicPr>
-          <p:cNvPr id="3" name="図 2">
-            <a:extLst>
-              <a:ext uri="{FF2B5EF4-FFF2-40B4-BE49-F238E27FC236}">
-                <a16:creationId xmlns:a16="http://schemas.microsoft.com/office/drawing/2014/main" id="{80DBFA91-7DDA-D8B6-438A-A1F8AA48BC1F}"/>
-              </a:ext>
-            </a:extLst>
-          </p:cNvPr>
-          <p:cNvPicPr>
-            <a:picLocks noChangeAspect="1"/>
-          </p:cNvPicPr>
-          <p:nvPr/>
-        </p:nvPicPr>
-        <p:blipFill>
-          <a:blip r:embed="rId2"/>
-          <a:stretch>
-            <a:fillRect/>
-          </a:stretch>
-        </p:blipFill>
-        <p:spPr>
-          <a:xfrm>
-            <a:off x="539999" y="1823254"/>
-            <a:ext cx="5695701" cy="1013806"/>
-          </a:xfrm>
-          <a:prstGeom prst="rect">
-            <a:avLst/>
-          </a:prstGeom>
-        </p:spPr>
-      </p:pic>
-      <p:pic>
-        <p:nvPicPr>
-          <p:cNvPr id="12" name="図 11">
-            <a:extLst>
-              <a:ext uri="{FF2B5EF4-FFF2-40B4-BE49-F238E27FC236}">
-                <a16:creationId xmlns:a16="http://schemas.microsoft.com/office/drawing/2014/main" id="{CBEF07CB-20DE-945B-B4BB-0251C141E305}"/>
-              </a:ext>
-            </a:extLst>
-          </p:cNvPr>
-          <p:cNvPicPr>
-            <a:picLocks noChangeAspect="1"/>
-          </p:cNvPicPr>
-          <p:nvPr/>
-        </p:nvPicPr>
-        <p:blipFill>
-          <a:blip r:embed="rId3"/>
-          <a:stretch>
-            <a:fillRect/>
-          </a:stretch>
-        </p:blipFill>
-        <p:spPr>
-          <a:xfrm>
-            <a:off x="638323" y="3295319"/>
-            <a:ext cx="5588622" cy="3853245"/>
-          </a:xfrm>
-          <a:prstGeom prst="rect">
-            <a:avLst/>
-          </a:prstGeom>
-        </p:spPr>
-      </p:pic>
-      <p:sp>
-        <p:nvSpPr>
           <p:cNvPr id="2" name="楕円 1">
             <a:extLst>
               <a:ext uri="{FF2B5EF4-FFF2-40B4-BE49-F238E27FC236}">
@@ -7239,10 +7076,10 @@
       </p:sp>
       <p:sp>
         <p:nvSpPr>
-          <p:cNvPr id="11" name="テキスト ボックス 10">
+          <p:cNvPr id="31" name="テキスト ボックス 30">
             <a:extLst>
               <a:ext uri="{FF2B5EF4-FFF2-40B4-BE49-F238E27FC236}">
-                <a16:creationId xmlns:a16="http://schemas.microsoft.com/office/drawing/2014/main" id="{3502BD5F-204F-ADDD-3A77-54D9B2345EC1}"/>
+                <a16:creationId xmlns:a16="http://schemas.microsoft.com/office/drawing/2014/main" id="{48078D51-1E2C-A979-AB68-98E18890C6F1}"/>
               </a:ext>
             </a:extLst>
           </p:cNvPr>
@@ -7251,6 +7088,143 @@
         </p:nvSpPr>
         <p:spPr>
           <a:xfrm>
+            <a:off x="770844" y="610017"/>
+            <a:ext cx="2739853" cy="400110"/>
+          </a:xfrm>
+          <a:prstGeom prst="rect">
+            <a:avLst/>
+          </a:prstGeom>
+          <a:noFill/>
+        </p:spPr>
+        <p:txBody>
+          <a:bodyPr wrap="none" rtlCol="0">
+            <a:spAutoFit/>
+          </a:bodyPr>
+          <a:lstStyle/>
+          <a:p>
+            <a:r>
+              <a:rPr lang="en-US" altLang="ja-JP" sz="2000" dirty="0">
+                <a:latin typeface="IBM Plex Sans JP SemiBold" panose="020B0703050203000203" pitchFamily="50" charset="-128"/>
+                <a:ea typeface="IBM Plex Sans JP SemiBold" panose="020B0703050203000203" pitchFamily="50" charset="-128"/>
+              </a:rPr>
+              <a:t>5. Gradient Filament</a:t>
+            </a:r>
+            <a:endParaRPr kumimoji="1" lang="ja-JP" altLang="en-US" sz="2400" b="1" dirty="0">
+              <a:latin typeface="IBM Plex Sans JP SemiBold" panose="020B0703050203000203" pitchFamily="50" charset="-128"/>
+              <a:ea typeface="IBM Plex Sans JP SemiBold" panose="020B0703050203000203" pitchFamily="50" charset="-128"/>
+            </a:endParaRPr>
+          </a:p>
+        </p:txBody>
+      </p:sp>
+      <p:sp>
+        <p:nvSpPr>
+          <p:cNvPr id="32" name="テキスト ボックス 31">
+            <a:extLst>
+              <a:ext uri="{FF2B5EF4-FFF2-40B4-BE49-F238E27FC236}">
+                <a16:creationId xmlns:a16="http://schemas.microsoft.com/office/drawing/2014/main" id="{F974243A-BE39-3111-BDC0-1688AF9439B9}"/>
+              </a:ext>
+            </a:extLst>
+          </p:cNvPr>
+          <p:cNvSpPr txBox="1"/>
+          <p:nvPr/>
+        </p:nvSpPr>
+        <p:spPr>
+          <a:xfrm>
+            <a:off x="668508" y="1032957"/>
+            <a:ext cx="5649491" cy="861774"/>
+          </a:xfrm>
+          <a:prstGeom prst="rect">
+            <a:avLst/>
+          </a:prstGeom>
+          <a:noFill/>
+        </p:spPr>
+        <p:txBody>
+          <a:bodyPr wrap="square" rtlCol="0">
+            <a:spAutoFit/>
+          </a:bodyPr>
+          <a:lstStyle/>
+          <a:p>
+            <a:r>
+              <a:rPr lang="en-US" altLang="ja-JP" sz="1000" dirty="0">
+                <a:latin typeface="IBM Plex Sans JP" panose="020B0503050203000203" pitchFamily="50" charset="-128"/>
+                <a:ea typeface="IBM Plex Sans JP" panose="020B0503050203000203" pitchFamily="50" charset="-128"/>
+              </a:rPr>
+              <a:t>The Gradient Filament Series provides multiple color-changing Profiles and Plates with different cycle counts. Details vary by model, so please refer to each model’s description.</a:t>
+            </a:r>
+          </a:p>
+          <a:p>
+            <a:endParaRPr lang="en-US" altLang="ja-JP" sz="1000" dirty="0">
+              <a:latin typeface="IBM Plex Sans JP" panose="020B0503050203000203" pitchFamily="50" charset="-128"/>
+              <a:ea typeface="IBM Plex Sans JP" panose="020B0503050203000203" pitchFamily="50" charset="-128"/>
+            </a:endParaRPr>
+          </a:p>
+          <a:p>
+            <a:r>
+              <a:rPr lang="en-US" altLang="ja-JP" sz="1000" dirty="0">
+                <a:latin typeface="IBM Plex Sans JP" panose="020B0503050203000203" pitchFamily="50" charset="-128"/>
+                <a:ea typeface="IBM Plex Sans JP" panose="020B0503050203000203" pitchFamily="50" charset="-128"/>
+              </a:rPr>
+              <a:t>Example: To create a fast-cycle gradient filament using cyan and magenta, select an S4 Model, choose a 4-cycle Plate, and use the Vivid curve Profile due to the high color contrast.</a:t>
+            </a:r>
+            <a:endParaRPr kumimoji="1" lang="ja-JP" altLang="en-US" sz="1000" b="1" dirty="0">
+              <a:latin typeface="IBM Plex Sans JP" panose="020B0503050203000203" pitchFamily="50" charset="-128"/>
+              <a:ea typeface="IBM Plex Sans JP" panose="020B0503050203000203" pitchFamily="50" charset="-128"/>
+            </a:endParaRPr>
+          </a:p>
+        </p:txBody>
+      </p:sp>
+      <p:sp>
+        <p:nvSpPr>
+          <p:cNvPr id="33" name="テキスト ボックス 32">
+            <a:extLst>
+              <a:ext uri="{FF2B5EF4-FFF2-40B4-BE49-F238E27FC236}">
+                <a16:creationId xmlns:a16="http://schemas.microsoft.com/office/drawing/2014/main" id="{117BFD2F-556D-35B9-3D3B-9934FD82183A}"/>
+              </a:ext>
+            </a:extLst>
+          </p:cNvPr>
+          <p:cNvSpPr txBox="1"/>
+          <p:nvPr/>
+        </p:nvSpPr>
+        <p:spPr>
+          <a:xfrm>
+            <a:off x="675778" y="3011477"/>
+            <a:ext cx="5642222" cy="246221"/>
+          </a:xfrm>
+          <a:prstGeom prst="rect">
+            <a:avLst/>
+          </a:prstGeom>
+          <a:noFill/>
+        </p:spPr>
+        <p:txBody>
+          <a:bodyPr wrap="square" rtlCol="0">
+            <a:spAutoFit/>
+          </a:bodyPr>
+          <a:lstStyle/>
+          <a:p>
+            <a:r>
+              <a:rPr lang="en-US" altLang="ja-JP" sz="1000" dirty="0">
+                <a:latin typeface="IBM Plex Sans JP" panose="020B0503050203000203" pitchFamily="50" charset="-128"/>
+                <a:ea typeface="IBM Plex Sans JP" panose="020B0503050203000203" pitchFamily="50" charset="-128"/>
+              </a:rPr>
+              <a:t>The following is the model configuration for Gradient Filament.</a:t>
+            </a:r>
+          </a:p>
+        </p:txBody>
+      </p:sp>
+      <p:sp>
+        <p:nvSpPr>
+          <p:cNvPr id="34" name="テキスト ボックス 33">
+            <a:extLst>
+              <a:ext uri="{FF2B5EF4-FFF2-40B4-BE49-F238E27FC236}">
+                <a16:creationId xmlns:a16="http://schemas.microsoft.com/office/drawing/2014/main" id="{2D9D80EE-7B63-AF1B-1B3A-EA5DC86D0696}"/>
+              </a:ext>
+            </a:extLst>
+          </p:cNvPr>
+          <p:cNvSpPr txBox="1"/>
+          <p:nvPr/>
+        </p:nvSpPr>
+        <p:spPr>
+          <a:xfrm>
             <a:off x="778114" y="7268269"/>
             <a:ext cx="1923925" cy="338554"/>
           </a:xfrm>
@@ -7281,10 +7255,10 @@
       </p:sp>
       <p:sp>
         <p:nvSpPr>
-          <p:cNvPr id="20" name="テキスト ボックス 19">
+          <p:cNvPr id="35" name="テキスト ボックス 34">
             <a:extLst>
               <a:ext uri="{FF2B5EF4-FFF2-40B4-BE49-F238E27FC236}">
-                <a16:creationId xmlns:a16="http://schemas.microsoft.com/office/drawing/2014/main" id="{73B718F9-0F82-AC1A-9FBD-6C3D9A4B48C3}"/>
+                <a16:creationId xmlns:a16="http://schemas.microsoft.com/office/drawing/2014/main" id="{D11D4DCF-F707-995B-6436-8A7DA1522C33}"/>
               </a:ext>
             </a:extLst>
           </p:cNvPr>
@@ -7332,6 +7306,83 @@
           </a:p>
         </p:txBody>
       </p:sp>
+      <p:pic>
+        <p:nvPicPr>
+          <p:cNvPr id="36" name="図 35">
+            <a:extLst>
+              <a:ext uri="{FF2B5EF4-FFF2-40B4-BE49-F238E27FC236}">
+                <a16:creationId xmlns:a16="http://schemas.microsoft.com/office/drawing/2014/main" id="{4A2E15D4-B4F1-FC30-49B0-998127E330E2}"/>
+              </a:ext>
+            </a:extLst>
+          </p:cNvPr>
+          <p:cNvPicPr>
+            <a:picLocks noChangeAspect="1"/>
+          </p:cNvPicPr>
+          <p:nvPr/>
+        </p:nvPicPr>
+        <p:blipFill>
+          <a:blip r:embed="rId2"/>
+          <a:stretch>
+            <a:fillRect/>
+          </a:stretch>
+        </p:blipFill>
+        <p:spPr>
+          <a:xfrm>
+            <a:off x="633073" y="1909692"/>
+            <a:ext cx="5588622" cy="913760"/>
+          </a:xfrm>
+          <a:prstGeom prst="rect">
+            <a:avLst/>
+          </a:prstGeom>
+        </p:spPr>
+      </p:pic>
+      <p:pic>
+        <p:nvPicPr>
+          <p:cNvPr id="37" name="図 36">
+            <a:extLst>
+              <a:ext uri="{FF2B5EF4-FFF2-40B4-BE49-F238E27FC236}">
+                <a16:creationId xmlns:a16="http://schemas.microsoft.com/office/drawing/2014/main" id="{B45BD161-DA0D-5CE8-8162-DC38C4F2F313}"/>
+              </a:ext>
+            </a:extLst>
+          </p:cNvPr>
+          <p:cNvPicPr>
+            <a:picLocks noChangeAspect="1" noChangeArrowheads="1"/>
+          </p:cNvPicPr>
+          <p:nvPr/>
+        </p:nvPicPr>
+        <p:blipFill>
+          <a:blip r:embed="rId3">
+            <a:extLst>
+              <a:ext uri="{28A0092B-C50C-407E-A947-70E740481C1C}">
+                <a14:useLocalDpi xmlns:a14="http://schemas.microsoft.com/office/drawing/2010/main" val="0"/>
+              </a:ext>
+            </a:extLst>
+          </a:blip>
+          <a:srcRect/>
+          <a:stretch>
+            <a:fillRect/>
+          </a:stretch>
+        </p:blipFill>
+        <p:spPr bwMode="auto">
+          <a:xfrm>
+            <a:off x="587545" y="3188861"/>
+            <a:ext cx="5679677" cy="4002590"/>
+          </a:xfrm>
+          <a:prstGeom prst="rect">
+            <a:avLst/>
+          </a:prstGeom>
+          <a:noFill/>
+          <a:extLst>
+            <a:ext uri="{909E8E84-426E-40DD-AFC4-6F175D3DCCD1}">
+              <a14:hiddenFill xmlns:a14="http://schemas.microsoft.com/office/drawing/2010/main">
+                <a:solidFill>
+                  <a:srgbClr val="FFFFFF"/>
+                </a:solidFill>
+              </a14:hiddenFill>
+            </a:ext>
+          </a:extLst>
+        </p:spPr>
+      </p:pic>
     </p:spTree>
     <p:extLst>
       <p:ext uri="{BB962C8B-B14F-4D97-AF65-F5344CB8AC3E}">
@@ -7370,10 +7421,10 @@
       </p:grpSpPr>
       <p:sp>
         <p:nvSpPr>
-          <p:cNvPr id="4" name="正方形/長方形 3">
+          <p:cNvPr id="3" name="正方形/長方形 2">
             <a:extLst>
               <a:ext uri="{FF2B5EF4-FFF2-40B4-BE49-F238E27FC236}">
-                <a16:creationId xmlns:a16="http://schemas.microsoft.com/office/drawing/2014/main" id="{6EBA86A0-4EB7-A063-9D52-9D32ADB8F232}"/>
+                <a16:creationId xmlns:a16="http://schemas.microsoft.com/office/drawing/2014/main" id="{1DEFF187-2596-B65B-91B7-01BEB260E707}"/>
               </a:ext>
             </a:extLst>
           </p:cNvPr>
@@ -7390,14 +7441,14 @@
           </a:prstGeom>
           <a:gradFill>
             <a:gsLst>
-              <a:gs pos="60000">
-                <a:srgbClr val="5800E1"/>
+              <a:gs pos="50000">
+                <a:srgbClr val="6200E8"/>
               </a:gs>
-              <a:gs pos="5000">
-                <a:srgbClr val="EC008C"/>
+              <a:gs pos="10000">
+                <a:srgbClr val="EE00B0"/>
               </a:gs>
-              <a:gs pos="95000">
-                <a:srgbClr val="0086D6"/>
+              <a:gs pos="90000">
+                <a:srgbClr val="0095E5"/>
               </a:gs>
             </a:gsLst>
             <a:lin ang="1800000" scaled="0"/>
@@ -7427,7 +7478,7 @@
           <a:lstStyle/>
           <a:p>
             <a:pPr algn="ctr"/>
-            <a:endParaRPr kumimoji="1" lang="ja-JP" altLang="en-US"/>
+            <a:endParaRPr kumimoji="1" lang="ja-JP" altLang="en-US" dirty="0"/>
           </a:p>
         </p:txBody>
       </p:sp>
@@ -7445,7 +7496,7 @@
         </p:nvSpPr>
         <p:spPr>
           <a:xfrm>
-            <a:off x="0" y="9938"/>
+            <a:off x="-1" y="9938"/>
             <a:ext cx="6858000" cy="9144000"/>
           </a:xfrm>
           <a:custGeom>
@@ -8464,10 +8515,10 @@
       </p:grpSpPr>
       <p:sp>
         <p:nvSpPr>
-          <p:cNvPr id="4" name="正方形/長方形 3">
+          <p:cNvPr id="6" name="正方形/長方形 5">
             <a:extLst>
               <a:ext uri="{FF2B5EF4-FFF2-40B4-BE49-F238E27FC236}">
-                <a16:creationId xmlns:a16="http://schemas.microsoft.com/office/drawing/2014/main" id="{CC74F156-4B5C-E445-A645-2E2ACF34FAFE}"/>
+                <a16:creationId xmlns:a16="http://schemas.microsoft.com/office/drawing/2014/main" id="{5776EC83-5487-B904-9A4C-0C56AF1763D8}"/>
               </a:ext>
             </a:extLst>
           </p:cNvPr>
@@ -8484,14 +8535,14 @@
           </a:prstGeom>
           <a:gradFill>
             <a:gsLst>
-              <a:gs pos="60000">
-                <a:srgbClr val="5800E1"/>
+              <a:gs pos="50000">
+                <a:srgbClr val="6200E8"/>
               </a:gs>
-              <a:gs pos="5000">
-                <a:srgbClr val="EC008C"/>
+              <a:gs pos="10000">
+                <a:srgbClr val="EE00B0"/>
               </a:gs>
-              <a:gs pos="95000">
-                <a:srgbClr val="0086D6"/>
+              <a:gs pos="90000">
+                <a:srgbClr val="0095E5"/>
               </a:gs>
             </a:gsLst>
             <a:lin ang="1800000" scaled="0"/>
@@ -8521,7 +8572,7 @@
           <a:lstStyle/>
           <a:p>
             <a:pPr algn="ctr"/>
-            <a:endParaRPr kumimoji="1" lang="ja-JP" altLang="en-US"/>
+            <a:endParaRPr kumimoji="1" lang="ja-JP" altLang="en-US" dirty="0"/>
           </a:p>
         </p:txBody>
       </p:sp>
@@ -8539,7 +8590,7 @@
         </p:nvSpPr>
         <p:spPr>
           <a:xfrm>
-            <a:off x="-4389" y="0"/>
+            <a:off x="-2195" y="0"/>
             <a:ext cx="6862389" cy="9144000"/>
           </a:xfrm>
           <a:custGeom>
@@ -9270,10 +9321,10 @@
       </p:grpSpPr>
       <p:sp>
         <p:nvSpPr>
-          <p:cNvPr id="4" name="正方形/長方形 3">
+          <p:cNvPr id="3" name="正方形/長方形 2">
             <a:extLst>
               <a:ext uri="{FF2B5EF4-FFF2-40B4-BE49-F238E27FC236}">
-                <a16:creationId xmlns:a16="http://schemas.microsoft.com/office/drawing/2014/main" id="{30FDF44E-2E29-DC94-EB39-45531D05C652}"/>
+                <a16:creationId xmlns:a16="http://schemas.microsoft.com/office/drawing/2014/main" id="{6D89B353-9D95-712D-2512-32F299577803}"/>
               </a:ext>
             </a:extLst>
           </p:cNvPr>
@@ -9290,14 +9341,14 @@
           </a:prstGeom>
           <a:gradFill>
             <a:gsLst>
-              <a:gs pos="60000">
-                <a:srgbClr val="5800E1"/>
+              <a:gs pos="50000">
+                <a:srgbClr val="6200E8"/>
               </a:gs>
-              <a:gs pos="5000">
-                <a:srgbClr val="EC008C"/>
+              <a:gs pos="10000">
+                <a:srgbClr val="EE00B0"/>
               </a:gs>
-              <a:gs pos="95000">
-                <a:srgbClr val="0086D6"/>
+              <a:gs pos="90000">
+                <a:srgbClr val="0095E5"/>
               </a:gs>
             </a:gsLst>
             <a:lin ang="1800000" scaled="0"/>
@@ -9327,7 +9378,7 @@
           <a:lstStyle/>
           <a:p>
             <a:pPr algn="ctr"/>
-            <a:endParaRPr kumimoji="1" lang="ja-JP" altLang="en-US"/>
+            <a:endParaRPr kumimoji="1" lang="ja-JP" altLang="en-US" dirty="0"/>
           </a:p>
         </p:txBody>
       </p:sp>
@@ -9345,7 +9396,7 @@
         </p:nvSpPr>
         <p:spPr>
           <a:xfrm>
-            <a:off x="-3231" y="0"/>
+            <a:off x="-3233" y="0"/>
             <a:ext cx="6861231" cy="9144000"/>
           </a:xfrm>
           <a:custGeom>

--- a/Documents/Original/FlexChroma_Tour_Guide_EN.pptx
+++ b/Documents/Original/FlexChroma_Tour_Guide_EN.pptx
@@ -4419,90 +4419,6 @@
       </p:sp>
       <p:sp>
         <p:nvSpPr>
-          <p:cNvPr id="11" name="テキスト ボックス 10">
-            <a:extLst>
-              <a:ext uri="{FF2B5EF4-FFF2-40B4-BE49-F238E27FC236}">
-                <a16:creationId xmlns:a16="http://schemas.microsoft.com/office/drawing/2014/main" id="{236AB7EC-AB6F-585D-27FA-7CEA699B30B2}"/>
-              </a:ext>
-            </a:extLst>
-          </p:cNvPr>
-          <p:cNvSpPr txBox="1"/>
-          <p:nvPr/>
-        </p:nvSpPr>
-        <p:spPr>
-          <a:xfrm>
-            <a:off x="2630544" y="1444411"/>
-            <a:ext cx="1396536" cy="369332"/>
-          </a:xfrm>
-          <a:prstGeom prst="rect">
-            <a:avLst/>
-          </a:prstGeom>
-          <a:noFill/>
-        </p:spPr>
-        <p:txBody>
-          <a:bodyPr wrap="none" rtlCol="0">
-            <a:spAutoFit/>
-          </a:bodyPr>
-          <a:lstStyle/>
-          <a:p>
-            <a:r>
-              <a:rPr lang="en-US" altLang="ja-JP" b="1" dirty="0">
-                <a:latin typeface="IBM Plex Sans JP" panose="020B0503050203000203" pitchFamily="50" charset="-128"/>
-                <a:ea typeface="IBM Plex Sans JP" panose="020B0503050203000203" pitchFamily="50" charset="-128"/>
-              </a:rPr>
-              <a:t>- Subtilte -</a:t>
-            </a:r>
-            <a:endParaRPr kumimoji="1" lang="ja-JP" altLang="en-US" b="1" dirty="0">
-              <a:latin typeface="IBM Plex Sans JP" panose="020B0503050203000203" pitchFamily="50" charset="-128"/>
-              <a:ea typeface="IBM Plex Sans JP" panose="020B0503050203000203" pitchFamily="50" charset="-128"/>
-            </a:endParaRPr>
-          </a:p>
-        </p:txBody>
-      </p:sp>
-      <p:sp>
-        <p:nvSpPr>
-          <p:cNvPr id="12" name="テキスト ボックス 11">
-            <a:extLst>
-              <a:ext uri="{FF2B5EF4-FFF2-40B4-BE49-F238E27FC236}">
-                <a16:creationId xmlns:a16="http://schemas.microsoft.com/office/drawing/2014/main" id="{F7D89FCF-AB59-9789-77D9-D36589CBE52A}"/>
-              </a:ext>
-            </a:extLst>
-          </p:cNvPr>
-          <p:cNvSpPr txBox="1"/>
-          <p:nvPr/>
-        </p:nvSpPr>
-        <p:spPr>
-          <a:xfrm>
-            <a:off x="2381276" y="1883364"/>
-            <a:ext cx="1952779" cy="307777"/>
-          </a:xfrm>
-          <a:prstGeom prst="rect">
-            <a:avLst/>
-          </a:prstGeom>
-          <a:noFill/>
-        </p:spPr>
-        <p:txBody>
-          <a:bodyPr wrap="none" rtlCol="0">
-            <a:spAutoFit/>
-          </a:bodyPr>
-          <a:lstStyle/>
-          <a:p>
-            <a:r>
-              <a:rPr lang="en-US" altLang="ja-JP" sz="1400" b="1" dirty="0">
-                <a:latin typeface="IBM Plex Sans JP" panose="020B0503050203000203" pitchFamily="50" charset="-128"/>
-                <a:ea typeface="IBM Plex Sans JP" panose="020B0503050203000203" pitchFamily="50" charset="-128"/>
-              </a:rPr>
-              <a:t>Ver.1.10  2026.7.22</a:t>
-            </a:r>
-            <a:endParaRPr kumimoji="1" lang="ja-JP" altLang="en-US" sz="1400" b="1" dirty="0">
-              <a:latin typeface="IBM Plex Sans JP" panose="020B0503050203000203" pitchFamily="50" charset="-128"/>
-              <a:ea typeface="IBM Plex Sans JP" panose="020B0503050203000203" pitchFamily="50" charset="-128"/>
-            </a:endParaRPr>
-          </a:p>
-        </p:txBody>
-      </p:sp>
-      <p:sp>
-        <p:nvSpPr>
           <p:cNvPr id="14" name="楕円 13">
             <a:extLst>
               <a:ext uri="{FF2B5EF4-FFF2-40B4-BE49-F238E27FC236}">
@@ -4957,348 +4873,6 @@
               <a:latin typeface="IBM Plex Sans JP Light" panose="020B0403050203000203" pitchFamily="50" charset="-128"/>
               <a:ea typeface="IBM Plex Sans JP Light" panose="020B0403050203000203" pitchFamily="50" charset="-128"/>
             </a:endParaRPr>
-          </a:p>
-        </p:txBody>
-      </p:sp>
-      <p:sp>
-        <p:nvSpPr>
-          <p:cNvPr id="13" name="フリーフォーム: 図形 12">
-            <a:extLst>
-              <a:ext uri="{FF2B5EF4-FFF2-40B4-BE49-F238E27FC236}">
-                <a16:creationId xmlns:a16="http://schemas.microsoft.com/office/drawing/2014/main" id="{942C509F-7EBE-C17F-E1FD-04A0A489994D}"/>
-              </a:ext>
-            </a:extLst>
-          </p:cNvPr>
-          <p:cNvSpPr/>
-          <p:nvPr/>
-        </p:nvSpPr>
-        <p:spPr>
-          <a:xfrm>
-            <a:off x="1042026" y="437296"/>
-            <a:ext cx="4781214" cy="310036"/>
-          </a:xfrm>
-          <a:custGeom>
-            <a:avLst/>
-            <a:gdLst>
-              <a:gd name="connsiteX0" fmla="*/ 155018 w 4781214"/>
-              <a:gd name="connsiteY0" fmla="*/ 0 h 310036"/>
-              <a:gd name="connsiteX1" fmla="*/ 4626196 w 4781214"/>
-              <a:gd name="connsiteY1" fmla="*/ 0 h 310036"/>
-              <a:gd name="connsiteX2" fmla="*/ 4781214 w 4781214"/>
-              <a:gd name="connsiteY2" fmla="*/ 155018 h 310036"/>
-              <a:gd name="connsiteX3" fmla="*/ 4781214 w 4781214"/>
-              <a:gd name="connsiteY3" fmla="*/ 310036 h 310036"/>
-              <a:gd name="connsiteX4" fmla="*/ 4778648 w 4781214"/>
-              <a:gd name="connsiteY4" fmla="*/ 310036 h 310036"/>
-              <a:gd name="connsiteX5" fmla="*/ 4765852 w 4781214"/>
-              <a:gd name="connsiteY5" fmla="*/ 279145 h 310036"/>
-              <a:gd name="connsiteX6" fmla="*/ 4728765 w 4781214"/>
-              <a:gd name="connsiteY6" fmla="*/ 263783 h 310036"/>
-              <a:gd name="connsiteX7" fmla="*/ 52449 w 4781214"/>
-              <a:gd name="connsiteY7" fmla="*/ 263783 h 310036"/>
-              <a:gd name="connsiteX8" fmla="*/ 15362 w 4781214"/>
-              <a:gd name="connsiteY8" fmla="*/ 279145 h 310036"/>
-              <a:gd name="connsiteX9" fmla="*/ 2567 w 4781214"/>
-              <a:gd name="connsiteY9" fmla="*/ 310036 h 310036"/>
-              <a:gd name="connsiteX10" fmla="*/ 0 w 4781214"/>
-              <a:gd name="connsiteY10" fmla="*/ 310036 h 310036"/>
-              <a:gd name="connsiteX11" fmla="*/ 0 w 4781214"/>
-              <a:gd name="connsiteY11" fmla="*/ 155018 h 310036"/>
-              <a:gd name="connsiteX12" fmla="*/ 155018 w 4781214"/>
-              <a:gd name="connsiteY12" fmla="*/ 0 h 310036"/>
-            </a:gdLst>
-            <a:ahLst/>
-            <a:cxnLst>
-              <a:cxn ang="0">
-                <a:pos x="connsiteX0" y="connsiteY0"/>
-              </a:cxn>
-              <a:cxn ang="0">
-                <a:pos x="connsiteX1" y="connsiteY1"/>
-              </a:cxn>
-              <a:cxn ang="0">
-                <a:pos x="connsiteX2" y="connsiteY2"/>
-              </a:cxn>
-              <a:cxn ang="0">
-                <a:pos x="connsiteX3" y="connsiteY3"/>
-              </a:cxn>
-              <a:cxn ang="0">
-                <a:pos x="connsiteX4" y="connsiteY4"/>
-              </a:cxn>
-              <a:cxn ang="0">
-                <a:pos x="connsiteX5" y="connsiteY5"/>
-              </a:cxn>
-              <a:cxn ang="0">
-                <a:pos x="connsiteX6" y="connsiteY6"/>
-              </a:cxn>
-              <a:cxn ang="0">
-                <a:pos x="connsiteX7" y="connsiteY7"/>
-              </a:cxn>
-              <a:cxn ang="0">
-                <a:pos x="connsiteX8" y="connsiteY8"/>
-              </a:cxn>
-              <a:cxn ang="0">
-                <a:pos x="connsiteX9" y="connsiteY9"/>
-              </a:cxn>
-              <a:cxn ang="0">
-                <a:pos x="connsiteX10" y="connsiteY10"/>
-              </a:cxn>
-              <a:cxn ang="0">
-                <a:pos x="connsiteX11" y="connsiteY11"/>
-              </a:cxn>
-              <a:cxn ang="0">
-                <a:pos x="connsiteX12" y="connsiteY12"/>
-              </a:cxn>
-            </a:cxnLst>
-            <a:rect l="l" t="t" r="r" b="b"/>
-            <a:pathLst>
-              <a:path w="4781214" h="310036">
-                <a:moveTo>
-                  <a:pt x="155018" y="0"/>
-                </a:moveTo>
-                <a:lnTo>
-                  <a:pt x="4626196" y="0"/>
-                </a:lnTo>
-                <a:cubicBezTo>
-                  <a:pt x="4711810" y="0"/>
-                  <a:pt x="4781214" y="69404"/>
-                  <a:pt x="4781214" y="155018"/>
-                </a:cubicBezTo>
-                <a:lnTo>
-                  <a:pt x="4781214" y="310036"/>
-                </a:lnTo>
-                <a:lnTo>
-                  <a:pt x="4778648" y="310036"/>
-                </a:lnTo>
-                <a:lnTo>
-                  <a:pt x="4765852" y="279145"/>
-                </a:lnTo>
-                <a:cubicBezTo>
-                  <a:pt x="4756361" y="269654"/>
-                  <a:pt x="4743249" y="263783"/>
-                  <a:pt x="4728765" y="263783"/>
-                </a:cubicBezTo>
-                <a:lnTo>
-                  <a:pt x="52449" y="263783"/>
-                </a:lnTo>
-                <a:cubicBezTo>
-                  <a:pt x="37966" y="263783"/>
-                  <a:pt x="24853" y="269654"/>
-                  <a:pt x="15362" y="279145"/>
-                </a:cubicBezTo>
-                <a:lnTo>
-                  <a:pt x="2567" y="310036"/>
-                </a:lnTo>
-                <a:lnTo>
-                  <a:pt x="0" y="310036"/>
-                </a:lnTo>
-                <a:lnTo>
-                  <a:pt x="0" y="155018"/>
-                </a:lnTo>
-                <a:cubicBezTo>
-                  <a:pt x="0" y="69404"/>
-                  <a:pt x="69404" y="0"/>
-                  <a:pt x="155018" y="0"/>
-                </a:cubicBezTo>
-                <a:close/>
-              </a:path>
-            </a:pathLst>
-          </a:custGeom>
-        </p:spPr>
-        <p:style>
-          <a:lnRef idx="2">
-            <a:schemeClr val="accent1">
-              <a:shade val="15000"/>
-            </a:schemeClr>
-          </a:lnRef>
-          <a:fillRef idx="1">
-            <a:schemeClr val="accent1"/>
-          </a:fillRef>
-          <a:effectRef idx="0">
-            <a:schemeClr val="accent1"/>
-          </a:effectRef>
-          <a:fontRef idx="minor">
-            <a:schemeClr val="lt1"/>
-          </a:fontRef>
-        </p:style>
-        <p:txBody>
-          <a:bodyPr wrap="square" rtlCol="0" anchor="ctr">
-            <a:noAutofit/>
-          </a:bodyPr>
-          <a:lstStyle/>
-          <a:p>
-            <a:pPr algn="ctr"/>
-            <a:endParaRPr kumimoji="1" lang="ja-JP" altLang="en-US"/>
-          </a:p>
-        </p:txBody>
-      </p:sp>
-      <p:sp>
-        <p:nvSpPr>
-          <p:cNvPr id="29" name="フリーフォーム: 図形 28">
-            <a:extLst>
-              <a:ext uri="{FF2B5EF4-FFF2-40B4-BE49-F238E27FC236}">
-                <a16:creationId xmlns:a16="http://schemas.microsoft.com/office/drawing/2014/main" id="{A8D15E6E-F892-1A37-55F4-598808C42B8D}"/>
-              </a:ext>
-            </a:extLst>
-          </p:cNvPr>
-          <p:cNvSpPr/>
-          <p:nvPr/>
-        </p:nvSpPr>
-        <p:spPr>
-          <a:xfrm rot="10800000">
-            <a:off x="1042026" y="2263487"/>
-            <a:ext cx="4781214" cy="310036"/>
-          </a:xfrm>
-          <a:custGeom>
-            <a:avLst/>
-            <a:gdLst>
-              <a:gd name="connsiteX0" fmla="*/ 155018 w 4781214"/>
-              <a:gd name="connsiteY0" fmla="*/ 0 h 310036"/>
-              <a:gd name="connsiteX1" fmla="*/ 4626196 w 4781214"/>
-              <a:gd name="connsiteY1" fmla="*/ 0 h 310036"/>
-              <a:gd name="connsiteX2" fmla="*/ 4781214 w 4781214"/>
-              <a:gd name="connsiteY2" fmla="*/ 155018 h 310036"/>
-              <a:gd name="connsiteX3" fmla="*/ 4781214 w 4781214"/>
-              <a:gd name="connsiteY3" fmla="*/ 310036 h 310036"/>
-              <a:gd name="connsiteX4" fmla="*/ 4778648 w 4781214"/>
-              <a:gd name="connsiteY4" fmla="*/ 310036 h 310036"/>
-              <a:gd name="connsiteX5" fmla="*/ 4765852 w 4781214"/>
-              <a:gd name="connsiteY5" fmla="*/ 279145 h 310036"/>
-              <a:gd name="connsiteX6" fmla="*/ 4728765 w 4781214"/>
-              <a:gd name="connsiteY6" fmla="*/ 263783 h 310036"/>
-              <a:gd name="connsiteX7" fmla="*/ 52449 w 4781214"/>
-              <a:gd name="connsiteY7" fmla="*/ 263783 h 310036"/>
-              <a:gd name="connsiteX8" fmla="*/ 15362 w 4781214"/>
-              <a:gd name="connsiteY8" fmla="*/ 279145 h 310036"/>
-              <a:gd name="connsiteX9" fmla="*/ 2567 w 4781214"/>
-              <a:gd name="connsiteY9" fmla="*/ 310036 h 310036"/>
-              <a:gd name="connsiteX10" fmla="*/ 0 w 4781214"/>
-              <a:gd name="connsiteY10" fmla="*/ 310036 h 310036"/>
-              <a:gd name="connsiteX11" fmla="*/ 0 w 4781214"/>
-              <a:gd name="connsiteY11" fmla="*/ 155018 h 310036"/>
-              <a:gd name="connsiteX12" fmla="*/ 155018 w 4781214"/>
-              <a:gd name="connsiteY12" fmla="*/ 0 h 310036"/>
-            </a:gdLst>
-            <a:ahLst/>
-            <a:cxnLst>
-              <a:cxn ang="0">
-                <a:pos x="connsiteX0" y="connsiteY0"/>
-              </a:cxn>
-              <a:cxn ang="0">
-                <a:pos x="connsiteX1" y="connsiteY1"/>
-              </a:cxn>
-              <a:cxn ang="0">
-                <a:pos x="connsiteX2" y="connsiteY2"/>
-              </a:cxn>
-              <a:cxn ang="0">
-                <a:pos x="connsiteX3" y="connsiteY3"/>
-              </a:cxn>
-              <a:cxn ang="0">
-                <a:pos x="connsiteX4" y="connsiteY4"/>
-              </a:cxn>
-              <a:cxn ang="0">
-                <a:pos x="connsiteX5" y="connsiteY5"/>
-              </a:cxn>
-              <a:cxn ang="0">
-                <a:pos x="connsiteX6" y="connsiteY6"/>
-              </a:cxn>
-              <a:cxn ang="0">
-                <a:pos x="connsiteX7" y="connsiteY7"/>
-              </a:cxn>
-              <a:cxn ang="0">
-                <a:pos x="connsiteX8" y="connsiteY8"/>
-              </a:cxn>
-              <a:cxn ang="0">
-                <a:pos x="connsiteX9" y="connsiteY9"/>
-              </a:cxn>
-              <a:cxn ang="0">
-                <a:pos x="connsiteX10" y="connsiteY10"/>
-              </a:cxn>
-              <a:cxn ang="0">
-                <a:pos x="connsiteX11" y="connsiteY11"/>
-              </a:cxn>
-              <a:cxn ang="0">
-                <a:pos x="connsiteX12" y="connsiteY12"/>
-              </a:cxn>
-            </a:cxnLst>
-            <a:rect l="l" t="t" r="r" b="b"/>
-            <a:pathLst>
-              <a:path w="4781214" h="310036">
-                <a:moveTo>
-                  <a:pt x="155018" y="0"/>
-                </a:moveTo>
-                <a:lnTo>
-                  <a:pt x="4626196" y="0"/>
-                </a:lnTo>
-                <a:cubicBezTo>
-                  <a:pt x="4711810" y="0"/>
-                  <a:pt x="4781214" y="69404"/>
-                  <a:pt x="4781214" y="155018"/>
-                </a:cubicBezTo>
-                <a:lnTo>
-                  <a:pt x="4781214" y="310036"/>
-                </a:lnTo>
-                <a:lnTo>
-                  <a:pt x="4778648" y="310036"/>
-                </a:lnTo>
-                <a:lnTo>
-                  <a:pt x="4765852" y="279145"/>
-                </a:lnTo>
-                <a:cubicBezTo>
-                  <a:pt x="4756361" y="269654"/>
-                  <a:pt x="4743249" y="263783"/>
-                  <a:pt x="4728765" y="263783"/>
-                </a:cubicBezTo>
-                <a:lnTo>
-                  <a:pt x="52449" y="263783"/>
-                </a:lnTo>
-                <a:cubicBezTo>
-                  <a:pt x="37966" y="263783"/>
-                  <a:pt x="24853" y="269654"/>
-                  <a:pt x="15362" y="279145"/>
-                </a:cubicBezTo>
-                <a:lnTo>
-                  <a:pt x="2567" y="310036"/>
-                </a:lnTo>
-                <a:lnTo>
-                  <a:pt x="0" y="310036"/>
-                </a:lnTo>
-                <a:lnTo>
-                  <a:pt x="0" y="155018"/>
-                </a:lnTo>
-                <a:cubicBezTo>
-                  <a:pt x="0" y="69404"/>
-                  <a:pt x="69404" y="0"/>
-                  <a:pt x="155018" y="0"/>
-                </a:cubicBezTo>
-                <a:close/>
-              </a:path>
-            </a:pathLst>
-          </a:custGeom>
-        </p:spPr>
-        <p:style>
-          <a:lnRef idx="2">
-            <a:schemeClr val="accent1">
-              <a:shade val="15000"/>
-            </a:schemeClr>
-          </a:lnRef>
-          <a:fillRef idx="1">
-            <a:schemeClr val="accent1"/>
-          </a:fillRef>
-          <a:effectRef idx="0">
-            <a:schemeClr val="accent1"/>
-          </a:effectRef>
-          <a:fontRef idx="minor">
-            <a:schemeClr val="lt1"/>
-          </a:fontRef>
-        </p:style>
-        <p:txBody>
-          <a:bodyPr wrap="square" rtlCol="0" anchor="ctr">
-            <a:noAutofit/>
-          </a:bodyPr>
-          <a:lstStyle/>
-          <a:p>
-            <a:pPr algn="ctr"/>
-            <a:endParaRPr kumimoji="1" lang="ja-JP" altLang="en-US"/>
           </a:p>
         </p:txBody>
       </p:sp>
@@ -5332,6 +4906,328 @@
           </a:prstGeom>
         </p:spPr>
       </p:pic>
+      <p:grpSp>
+        <p:nvGrpSpPr>
+          <p:cNvPr id="23" name="グループ化 22">
+            <a:extLst>
+              <a:ext uri="{FF2B5EF4-FFF2-40B4-BE49-F238E27FC236}">
+                <a16:creationId xmlns:a16="http://schemas.microsoft.com/office/drawing/2014/main" id="{8F15D30C-9810-6554-3F9D-C666664BC62E}"/>
+              </a:ext>
+            </a:extLst>
+          </p:cNvPr>
+          <p:cNvGrpSpPr/>
+          <p:nvPr/>
+        </p:nvGrpSpPr>
+        <p:grpSpPr>
+          <a:xfrm>
+            <a:off x="1042026" y="441445"/>
+            <a:ext cx="4781214" cy="377792"/>
+            <a:chOff x="1042026" y="430737"/>
+            <a:chExt cx="4781214" cy="377792"/>
+          </a:xfrm>
+        </p:grpSpPr>
+        <p:sp>
+          <p:nvSpPr>
+            <p:cNvPr id="3" name="四角形: 上の 2 つの角を丸める 2">
+              <a:extLst>
+                <a:ext uri="{FF2B5EF4-FFF2-40B4-BE49-F238E27FC236}">
+                  <a16:creationId xmlns:a16="http://schemas.microsoft.com/office/drawing/2014/main" id="{3A18D7FF-2AB7-9784-CFCF-AD9569D61BBD}"/>
+                </a:ext>
+              </a:extLst>
+            </p:cNvPr>
+            <p:cNvSpPr/>
+            <p:nvPr/>
+          </p:nvSpPr>
+          <p:spPr>
+            <a:xfrm>
+              <a:off x="1042026" y="430737"/>
+              <a:ext cx="4781214" cy="377792"/>
+            </a:xfrm>
+            <a:prstGeom prst="round2SameRect">
+              <a:avLst>
+                <a:gd name="adj1" fmla="val 50000"/>
+                <a:gd name="adj2" fmla="val 0"/>
+              </a:avLst>
+            </a:prstGeom>
+          </p:spPr>
+          <p:style>
+            <a:lnRef idx="2">
+              <a:schemeClr val="accent1">
+                <a:shade val="15000"/>
+              </a:schemeClr>
+            </a:lnRef>
+            <a:fillRef idx="1">
+              <a:schemeClr val="accent1"/>
+            </a:fillRef>
+            <a:effectRef idx="0">
+              <a:schemeClr val="accent1"/>
+            </a:effectRef>
+            <a:fontRef idx="minor">
+              <a:schemeClr val="lt1"/>
+            </a:fontRef>
+          </p:style>
+          <p:txBody>
+            <a:bodyPr rtlCol="0" anchor="ctr"/>
+            <a:lstStyle/>
+            <a:p>
+              <a:pPr algn="ctr"/>
+              <a:endParaRPr kumimoji="1" lang="ja-JP" altLang="en-US"/>
+            </a:p>
+          </p:txBody>
+        </p:sp>
+        <p:sp>
+          <p:nvSpPr>
+            <p:cNvPr id="4" name="四角形: 上の 2 つの角を丸める 3">
+              <a:extLst>
+                <a:ext uri="{FF2B5EF4-FFF2-40B4-BE49-F238E27FC236}">
+                  <a16:creationId xmlns:a16="http://schemas.microsoft.com/office/drawing/2014/main" id="{A7264CEB-0E02-D992-7F98-46154D03A20F}"/>
+                </a:ext>
+              </a:extLst>
+            </p:cNvPr>
+            <p:cNvSpPr/>
+            <p:nvPr/>
+          </p:nvSpPr>
+          <p:spPr>
+            <a:xfrm>
+              <a:off x="1042026" y="697920"/>
+              <a:ext cx="4781214" cy="110609"/>
+            </a:xfrm>
+            <a:prstGeom prst="round2SameRect">
+              <a:avLst>
+                <a:gd name="adj1" fmla="val 50000"/>
+                <a:gd name="adj2" fmla="val 0"/>
+              </a:avLst>
+            </a:prstGeom>
+          </p:spPr>
+          <p:style>
+            <a:lnRef idx="2">
+              <a:schemeClr val="accent1">
+                <a:shade val="15000"/>
+              </a:schemeClr>
+            </a:lnRef>
+            <a:fillRef idx="1">
+              <a:schemeClr val="accent1"/>
+            </a:fillRef>
+            <a:effectRef idx="0">
+              <a:schemeClr val="accent1"/>
+            </a:effectRef>
+            <a:fontRef idx="minor">
+              <a:schemeClr val="lt1"/>
+            </a:fontRef>
+          </p:style>
+          <p:txBody>
+            <a:bodyPr rtlCol="0" anchor="ctr"/>
+            <a:lstStyle/>
+            <a:p>
+              <a:pPr algn="ctr"/>
+              <a:endParaRPr kumimoji="1" lang="ja-JP" altLang="en-US"/>
+            </a:p>
+          </p:txBody>
+        </p:sp>
+      </p:grpSp>
+      <p:grpSp>
+        <p:nvGrpSpPr>
+          <p:cNvPr id="24" name="グループ化 23">
+            <a:extLst>
+              <a:ext uri="{FF2B5EF4-FFF2-40B4-BE49-F238E27FC236}">
+                <a16:creationId xmlns:a16="http://schemas.microsoft.com/office/drawing/2014/main" id="{1E64D689-16FA-4459-27D6-5C841CAA4722}"/>
+              </a:ext>
+            </a:extLst>
+          </p:cNvPr>
+          <p:cNvGrpSpPr/>
+          <p:nvPr/>
+        </p:nvGrpSpPr>
+        <p:grpSpPr>
+          <a:xfrm rot="10800000">
+            <a:off x="1042026" y="2224673"/>
+            <a:ext cx="4781214" cy="377792"/>
+            <a:chOff x="1042026" y="430737"/>
+            <a:chExt cx="4781214" cy="377792"/>
+          </a:xfrm>
+        </p:grpSpPr>
+        <p:sp>
+          <p:nvSpPr>
+            <p:cNvPr id="28" name="四角形: 上の 2 つの角を丸める 27">
+              <a:extLst>
+                <a:ext uri="{FF2B5EF4-FFF2-40B4-BE49-F238E27FC236}">
+                  <a16:creationId xmlns:a16="http://schemas.microsoft.com/office/drawing/2014/main" id="{F8DF8492-C361-427B-2DE1-AE4499E917C5}"/>
+                </a:ext>
+              </a:extLst>
+            </p:cNvPr>
+            <p:cNvSpPr/>
+            <p:nvPr/>
+          </p:nvSpPr>
+          <p:spPr>
+            <a:xfrm>
+              <a:off x="1042026" y="430737"/>
+              <a:ext cx="4781214" cy="377792"/>
+            </a:xfrm>
+            <a:prstGeom prst="round2SameRect">
+              <a:avLst>
+                <a:gd name="adj1" fmla="val 50000"/>
+                <a:gd name="adj2" fmla="val 0"/>
+              </a:avLst>
+            </a:prstGeom>
+          </p:spPr>
+          <p:style>
+            <a:lnRef idx="2">
+              <a:schemeClr val="accent1">
+                <a:shade val="15000"/>
+              </a:schemeClr>
+            </a:lnRef>
+            <a:fillRef idx="1">
+              <a:schemeClr val="accent1"/>
+            </a:fillRef>
+            <a:effectRef idx="0">
+              <a:schemeClr val="accent1"/>
+            </a:effectRef>
+            <a:fontRef idx="minor">
+              <a:schemeClr val="lt1"/>
+            </a:fontRef>
+          </p:style>
+          <p:txBody>
+            <a:bodyPr rtlCol="0" anchor="ctr"/>
+            <a:lstStyle/>
+            <a:p>
+              <a:pPr algn="ctr"/>
+              <a:endParaRPr kumimoji="1" lang="ja-JP" altLang="en-US"/>
+            </a:p>
+          </p:txBody>
+        </p:sp>
+        <p:sp>
+          <p:nvSpPr>
+            <p:cNvPr id="30" name="四角形: 上の 2 つの角を丸める 29">
+              <a:extLst>
+                <a:ext uri="{FF2B5EF4-FFF2-40B4-BE49-F238E27FC236}">
+                  <a16:creationId xmlns:a16="http://schemas.microsoft.com/office/drawing/2014/main" id="{B525C316-F63D-33F0-D18C-D441893CBA9D}"/>
+                </a:ext>
+              </a:extLst>
+            </p:cNvPr>
+            <p:cNvSpPr/>
+            <p:nvPr/>
+          </p:nvSpPr>
+          <p:spPr>
+            <a:xfrm>
+              <a:off x="1042026" y="697920"/>
+              <a:ext cx="4781214" cy="110609"/>
+            </a:xfrm>
+            <a:prstGeom prst="round2SameRect">
+              <a:avLst>
+                <a:gd name="adj1" fmla="val 50000"/>
+                <a:gd name="adj2" fmla="val 0"/>
+              </a:avLst>
+            </a:prstGeom>
+          </p:spPr>
+          <p:style>
+            <a:lnRef idx="2">
+              <a:schemeClr val="accent1">
+                <a:shade val="15000"/>
+              </a:schemeClr>
+            </a:lnRef>
+            <a:fillRef idx="1">
+              <a:schemeClr val="accent1"/>
+            </a:fillRef>
+            <a:effectRef idx="0">
+              <a:schemeClr val="accent1"/>
+            </a:effectRef>
+            <a:fontRef idx="minor">
+              <a:schemeClr val="lt1"/>
+            </a:fontRef>
+          </p:style>
+          <p:txBody>
+            <a:bodyPr rtlCol="0" anchor="ctr"/>
+            <a:lstStyle/>
+            <a:p>
+              <a:pPr algn="ctr"/>
+              <a:endParaRPr kumimoji="1" lang="ja-JP" altLang="en-US"/>
+            </a:p>
+          </p:txBody>
+        </p:sp>
+      </p:grpSp>
+      <p:sp>
+        <p:nvSpPr>
+          <p:cNvPr id="31" name="テキスト ボックス 30">
+            <a:extLst>
+              <a:ext uri="{FF2B5EF4-FFF2-40B4-BE49-F238E27FC236}">
+                <a16:creationId xmlns:a16="http://schemas.microsoft.com/office/drawing/2014/main" id="{15D7F160-5868-F96D-EF8B-282D37A34400}"/>
+              </a:ext>
+            </a:extLst>
+          </p:cNvPr>
+          <p:cNvSpPr txBox="1"/>
+          <p:nvPr/>
+        </p:nvSpPr>
+        <p:spPr>
+          <a:xfrm>
+            <a:off x="1515655" y="1444411"/>
+            <a:ext cx="3826689" cy="338554"/>
+          </a:xfrm>
+          <a:prstGeom prst="rect">
+            <a:avLst/>
+          </a:prstGeom>
+          <a:noFill/>
+        </p:spPr>
+        <p:txBody>
+          <a:bodyPr wrap="none" rtlCol="0">
+            <a:spAutoFit/>
+          </a:bodyPr>
+          <a:lstStyle/>
+          <a:p>
+            <a:r>
+              <a:rPr lang="en-US" altLang="ja-JP" sz="1600" dirty="0">
+                <a:latin typeface="IBM Plex Sans JP" panose="020B0503050203000203" pitchFamily="50" charset="-128"/>
+                <a:ea typeface="IBM Plex Sans JP" panose="020B0503050203000203" pitchFamily="50" charset="-128"/>
+              </a:rPr>
+              <a:t>- Let's Explore FlexChroma's Models -</a:t>
+            </a:r>
+            <a:endParaRPr kumimoji="1" lang="ja-JP" altLang="en-US" sz="1600" dirty="0">
+              <a:latin typeface="IBM Plex Sans JP" panose="020B0503050203000203" pitchFamily="50" charset="-128"/>
+              <a:ea typeface="IBM Plex Sans JP" panose="020B0503050203000203" pitchFamily="50" charset="-128"/>
+            </a:endParaRPr>
+          </a:p>
+        </p:txBody>
+      </p:sp>
+      <p:sp>
+        <p:nvSpPr>
+          <p:cNvPr id="34" name="テキスト ボックス 33">
+            <a:extLst>
+              <a:ext uri="{FF2B5EF4-FFF2-40B4-BE49-F238E27FC236}">
+                <a16:creationId xmlns:a16="http://schemas.microsoft.com/office/drawing/2014/main" id="{CCF6AA1D-A904-DA76-F915-872BDAEB9106}"/>
+              </a:ext>
+            </a:extLst>
+          </p:cNvPr>
+          <p:cNvSpPr txBox="1"/>
+          <p:nvPr/>
+        </p:nvSpPr>
+        <p:spPr>
+          <a:xfrm>
+            <a:off x="2381276" y="1883364"/>
+            <a:ext cx="1952779" cy="307777"/>
+          </a:xfrm>
+          <a:prstGeom prst="rect">
+            <a:avLst/>
+          </a:prstGeom>
+          <a:noFill/>
+        </p:spPr>
+        <p:txBody>
+          <a:bodyPr wrap="none" rtlCol="0">
+            <a:spAutoFit/>
+          </a:bodyPr>
+          <a:lstStyle/>
+          <a:p>
+            <a:r>
+              <a:rPr lang="en-US" altLang="ja-JP" sz="1400" dirty="0">
+                <a:latin typeface="IBM Plex Sans JP" panose="020B0503050203000203" pitchFamily="50" charset="-128"/>
+                <a:ea typeface="IBM Plex Sans JP" panose="020B0503050203000203" pitchFamily="50" charset="-128"/>
+              </a:rPr>
+              <a:t>Ver.1.10  2026.7.22</a:t>
+            </a:r>
+            <a:endParaRPr kumimoji="1" lang="ja-JP" altLang="en-US" sz="1400" dirty="0">
+              <a:latin typeface="IBM Plex Sans JP" panose="020B0503050203000203" pitchFamily="50" charset="-128"/>
+              <a:ea typeface="IBM Plex Sans JP" panose="020B0503050203000203" pitchFamily="50" charset="-128"/>
+            </a:endParaRPr>
+          </a:p>
+        </p:txBody>
+      </p:sp>
     </p:spTree>
     <p:extLst>
       <p:ext uri="{BB962C8B-B14F-4D97-AF65-F5344CB8AC3E}">
@@ -9063,7 +8959,7 @@
         <p:spPr>
           <a:xfrm>
             <a:off x="668509" y="2953843"/>
-            <a:ext cx="5642222" cy="1169551"/>
+            <a:ext cx="5642222" cy="1107996"/>
           </a:xfrm>
           <a:prstGeom prst="rect">
             <a:avLst/>
@@ -9101,7 +8997,7 @@
             </a:r>
           </a:p>
           <a:p>
-            <a:endParaRPr lang="en-US" altLang="ja-JP" sz="1000" dirty="0">
+            <a:endParaRPr lang="en-US" altLang="ja-JP" sz="600" dirty="0">
               <a:latin typeface="IBM Plex Sans JP" panose="020B0503050203000203" pitchFamily="50" charset="-128"/>
               <a:ea typeface="IBM Plex Sans JP" panose="020B0503050203000203" pitchFamily="50" charset="-128"/>
             </a:endParaRPr>
@@ -9208,36 +9104,6 @@
       </p:pic>
       <p:pic>
         <p:nvPicPr>
-          <p:cNvPr id="27" name="図 26">
-            <a:extLst>
-              <a:ext uri="{FF2B5EF4-FFF2-40B4-BE49-F238E27FC236}">
-                <a16:creationId xmlns:a16="http://schemas.microsoft.com/office/drawing/2014/main" id="{E2340787-D511-DF21-3720-E71FFAD3D13E}"/>
-              </a:ext>
-            </a:extLst>
-          </p:cNvPr>
-          <p:cNvPicPr>
-            <a:picLocks noChangeAspect="1"/>
-          </p:cNvPicPr>
-          <p:nvPr/>
-        </p:nvPicPr>
-        <p:blipFill>
-          <a:blip r:embed="rId3"/>
-          <a:stretch>
-            <a:fillRect/>
-          </a:stretch>
-        </p:blipFill>
-        <p:spPr>
-          <a:xfrm>
-            <a:off x="709884" y="4100534"/>
-            <a:ext cx="5325156" cy="831813"/>
-          </a:xfrm>
-          <a:prstGeom prst="rect">
-            <a:avLst/>
-          </a:prstGeom>
-        </p:spPr>
-      </p:pic>
-      <p:pic>
-        <p:nvPicPr>
           <p:cNvPr id="38" name="図 37">
             <a:extLst>
               <a:ext uri="{FF2B5EF4-FFF2-40B4-BE49-F238E27FC236}">
@@ -9251,7 +9117,7 @@
           <p:nvPr/>
         </p:nvPicPr>
         <p:blipFill rotWithShape="1">
-          <a:blip r:embed="rId4">
+          <a:blip r:embed="rId3">
             <a:extLst>
               <a:ext uri="{28A0092B-C50C-407E-A947-70E740481C1C}">
                 <a14:useLocalDpi xmlns:a14="http://schemas.microsoft.com/office/drawing/2010/main" val="0"/>
@@ -9267,6 +9133,53 @@
           <a:xfrm>
             <a:off x="1091915" y="1374795"/>
             <a:ext cx="4561094" cy="1014727"/>
+          </a:xfrm>
+          <a:prstGeom prst="rect">
+            <a:avLst/>
+          </a:prstGeom>
+          <a:noFill/>
+          <a:extLst>
+            <a:ext uri="{909E8E84-426E-40DD-AFC4-6F175D3DCCD1}">
+              <a14:hiddenFill xmlns:a14="http://schemas.microsoft.com/office/drawing/2010/main">
+                <a:solidFill>
+                  <a:srgbClr val="FFFFFF"/>
+                </a:solidFill>
+              </a14:hiddenFill>
+            </a:ext>
+          </a:extLst>
+        </p:spPr>
+      </p:pic>
+      <p:pic>
+        <p:nvPicPr>
+          <p:cNvPr id="4" name="図 3">
+            <a:extLst>
+              <a:ext uri="{FF2B5EF4-FFF2-40B4-BE49-F238E27FC236}">
+                <a16:creationId xmlns:a16="http://schemas.microsoft.com/office/drawing/2014/main" id="{31322046-DA05-E453-193E-B1947F2711C9}"/>
+              </a:ext>
+            </a:extLst>
+          </p:cNvPr>
+          <p:cNvPicPr>
+            <a:picLocks noChangeAspect="1" noChangeArrowheads="1"/>
+          </p:cNvPicPr>
+          <p:nvPr/>
+        </p:nvPicPr>
+        <p:blipFill>
+          <a:blip r:embed="rId4">
+            <a:extLst>
+              <a:ext uri="{28A0092B-C50C-407E-A947-70E740481C1C}">
+                <a14:useLocalDpi xmlns:a14="http://schemas.microsoft.com/office/drawing/2010/main" val="0"/>
+              </a:ext>
+            </a:extLst>
+          </a:blip>
+          <a:srcRect/>
+          <a:stretch>
+            <a:fillRect/>
+          </a:stretch>
+        </p:blipFill>
+        <p:spPr bwMode="auto">
+          <a:xfrm>
+            <a:off x="659626" y="4065069"/>
+            <a:ext cx="5529865" cy="863845"/>
           </a:xfrm>
           <a:prstGeom prst="rect">
             <a:avLst/>
@@ -9676,353 +9589,12 @@
           </a:p>
         </p:txBody>
       </p:sp>
-      <p:sp>
-        <p:nvSpPr>
-          <p:cNvPr id="17" name="テキスト ボックス 16">
+      <p:pic>
+        <p:nvPicPr>
+          <p:cNvPr id="4" name="図 3">
             <a:extLst>
               <a:ext uri="{FF2B5EF4-FFF2-40B4-BE49-F238E27FC236}">
-                <a16:creationId xmlns:a16="http://schemas.microsoft.com/office/drawing/2014/main" id="{DDFACC84-E7FE-11C7-6620-F3DEFEB06920}"/>
-              </a:ext>
-            </a:extLst>
-          </p:cNvPr>
-          <p:cNvSpPr txBox="1"/>
-          <p:nvPr/>
-        </p:nvSpPr>
-        <p:spPr>
-          <a:xfrm>
-            <a:off x="3163826" y="8511531"/>
-            <a:ext cx="575734" cy="369332"/>
-          </a:xfrm>
-          <a:prstGeom prst="rect">
-            <a:avLst/>
-          </a:prstGeom>
-          <a:noFill/>
-        </p:spPr>
-        <p:txBody>
-          <a:bodyPr wrap="square" rtlCol="0" anchor="ctr">
-            <a:spAutoFit/>
-          </a:bodyPr>
-          <a:lstStyle/>
-          <a:p>
-            <a:pPr algn="ctr"/>
-            <a:r>
-              <a:rPr kumimoji="1" lang="en-US" altLang="ja-JP" dirty="0"/>
-              <a:t>3</a:t>
-            </a:r>
-            <a:endParaRPr kumimoji="1" lang="ja-JP" altLang="en-US" dirty="0"/>
-          </a:p>
-        </p:txBody>
-      </p:sp>
-      <p:sp>
-        <p:nvSpPr>
-          <p:cNvPr id="18" name="テキスト ボックス 17">
-            <a:extLst>
-              <a:ext uri="{FF2B5EF4-FFF2-40B4-BE49-F238E27FC236}">
-                <a16:creationId xmlns:a16="http://schemas.microsoft.com/office/drawing/2014/main" id="{AEF844E9-5EE0-D507-0BE6-EA50C139ECC5}"/>
-              </a:ext>
-            </a:extLst>
-          </p:cNvPr>
-          <p:cNvSpPr txBox="1"/>
-          <p:nvPr/>
-        </p:nvSpPr>
-        <p:spPr>
-          <a:xfrm>
-            <a:off x="770844" y="610017"/>
-            <a:ext cx="2739853" cy="400110"/>
-          </a:xfrm>
-          <a:prstGeom prst="rect">
-            <a:avLst/>
-          </a:prstGeom>
-          <a:noFill/>
-        </p:spPr>
-        <p:txBody>
-          <a:bodyPr wrap="none" rtlCol="0">
-            <a:spAutoFit/>
-          </a:bodyPr>
-          <a:lstStyle/>
-          <a:p>
-            <a:r>
-              <a:rPr lang="en-US" altLang="ja-JP" sz="2000" dirty="0">
-                <a:latin typeface="IBM Plex Sans JP SemiBold" panose="020B0703050203000203" pitchFamily="50" charset="-128"/>
-                <a:ea typeface="IBM Plex Sans JP SemiBold" panose="020B0703050203000203" pitchFamily="50" charset="-128"/>
-              </a:rPr>
-              <a:t>5. Gradient Filament</a:t>
-            </a:r>
-            <a:endParaRPr kumimoji="1" lang="ja-JP" altLang="en-US" sz="2400" b="1" dirty="0">
-              <a:latin typeface="IBM Plex Sans JP SemiBold" panose="020B0703050203000203" pitchFamily="50" charset="-128"/>
-              <a:ea typeface="IBM Plex Sans JP SemiBold" panose="020B0703050203000203" pitchFamily="50" charset="-128"/>
-            </a:endParaRPr>
-          </a:p>
-        </p:txBody>
-      </p:sp>
-      <p:sp>
-        <p:nvSpPr>
-          <p:cNvPr id="19" name="テキスト ボックス 18">
-            <a:extLst>
-              <a:ext uri="{FF2B5EF4-FFF2-40B4-BE49-F238E27FC236}">
-                <a16:creationId xmlns:a16="http://schemas.microsoft.com/office/drawing/2014/main" id="{79E1405D-DAD0-B18A-CDD6-7E8756624CA9}"/>
-              </a:ext>
-            </a:extLst>
-          </p:cNvPr>
-          <p:cNvSpPr txBox="1"/>
-          <p:nvPr/>
-        </p:nvSpPr>
-        <p:spPr>
-          <a:xfrm>
-            <a:off x="668508" y="1032957"/>
-            <a:ext cx="5649491" cy="861774"/>
-          </a:xfrm>
-          <a:prstGeom prst="rect">
-            <a:avLst/>
-          </a:prstGeom>
-          <a:noFill/>
-        </p:spPr>
-        <p:txBody>
-          <a:bodyPr wrap="square" rtlCol="0">
-            <a:spAutoFit/>
-          </a:bodyPr>
-          <a:lstStyle/>
-          <a:p>
-            <a:r>
-              <a:rPr lang="en-US" altLang="ja-JP" sz="1000" dirty="0">
-                <a:latin typeface="IBM Plex Sans JP" panose="020B0503050203000203" pitchFamily="50" charset="-128"/>
-                <a:ea typeface="IBM Plex Sans JP" panose="020B0503050203000203" pitchFamily="50" charset="-128"/>
-              </a:rPr>
-              <a:t>The Gradient Filament Series provides multiple color-changing Profiles and Plates with different cycle counts. Details vary by model, so please refer to each model’s description.</a:t>
-            </a:r>
-          </a:p>
-          <a:p>
-            <a:endParaRPr lang="en-US" altLang="ja-JP" sz="1000" dirty="0">
-              <a:latin typeface="IBM Plex Sans JP" panose="020B0503050203000203" pitchFamily="50" charset="-128"/>
-              <a:ea typeface="IBM Plex Sans JP" panose="020B0503050203000203" pitchFamily="50" charset="-128"/>
-            </a:endParaRPr>
-          </a:p>
-          <a:p>
-            <a:r>
-              <a:rPr lang="en-US" altLang="ja-JP" sz="1000" dirty="0">
-                <a:latin typeface="IBM Plex Sans JP" panose="020B0503050203000203" pitchFamily="50" charset="-128"/>
-                <a:ea typeface="IBM Plex Sans JP" panose="020B0503050203000203" pitchFamily="50" charset="-128"/>
-              </a:rPr>
-              <a:t>Example: To create a fast-cycle gradient filament using cyan and magenta, select an S4 Model, choose a 4-cycle Plate, and use the Vivid curve Profile due to the high color contrast.</a:t>
-            </a:r>
-            <a:endParaRPr kumimoji="1" lang="ja-JP" altLang="en-US" sz="1000" b="1" dirty="0">
-              <a:latin typeface="IBM Plex Sans JP" panose="020B0503050203000203" pitchFamily="50" charset="-128"/>
-              <a:ea typeface="IBM Plex Sans JP" panose="020B0503050203000203" pitchFamily="50" charset="-128"/>
-            </a:endParaRPr>
-          </a:p>
-        </p:txBody>
-      </p:sp>
-      <p:sp>
-        <p:nvSpPr>
-          <p:cNvPr id="25" name="テキスト ボックス 24">
-            <a:extLst>
-              <a:ext uri="{FF2B5EF4-FFF2-40B4-BE49-F238E27FC236}">
-                <a16:creationId xmlns:a16="http://schemas.microsoft.com/office/drawing/2014/main" id="{7ED3E711-A061-E5B5-882E-75E8B78F5498}"/>
-              </a:ext>
-            </a:extLst>
-          </p:cNvPr>
-          <p:cNvSpPr txBox="1"/>
-          <p:nvPr/>
-        </p:nvSpPr>
-        <p:spPr>
-          <a:xfrm>
-            <a:off x="675778" y="3011477"/>
-            <a:ext cx="5642222" cy="246221"/>
-          </a:xfrm>
-          <a:prstGeom prst="rect">
-            <a:avLst/>
-          </a:prstGeom>
-          <a:noFill/>
-        </p:spPr>
-        <p:txBody>
-          <a:bodyPr wrap="square" rtlCol="0">
-            <a:spAutoFit/>
-          </a:bodyPr>
-          <a:lstStyle/>
-          <a:p>
-            <a:r>
-              <a:rPr lang="en-US" altLang="ja-JP" sz="1000" dirty="0">
-                <a:latin typeface="IBM Plex Sans JP" panose="020B0503050203000203" pitchFamily="50" charset="-128"/>
-                <a:ea typeface="IBM Plex Sans JP" panose="020B0503050203000203" pitchFamily="50" charset="-128"/>
-              </a:rPr>
-              <a:t>The following is the model configuration for Gradient Filament.</a:t>
-            </a:r>
-          </a:p>
-        </p:txBody>
-      </p:sp>
-      <p:pic>
-        <p:nvPicPr>
-          <p:cNvPr id="12" name="図 11">
-            <a:extLst>
-              <a:ext uri="{FF2B5EF4-FFF2-40B4-BE49-F238E27FC236}">
-                <a16:creationId xmlns:a16="http://schemas.microsoft.com/office/drawing/2014/main" id="{A6014F56-C02A-5FD8-08B8-C99834BE597C}"/>
-              </a:ext>
-            </a:extLst>
-          </p:cNvPr>
-          <p:cNvPicPr>
-            <a:picLocks noChangeAspect="1"/>
-          </p:cNvPicPr>
-          <p:nvPr/>
-        </p:nvPicPr>
-        <p:blipFill>
-          <a:blip r:embed="rId2">
-            <a:extLst>
-              <a:ext uri="{BEBA8EAE-BF5A-486C-A8C5-ECC9F3942E4B}">
-                <a14:imgProps xmlns:a14="http://schemas.microsoft.com/office/drawing/2010/main">
-                  <a14:imgLayer r:embed="rId3">
-                    <a14:imgEffect>
-                      <a14:saturation sat="50000"/>
-                    </a14:imgEffect>
-                  </a14:imgLayer>
-                </a14:imgProps>
-              </a:ext>
-            </a:extLst>
-          </a:blip>
-          <a:stretch>
-            <a:fillRect/>
-          </a:stretch>
-        </p:blipFill>
-        <p:spPr>
-          <a:xfrm>
-            <a:off x="638323" y="3295319"/>
-            <a:ext cx="5588622" cy="3853245"/>
-          </a:xfrm>
-          <a:prstGeom prst="rect">
-            <a:avLst/>
-          </a:prstGeom>
-        </p:spPr>
-      </p:pic>
-      <p:sp>
-        <p:nvSpPr>
-          <p:cNvPr id="5" name="テキスト ボックス 4">
-            <a:extLst>
-              <a:ext uri="{FF2B5EF4-FFF2-40B4-BE49-F238E27FC236}">
-                <a16:creationId xmlns:a16="http://schemas.microsoft.com/office/drawing/2014/main" id="{46940E87-7400-BF59-728F-D232492BBE36}"/>
-              </a:ext>
-            </a:extLst>
-          </p:cNvPr>
-          <p:cNvSpPr txBox="1"/>
-          <p:nvPr/>
-        </p:nvSpPr>
-        <p:spPr>
-          <a:xfrm>
-            <a:off x="778114" y="7268269"/>
-            <a:ext cx="1923925" cy="338554"/>
-          </a:xfrm>
-          <a:prstGeom prst="rect">
-            <a:avLst/>
-          </a:prstGeom>
-          <a:noFill/>
-        </p:spPr>
-        <p:txBody>
-          <a:bodyPr wrap="none" rtlCol="0">
-            <a:spAutoFit/>
-          </a:bodyPr>
-          <a:lstStyle/>
-          <a:p>
-            <a:r>
-              <a:rPr lang="en-US" altLang="ja-JP" sz="1600" dirty="0">
-                <a:latin typeface="IBM Plex Sans JP SemiBold" panose="020B0703050203000203" pitchFamily="50" charset="-128"/>
-                <a:ea typeface="IBM Plex Sans JP SemiBold" panose="020B0703050203000203" pitchFamily="50" charset="-128"/>
-              </a:rPr>
-              <a:t>6. Update History</a:t>
-            </a:r>
-            <a:endParaRPr kumimoji="1" lang="ja-JP" altLang="en-US" b="1" dirty="0">
-              <a:latin typeface="IBM Plex Sans JP SemiBold" panose="020B0703050203000203" pitchFamily="50" charset="-128"/>
-              <a:ea typeface="IBM Plex Sans JP SemiBold" panose="020B0703050203000203" pitchFamily="50" charset="-128"/>
-            </a:endParaRPr>
-          </a:p>
-        </p:txBody>
-      </p:sp>
-      <p:sp>
-        <p:nvSpPr>
-          <p:cNvPr id="6" name="テキスト ボックス 5">
-            <a:extLst>
-              <a:ext uri="{FF2B5EF4-FFF2-40B4-BE49-F238E27FC236}">
-                <a16:creationId xmlns:a16="http://schemas.microsoft.com/office/drawing/2014/main" id="{772E1925-419D-E6C3-9438-BD98D2BBDD58}"/>
-              </a:ext>
-            </a:extLst>
-          </p:cNvPr>
-          <p:cNvSpPr txBox="1"/>
-          <p:nvPr/>
-        </p:nvSpPr>
-        <p:spPr>
-          <a:xfrm>
-            <a:off x="638323" y="7599215"/>
-            <a:ext cx="5649491" cy="507831"/>
-          </a:xfrm>
-          <a:prstGeom prst="rect">
-            <a:avLst/>
-          </a:prstGeom>
-          <a:noFill/>
-        </p:spPr>
-        <p:txBody>
-          <a:bodyPr wrap="square" rtlCol="0">
-            <a:spAutoFit/>
-          </a:bodyPr>
-          <a:lstStyle/>
-          <a:p>
-            <a:r>
-              <a:rPr lang="en-US" altLang="ja-JP" sz="900" dirty="0">
-                <a:latin typeface="IBM Plex Sans JP" panose="020B0503050203000203" pitchFamily="50" charset="-128"/>
-                <a:ea typeface="IBM Plex Sans JP" panose="020B0503050203000203" pitchFamily="50" charset="-128"/>
-              </a:rPr>
-              <a:t>Ver.1.00  2026-07-02  First Edition Published</a:t>
-            </a:r>
-          </a:p>
-          <a:p>
-            <a:r>
-              <a:rPr lang="en-US" altLang="ja-JP" sz="900" dirty="0">
-                <a:latin typeface="IBM Plex Sans JP" panose="020B0503050203000203" pitchFamily="50" charset="-128"/>
-                <a:ea typeface="IBM Plex Sans JP" panose="020B0503050203000203" pitchFamily="50" charset="-128"/>
-              </a:rPr>
-              <a:t>Ver.1.10  2026-07-02  Revisions for Integrated Design</a:t>
-            </a:r>
-          </a:p>
-          <a:p>
-            <a:endParaRPr kumimoji="1" lang="ja-JP" altLang="en-US" sz="900" b="1" dirty="0">
-              <a:latin typeface="IBM Plex Sans JP" panose="020B0503050203000203" pitchFamily="50" charset="-128"/>
-              <a:ea typeface="IBM Plex Sans JP" panose="020B0503050203000203" pitchFamily="50" charset="-128"/>
-            </a:endParaRPr>
-          </a:p>
-        </p:txBody>
-      </p:sp>
-      <p:pic>
-        <p:nvPicPr>
-          <p:cNvPr id="2" name="図 1">
-            <a:extLst>
-              <a:ext uri="{FF2B5EF4-FFF2-40B4-BE49-F238E27FC236}">
-                <a16:creationId xmlns:a16="http://schemas.microsoft.com/office/drawing/2014/main" id="{09F0FDF5-AAE0-F652-01A1-9A4F73C8F036}"/>
-              </a:ext>
-            </a:extLst>
-          </p:cNvPr>
-          <p:cNvPicPr>
-            <a:picLocks noChangeAspect="1"/>
-          </p:cNvPicPr>
-          <p:nvPr/>
-        </p:nvPicPr>
-        <p:blipFill>
-          <a:blip r:embed="rId4"/>
-          <a:stretch>
-            <a:fillRect/>
-          </a:stretch>
-        </p:blipFill>
-        <p:spPr>
-          <a:xfrm>
-            <a:off x="633073" y="1909692"/>
-            <a:ext cx="5588622" cy="913760"/>
-          </a:xfrm>
-          <a:prstGeom prst="rect">
-            <a:avLst/>
-          </a:prstGeom>
-        </p:spPr>
-      </p:pic>
-      <p:pic>
-        <p:nvPicPr>
-          <p:cNvPr id="8" name="図 7">
-            <a:extLst>
-              <a:ext uri="{FF2B5EF4-FFF2-40B4-BE49-F238E27FC236}">
-                <a16:creationId xmlns:a16="http://schemas.microsoft.com/office/drawing/2014/main" id="{3CA4C0E2-35C7-1340-C094-C4C5C416A183}"/>
+                <a16:creationId xmlns:a16="http://schemas.microsoft.com/office/drawing/2014/main" id="{65EBD496-4320-F95D-E4F6-46AE1204BBFD}"/>
               </a:ext>
             </a:extLst>
           </p:cNvPr>
@@ -10032,7 +9604,7 @@
           <p:nvPr/>
         </p:nvPicPr>
         <p:blipFill>
-          <a:blip r:embed="rId5">
+          <a:blip r:embed="rId2">
             <a:extLst>
               <a:ext uri="{28A0092B-C50C-407E-A947-70E740481C1C}">
                 <a14:useLocalDpi xmlns:a14="http://schemas.microsoft.com/office/drawing/2010/main" val="0"/>
@@ -10046,8 +9618,8 @@
         </p:blipFill>
         <p:spPr bwMode="auto">
           <a:xfrm>
-            <a:off x="587545" y="3188861"/>
-            <a:ext cx="5679677" cy="4002590"/>
+            <a:off x="633074" y="1909692"/>
+            <a:ext cx="5636600" cy="919080"/>
           </a:xfrm>
           <a:prstGeom prst="rect">
             <a:avLst/>
@@ -10062,6 +9634,305 @@
               </a14:hiddenFill>
             </a:ext>
           </a:extLst>
+        </p:spPr>
+      </p:pic>
+      <p:sp>
+        <p:nvSpPr>
+          <p:cNvPr id="17" name="テキスト ボックス 16">
+            <a:extLst>
+              <a:ext uri="{FF2B5EF4-FFF2-40B4-BE49-F238E27FC236}">
+                <a16:creationId xmlns:a16="http://schemas.microsoft.com/office/drawing/2014/main" id="{DDFACC84-E7FE-11C7-6620-F3DEFEB06920}"/>
+              </a:ext>
+            </a:extLst>
+          </p:cNvPr>
+          <p:cNvSpPr txBox="1"/>
+          <p:nvPr/>
+        </p:nvSpPr>
+        <p:spPr>
+          <a:xfrm>
+            <a:off x="3163826" y="8511531"/>
+            <a:ext cx="575734" cy="369332"/>
+          </a:xfrm>
+          <a:prstGeom prst="rect">
+            <a:avLst/>
+          </a:prstGeom>
+          <a:noFill/>
+        </p:spPr>
+        <p:txBody>
+          <a:bodyPr wrap="square" rtlCol="0" anchor="ctr">
+            <a:spAutoFit/>
+          </a:bodyPr>
+          <a:lstStyle/>
+          <a:p>
+            <a:pPr algn="ctr"/>
+            <a:r>
+              <a:rPr kumimoji="1" lang="en-US" altLang="ja-JP" dirty="0"/>
+              <a:t>3</a:t>
+            </a:r>
+            <a:endParaRPr kumimoji="1" lang="ja-JP" altLang="en-US" dirty="0"/>
+          </a:p>
+        </p:txBody>
+      </p:sp>
+      <p:sp>
+        <p:nvSpPr>
+          <p:cNvPr id="18" name="テキスト ボックス 17">
+            <a:extLst>
+              <a:ext uri="{FF2B5EF4-FFF2-40B4-BE49-F238E27FC236}">
+                <a16:creationId xmlns:a16="http://schemas.microsoft.com/office/drawing/2014/main" id="{AEF844E9-5EE0-D507-0BE6-EA50C139ECC5}"/>
+              </a:ext>
+            </a:extLst>
+          </p:cNvPr>
+          <p:cNvSpPr txBox="1"/>
+          <p:nvPr/>
+        </p:nvSpPr>
+        <p:spPr>
+          <a:xfrm>
+            <a:off x="770844" y="610017"/>
+            <a:ext cx="2739853" cy="400110"/>
+          </a:xfrm>
+          <a:prstGeom prst="rect">
+            <a:avLst/>
+          </a:prstGeom>
+          <a:noFill/>
+        </p:spPr>
+        <p:txBody>
+          <a:bodyPr wrap="none" rtlCol="0">
+            <a:spAutoFit/>
+          </a:bodyPr>
+          <a:lstStyle/>
+          <a:p>
+            <a:r>
+              <a:rPr lang="en-US" altLang="ja-JP" sz="2000" dirty="0">
+                <a:latin typeface="IBM Plex Sans JP SemiBold" panose="020B0703050203000203" pitchFamily="50" charset="-128"/>
+                <a:ea typeface="IBM Plex Sans JP SemiBold" panose="020B0703050203000203" pitchFamily="50" charset="-128"/>
+              </a:rPr>
+              <a:t>5. Gradient Filament</a:t>
+            </a:r>
+            <a:endParaRPr kumimoji="1" lang="ja-JP" altLang="en-US" sz="2400" b="1" dirty="0">
+              <a:latin typeface="IBM Plex Sans JP SemiBold" panose="020B0703050203000203" pitchFamily="50" charset="-128"/>
+              <a:ea typeface="IBM Plex Sans JP SemiBold" panose="020B0703050203000203" pitchFamily="50" charset="-128"/>
+            </a:endParaRPr>
+          </a:p>
+        </p:txBody>
+      </p:sp>
+      <p:sp>
+        <p:nvSpPr>
+          <p:cNvPr id="19" name="テキスト ボックス 18">
+            <a:extLst>
+              <a:ext uri="{FF2B5EF4-FFF2-40B4-BE49-F238E27FC236}">
+                <a16:creationId xmlns:a16="http://schemas.microsoft.com/office/drawing/2014/main" id="{79E1405D-DAD0-B18A-CDD6-7E8756624CA9}"/>
+              </a:ext>
+            </a:extLst>
+          </p:cNvPr>
+          <p:cNvSpPr txBox="1"/>
+          <p:nvPr/>
+        </p:nvSpPr>
+        <p:spPr>
+          <a:xfrm>
+            <a:off x="668508" y="1032957"/>
+            <a:ext cx="5649491" cy="861774"/>
+          </a:xfrm>
+          <a:prstGeom prst="rect">
+            <a:avLst/>
+          </a:prstGeom>
+          <a:noFill/>
+        </p:spPr>
+        <p:txBody>
+          <a:bodyPr wrap="square" rtlCol="0">
+            <a:spAutoFit/>
+          </a:bodyPr>
+          <a:lstStyle/>
+          <a:p>
+            <a:r>
+              <a:rPr lang="en-US" altLang="ja-JP" sz="1000" dirty="0">
+                <a:latin typeface="IBM Plex Sans JP" panose="020B0503050203000203" pitchFamily="50" charset="-128"/>
+                <a:ea typeface="IBM Plex Sans JP" panose="020B0503050203000203" pitchFamily="50" charset="-128"/>
+              </a:rPr>
+              <a:t>The Gradient Filament Series provides multiple color-changing Profiles and Plates with different cycle counts. Details vary by model, so please refer to each model’s description.</a:t>
+            </a:r>
+          </a:p>
+          <a:p>
+            <a:endParaRPr lang="en-US" altLang="ja-JP" sz="1000" dirty="0">
+              <a:latin typeface="IBM Plex Sans JP" panose="020B0503050203000203" pitchFamily="50" charset="-128"/>
+              <a:ea typeface="IBM Plex Sans JP" panose="020B0503050203000203" pitchFamily="50" charset="-128"/>
+            </a:endParaRPr>
+          </a:p>
+          <a:p>
+            <a:r>
+              <a:rPr lang="en-US" altLang="ja-JP" sz="1000" dirty="0">
+                <a:latin typeface="IBM Plex Sans JP" panose="020B0503050203000203" pitchFamily="50" charset="-128"/>
+                <a:ea typeface="IBM Plex Sans JP" panose="020B0503050203000203" pitchFamily="50" charset="-128"/>
+              </a:rPr>
+              <a:t>Example: To create a fast-cycle gradient filament using cyan and magenta, select an S4 Model, choose a 4-cycle Plate, and use the Vivid curve Profile due to the high color contrast.</a:t>
+            </a:r>
+            <a:endParaRPr kumimoji="1" lang="ja-JP" altLang="en-US" sz="1000" b="1" dirty="0">
+              <a:latin typeface="IBM Plex Sans JP" panose="020B0503050203000203" pitchFamily="50" charset="-128"/>
+              <a:ea typeface="IBM Plex Sans JP" panose="020B0503050203000203" pitchFamily="50" charset="-128"/>
+            </a:endParaRPr>
+          </a:p>
+        </p:txBody>
+      </p:sp>
+      <p:sp>
+        <p:nvSpPr>
+          <p:cNvPr id="25" name="テキスト ボックス 24">
+            <a:extLst>
+              <a:ext uri="{FF2B5EF4-FFF2-40B4-BE49-F238E27FC236}">
+                <a16:creationId xmlns:a16="http://schemas.microsoft.com/office/drawing/2014/main" id="{7ED3E711-A061-E5B5-882E-75E8B78F5498}"/>
+              </a:ext>
+            </a:extLst>
+          </p:cNvPr>
+          <p:cNvSpPr txBox="1"/>
+          <p:nvPr/>
+        </p:nvSpPr>
+        <p:spPr>
+          <a:xfrm>
+            <a:off x="675778" y="2965281"/>
+            <a:ext cx="5642222" cy="246221"/>
+          </a:xfrm>
+          <a:prstGeom prst="rect">
+            <a:avLst/>
+          </a:prstGeom>
+          <a:noFill/>
+        </p:spPr>
+        <p:txBody>
+          <a:bodyPr wrap="square" rtlCol="0">
+            <a:spAutoFit/>
+          </a:bodyPr>
+          <a:lstStyle/>
+          <a:p>
+            <a:r>
+              <a:rPr lang="en-US" altLang="ja-JP" sz="1000" dirty="0">
+                <a:latin typeface="IBM Plex Sans JP" panose="020B0503050203000203" pitchFamily="50" charset="-128"/>
+                <a:ea typeface="IBM Plex Sans JP" panose="020B0503050203000203" pitchFamily="50" charset="-128"/>
+              </a:rPr>
+              <a:t>The following is the model configuration for Gradient Filament.</a:t>
+            </a:r>
+          </a:p>
+        </p:txBody>
+      </p:sp>
+      <p:sp>
+        <p:nvSpPr>
+          <p:cNvPr id="5" name="テキスト ボックス 4">
+            <a:extLst>
+              <a:ext uri="{FF2B5EF4-FFF2-40B4-BE49-F238E27FC236}">
+                <a16:creationId xmlns:a16="http://schemas.microsoft.com/office/drawing/2014/main" id="{46940E87-7400-BF59-728F-D232492BBE36}"/>
+              </a:ext>
+            </a:extLst>
+          </p:cNvPr>
+          <p:cNvSpPr txBox="1"/>
+          <p:nvPr/>
+        </p:nvSpPr>
+        <p:spPr>
+          <a:xfrm>
+            <a:off x="778114" y="7268269"/>
+            <a:ext cx="1923925" cy="338554"/>
+          </a:xfrm>
+          <a:prstGeom prst="rect">
+            <a:avLst/>
+          </a:prstGeom>
+          <a:noFill/>
+        </p:spPr>
+        <p:txBody>
+          <a:bodyPr wrap="none" rtlCol="0">
+            <a:spAutoFit/>
+          </a:bodyPr>
+          <a:lstStyle/>
+          <a:p>
+            <a:r>
+              <a:rPr lang="en-US" altLang="ja-JP" sz="1600" dirty="0">
+                <a:latin typeface="IBM Plex Sans JP SemiBold" panose="020B0703050203000203" pitchFamily="50" charset="-128"/>
+                <a:ea typeface="IBM Plex Sans JP SemiBold" panose="020B0703050203000203" pitchFamily="50" charset="-128"/>
+              </a:rPr>
+              <a:t>6. Update History</a:t>
+            </a:r>
+            <a:endParaRPr kumimoji="1" lang="ja-JP" altLang="en-US" b="1" dirty="0">
+              <a:latin typeface="IBM Plex Sans JP SemiBold" panose="020B0703050203000203" pitchFamily="50" charset="-128"/>
+              <a:ea typeface="IBM Plex Sans JP SemiBold" panose="020B0703050203000203" pitchFamily="50" charset="-128"/>
+            </a:endParaRPr>
+          </a:p>
+        </p:txBody>
+      </p:sp>
+      <p:sp>
+        <p:nvSpPr>
+          <p:cNvPr id="6" name="テキスト ボックス 5">
+            <a:extLst>
+              <a:ext uri="{FF2B5EF4-FFF2-40B4-BE49-F238E27FC236}">
+                <a16:creationId xmlns:a16="http://schemas.microsoft.com/office/drawing/2014/main" id="{772E1925-419D-E6C3-9438-BD98D2BBDD58}"/>
+              </a:ext>
+            </a:extLst>
+          </p:cNvPr>
+          <p:cNvSpPr txBox="1"/>
+          <p:nvPr/>
+        </p:nvSpPr>
+        <p:spPr>
+          <a:xfrm>
+            <a:off x="638323" y="7599215"/>
+            <a:ext cx="5649491" cy="507831"/>
+          </a:xfrm>
+          <a:prstGeom prst="rect">
+            <a:avLst/>
+          </a:prstGeom>
+          <a:noFill/>
+        </p:spPr>
+        <p:txBody>
+          <a:bodyPr wrap="square" rtlCol="0">
+            <a:spAutoFit/>
+          </a:bodyPr>
+          <a:lstStyle/>
+          <a:p>
+            <a:r>
+              <a:rPr lang="en-US" altLang="ja-JP" sz="900" dirty="0">
+                <a:latin typeface="IBM Plex Sans JP" panose="020B0503050203000203" pitchFamily="50" charset="-128"/>
+                <a:ea typeface="IBM Plex Sans JP" panose="020B0503050203000203" pitchFamily="50" charset="-128"/>
+              </a:rPr>
+              <a:t>Ver.1.00  2026-07-02  First Edition Published</a:t>
+            </a:r>
+          </a:p>
+          <a:p>
+            <a:r>
+              <a:rPr lang="en-US" altLang="ja-JP" sz="900" dirty="0">
+                <a:latin typeface="IBM Plex Sans JP" panose="020B0503050203000203" pitchFamily="50" charset="-128"/>
+                <a:ea typeface="IBM Plex Sans JP" panose="020B0503050203000203" pitchFamily="50" charset="-128"/>
+              </a:rPr>
+              <a:t>Ver.1.10  2026-07-02  Revisions for Integrated Design</a:t>
+            </a:r>
+          </a:p>
+          <a:p>
+            <a:endParaRPr kumimoji="1" lang="ja-JP" altLang="en-US" sz="900" b="1" dirty="0">
+              <a:latin typeface="IBM Plex Sans JP" panose="020B0503050203000203" pitchFamily="50" charset="-128"/>
+              <a:ea typeface="IBM Plex Sans JP" panose="020B0503050203000203" pitchFamily="50" charset="-128"/>
+            </a:endParaRPr>
+          </a:p>
+        </p:txBody>
+      </p:sp>
+      <p:pic>
+        <p:nvPicPr>
+          <p:cNvPr id="9" name="図 8">
+            <a:extLst>
+              <a:ext uri="{FF2B5EF4-FFF2-40B4-BE49-F238E27FC236}">
+                <a16:creationId xmlns:a16="http://schemas.microsoft.com/office/drawing/2014/main" id="{0012A0F4-0BEF-52F9-839A-7754F15453D4}"/>
+              </a:ext>
+            </a:extLst>
+          </p:cNvPr>
+          <p:cNvPicPr>
+            <a:picLocks noChangeAspect="1"/>
+          </p:cNvPicPr>
+          <p:nvPr/>
+        </p:nvPicPr>
+        <p:blipFill>
+          <a:blip r:embed="rId3"/>
+          <a:stretch>
+            <a:fillRect/>
+          </a:stretch>
+        </p:blipFill>
+        <p:spPr>
+          <a:xfrm>
+            <a:off x="666614" y="3276700"/>
+            <a:ext cx="5521536" cy="3874587"/>
+          </a:xfrm>
+          <a:prstGeom prst="rect">
+            <a:avLst/>
+          </a:prstGeom>
         </p:spPr>
       </p:pic>
     </p:spTree>

--- a/Documents/Original/FlexChroma_Tour_Guide_EN.pptx
+++ b/Documents/Original/FlexChroma_Tour_Guide_EN.pptx
@@ -249,7 +249,7 @@
           <a:p>
             <a:fld id="{71132294-360C-4425-B294-91EF6E97A591}" type="datetimeFigureOut">
               <a:rPr kumimoji="1" lang="ja-JP" altLang="en-US" smtClean="0"/>
-              <a:t>2026/7/22</a:t>
+              <a:t>2026/7/23</a:t>
             </a:fld>
             <a:endParaRPr kumimoji="1" lang="ja-JP" altLang="en-US"/>
           </a:p>
@@ -451,7 +451,7 @@
           <a:p>
             <a:fld id="{71132294-360C-4425-B294-91EF6E97A591}" type="datetimeFigureOut">
               <a:rPr kumimoji="1" lang="ja-JP" altLang="en-US" smtClean="0"/>
-              <a:t>2026/7/22</a:t>
+              <a:t>2026/7/23</a:t>
             </a:fld>
             <a:endParaRPr kumimoji="1" lang="ja-JP" altLang="en-US"/>
           </a:p>
@@ -663,7 +663,7 @@
           <a:p>
             <a:fld id="{71132294-360C-4425-B294-91EF6E97A591}" type="datetimeFigureOut">
               <a:rPr kumimoji="1" lang="ja-JP" altLang="en-US" smtClean="0"/>
-              <a:t>2026/7/22</a:t>
+              <a:t>2026/7/23</a:t>
             </a:fld>
             <a:endParaRPr kumimoji="1" lang="ja-JP" altLang="en-US"/>
           </a:p>
@@ -865,7 +865,7 @@
           <a:p>
             <a:fld id="{71132294-360C-4425-B294-91EF6E97A591}" type="datetimeFigureOut">
               <a:rPr kumimoji="1" lang="ja-JP" altLang="en-US" smtClean="0"/>
-              <a:t>2026/7/22</a:t>
+              <a:t>2026/7/23</a:t>
             </a:fld>
             <a:endParaRPr kumimoji="1" lang="ja-JP" altLang="en-US"/>
           </a:p>
@@ -1111,7 +1111,7 @@
           <a:p>
             <a:fld id="{71132294-360C-4425-B294-91EF6E97A591}" type="datetimeFigureOut">
               <a:rPr kumimoji="1" lang="ja-JP" altLang="en-US" smtClean="0"/>
-              <a:t>2026/7/22</a:t>
+              <a:t>2026/7/23</a:t>
             </a:fld>
             <a:endParaRPr kumimoji="1" lang="ja-JP" altLang="en-US"/>
           </a:p>
@@ -1407,7 +1407,7 @@
           <a:p>
             <a:fld id="{71132294-360C-4425-B294-91EF6E97A591}" type="datetimeFigureOut">
               <a:rPr kumimoji="1" lang="ja-JP" altLang="en-US" smtClean="0"/>
-              <a:t>2026/7/22</a:t>
+              <a:t>2026/7/23</a:t>
             </a:fld>
             <a:endParaRPr kumimoji="1" lang="ja-JP" altLang="en-US"/>
           </a:p>
@@ -1838,7 +1838,7 @@
           <a:p>
             <a:fld id="{71132294-360C-4425-B294-91EF6E97A591}" type="datetimeFigureOut">
               <a:rPr kumimoji="1" lang="ja-JP" altLang="en-US" smtClean="0"/>
-              <a:t>2026/7/22</a:t>
+              <a:t>2026/7/23</a:t>
             </a:fld>
             <a:endParaRPr kumimoji="1" lang="ja-JP" altLang="en-US"/>
           </a:p>
@@ -1956,7 +1956,7 @@
           <a:p>
             <a:fld id="{71132294-360C-4425-B294-91EF6E97A591}" type="datetimeFigureOut">
               <a:rPr kumimoji="1" lang="ja-JP" altLang="en-US" smtClean="0"/>
-              <a:t>2026/7/22</a:t>
+              <a:t>2026/7/23</a:t>
             </a:fld>
             <a:endParaRPr kumimoji="1" lang="ja-JP" altLang="en-US"/>
           </a:p>
@@ -2051,7 +2051,7 @@
           <a:p>
             <a:fld id="{71132294-360C-4425-B294-91EF6E97A591}" type="datetimeFigureOut">
               <a:rPr kumimoji="1" lang="ja-JP" altLang="en-US" smtClean="0"/>
-              <a:t>2026/7/22</a:t>
+              <a:t>2026/7/23</a:t>
             </a:fld>
             <a:endParaRPr kumimoji="1" lang="ja-JP" altLang="en-US"/>
           </a:p>
@@ -2360,7 +2360,7 @@
           <a:p>
             <a:fld id="{71132294-360C-4425-B294-91EF6E97A591}" type="datetimeFigureOut">
               <a:rPr kumimoji="1" lang="ja-JP" altLang="en-US" smtClean="0"/>
-              <a:t>2026/7/22</a:t>
+              <a:t>2026/7/23</a:t>
             </a:fld>
             <a:endParaRPr kumimoji="1" lang="ja-JP" altLang="en-US"/>
           </a:p>
@@ -2617,7 +2617,7 @@
           <a:p>
             <a:fld id="{71132294-360C-4425-B294-91EF6E97A591}" type="datetimeFigureOut">
               <a:rPr kumimoji="1" lang="ja-JP" altLang="en-US" smtClean="0"/>
-              <a:t>2026/7/22</a:t>
+              <a:t>2026/7/23</a:t>
             </a:fld>
             <a:endParaRPr kumimoji="1" lang="ja-JP" altLang="en-US"/>
           </a:p>
@@ -2862,7 +2862,7 @@
           <a:p>
             <a:fld id="{71132294-360C-4425-B294-91EF6E97A591}" type="datetimeFigureOut">
               <a:rPr kumimoji="1" lang="ja-JP" altLang="en-US" smtClean="0"/>
-              <a:t>2026/7/22</a:t>
+              <a:t>2026/7/23</a:t>
             </a:fld>
             <a:endParaRPr kumimoji="1" lang="ja-JP" altLang="en-US"/>
           </a:p>
@@ -5177,7 +5177,22 @@
                 <a:latin typeface="IBM Plex Sans JP" panose="020B0503050203000203" pitchFamily="50" charset="-128"/>
                 <a:ea typeface="IBM Plex Sans JP" panose="020B0503050203000203" pitchFamily="50" charset="-128"/>
               </a:rPr>
-              <a:t>- Let's Explore FlexChroma's Models -</a:t>
+              <a:t>- Let's Explore </a:t>
+            </a:r>
+            <a:r>
+              <a:rPr lang="en-US" altLang="ja-JP" sz="1600" dirty="0">
+                <a:latin typeface="Segoe UI Semibold" panose="020B0702040204020203" pitchFamily="34" charset="0"/>
+                <a:ea typeface="IBM Plex Sans JP" panose="020B0503050203000203" pitchFamily="50" charset="-128"/>
+                <a:cs typeface="Segoe UI Semibold" panose="020B0702040204020203" pitchFamily="34" charset="0"/>
+              </a:rPr>
+              <a:t>FlexChroma</a:t>
+            </a:r>
+            <a:r>
+              <a:rPr lang="en-US" altLang="ja-JP" sz="1600" dirty="0">
+                <a:latin typeface="IBM Plex Sans JP" panose="020B0503050203000203" pitchFamily="50" charset="-128"/>
+                <a:ea typeface="IBM Plex Sans JP" panose="020B0503050203000203" pitchFamily="50" charset="-128"/>
+              </a:rPr>
+              <a:t>'s Models -</a:t>
             </a:r>
             <a:endParaRPr kumimoji="1" lang="ja-JP" altLang="en-US" sz="1600" dirty="0">
               <a:latin typeface="IBM Plex Sans JP" panose="020B0503050203000203" pitchFamily="50" charset="-128"/>
@@ -7925,7 +7940,22 @@
                 <a:latin typeface="IBM Plex Sans JP" panose="020B0503050203000203" pitchFamily="50" charset="-128"/>
                 <a:ea typeface="IBM Plex Sans JP" panose="020B0503050203000203" pitchFamily="50" charset="-128"/>
               </a:rPr>
-              <a:t>- Let's Explore FlexChroma's Models -</a:t>
+              <a:t>- Let's Explore </a:t>
+            </a:r>
+            <a:r>
+              <a:rPr lang="en-US" altLang="ja-JP" sz="1600" dirty="0">
+                <a:latin typeface="Segoe UI Semibold" panose="020B0702040204020203" pitchFamily="34" charset="0"/>
+                <a:ea typeface="IBM Plex Sans JP" panose="020B0503050203000203" pitchFamily="50" charset="-128"/>
+                <a:cs typeface="Segoe UI Semibold" panose="020B0702040204020203" pitchFamily="34" charset="0"/>
+              </a:rPr>
+              <a:t>FlexChroma</a:t>
+            </a:r>
+            <a:r>
+              <a:rPr lang="en-US" altLang="ja-JP" sz="1600" dirty="0">
+                <a:latin typeface="IBM Plex Sans JP" panose="020B0503050203000203" pitchFamily="50" charset="-128"/>
+                <a:ea typeface="IBM Plex Sans JP" panose="020B0503050203000203" pitchFamily="50" charset="-128"/>
+              </a:rPr>
+              <a:t>'s Models -</a:t>
             </a:r>
             <a:endParaRPr kumimoji="1" lang="ja-JP" altLang="en-US" sz="1600" dirty="0">
               <a:latin typeface="IBM Plex Sans JP" panose="020B0503050203000203" pitchFamily="50" charset="-128"/>

--- a/Documents/Original/FlexChroma_Tour_Guide_EN.pptx
+++ b/Documents/Original/FlexChroma_Tour_Guide_EN.pptx
@@ -9,9 +9,10 @@
     <p:sldId id="257" r:id="rId3"/>
     <p:sldId id="258" r:id="rId4"/>
     <p:sldId id="259" r:id="rId5"/>
-    <p:sldId id="263" r:id="rId6"/>
-    <p:sldId id="264" r:id="rId7"/>
-    <p:sldId id="262" r:id="rId8"/>
+    <p:sldId id="265" r:id="rId6"/>
+    <p:sldId id="263" r:id="rId7"/>
+    <p:sldId id="264" r:id="rId8"/>
+    <p:sldId id="262" r:id="rId9"/>
   </p:sldIdLst>
   <p:sldSz cx="6858000" cy="9144000" type="screen4x3"/>
   <p:notesSz cx="7104063" cy="10234613"/>
@@ -249,7 +250,7 @@
           <a:p>
             <a:fld id="{71132294-360C-4425-B294-91EF6E97A591}" type="datetimeFigureOut">
               <a:rPr kumimoji="1" lang="ja-JP" altLang="en-US" smtClean="0"/>
-              <a:t>2026/7/23</a:t>
+              <a:t>2026/8/8</a:t>
             </a:fld>
             <a:endParaRPr kumimoji="1" lang="ja-JP" altLang="en-US"/>
           </a:p>
@@ -451,7 +452,7 @@
           <a:p>
             <a:fld id="{71132294-360C-4425-B294-91EF6E97A591}" type="datetimeFigureOut">
               <a:rPr kumimoji="1" lang="ja-JP" altLang="en-US" smtClean="0"/>
-              <a:t>2026/7/23</a:t>
+              <a:t>2026/8/8</a:t>
             </a:fld>
             <a:endParaRPr kumimoji="1" lang="ja-JP" altLang="en-US"/>
           </a:p>
@@ -663,7 +664,7 @@
           <a:p>
             <a:fld id="{71132294-360C-4425-B294-91EF6E97A591}" type="datetimeFigureOut">
               <a:rPr kumimoji="1" lang="ja-JP" altLang="en-US" smtClean="0"/>
-              <a:t>2026/7/23</a:t>
+              <a:t>2026/8/8</a:t>
             </a:fld>
             <a:endParaRPr kumimoji="1" lang="ja-JP" altLang="en-US"/>
           </a:p>
@@ -865,7 +866,7 @@
           <a:p>
             <a:fld id="{71132294-360C-4425-B294-91EF6E97A591}" type="datetimeFigureOut">
               <a:rPr kumimoji="1" lang="ja-JP" altLang="en-US" smtClean="0"/>
-              <a:t>2026/7/23</a:t>
+              <a:t>2026/8/8</a:t>
             </a:fld>
             <a:endParaRPr kumimoji="1" lang="ja-JP" altLang="en-US"/>
           </a:p>
@@ -1111,7 +1112,7 @@
           <a:p>
             <a:fld id="{71132294-360C-4425-B294-91EF6E97A591}" type="datetimeFigureOut">
               <a:rPr kumimoji="1" lang="ja-JP" altLang="en-US" smtClean="0"/>
-              <a:t>2026/7/23</a:t>
+              <a:t>2026/8/8</a:t>
             </a:fld>
             <a:endParaRPr kumimoji="1" lang="ja-JP" altLang="en-US"/>
           </a:p>
@@ -1407,7 +1408,7 @@
           <a:p>
             <a:fld id="{71132294-360C-4425-B294-91EF6E97A591}" type="datetimeFigureOut">
               <a:rPr kumimoji="1" lang="ja-JP" altLang="en-US" smtClean="0"/>
-              <a:t>2026/7/23</a:t>
+              <a:t>2026/8/8</a:t>
             </a:fld>
             <a:endParaRPr kumimoji="1" lang="ja-JP" altLang="en-US"/>
           </a:p>
@@ -1838,7 +1839,7 @@
           <a:p>
             <a:fld id="{71132294-360C-4425-B294-91EF6E97A591}" type="datetimeFigureOut">
               <a:rPr kumimoji="1" lang="ja-JP" altLang="en-US" smtClean="0"/>
-              <a:t>2026/7/23</a:t>
+              <a:t>2026/8/8</a:t>
             </a:fld>
             <a:endParaRPr kumimoji="1" lang="ja-JP" altLang="en-US"/>
           </a:p>
@@ -1956,7 +1957,7 @@
           <a:p>
             <a:fld id="{71132294-360C-4425-B294-91EF6E97A591}" type="datetimeFigureOut">
               <a:rPr kumimoji="1" lang="ja-JP" altLang="en-US" smtClean="0"/>
-              <a:t>2026/7/23</a:t>
+              <a:t>2026/8/8</a:t>
             </a:fld>
             <a:endParaRPr kumimoji="1" lang="ja-JP" altLang="en-US"/>
           </a:p>
@@ -2051,7 +2052,7 @@
           <a:p>
             <a:fld id="{71132294-360C-4425-B294-91EF6E97A591}" type="datetimeFigureOut">
               <a:rPr kumimoji="1" lang="ja-JP" altLang="en-US" smtClean="0"/>
-              <a:t>2026/7/23</a:t>
+              <a:t>2026/8/8</a:t>
             </a:fld>
             <a:endParaRPr kumimoji="1" lang="ja-JP" altLang="en-US"/>
           </a:p>
@@ -2360,7 +2361,7 @@
           <a:p>
             <a:fld id="{71132294-360C-4425-B294-91EF6E97A591}" type="datetimeFigureOut">
               <a:rPr kumimoji="1" lang="ja-JP" altLang="en-US" smtClean="0"/>
-              <a:t>2026/7/23</a:t>
+              <a:t>2026/8/8</a:t>
             </a:fld>
             <a:endParaRPr kumimoji="1" lang="ja-JP" altLang="en-US"/>
           </a:p>
@@ -2617,7 +2618,7 @@
           <a:p>
             <a:fld id="{71132294-360C-4425-B294-91EF6E97A591}" type="datetimeFigureOut">
               <a:rPr kumimoji="1" lang="ja-JP" altLang="en-US" smtClean="0"/>
-              <a:t>2026/7/23</a:t>
+              <a:t>2026/8/8</a:t>
             </a:fld>
             <a:endParaRPr kumimoji="1" lang="ja-JP" altLang="en-US"/>
           </a:p>
@@ -2862,7 +2863,7 @@
           <a:p>
             <a:fld id="{71132294-360C-4425-B294-91EF6E97A591}" type="datetimeFigureOut">
               <a:rPr kumimoji="1" lang="ja-JP" altLang="en-US" smtClean="0"/>
-              <a:t>2026/7/23</a:t>
+              <a:t>2026/8/8</a:t>
             </a:fld>
             <a:endParaRPr kumimoji="1" lang="ja-JP" altLang="en-US"/>
           </a:p>
@@ -6887,7 +6888,7 @@
             <a:pPr algn="ctr"/>
             <a:r>
               <a:rPr kumimoji="1" lang="en-US" altLang="ja-JP" dirty="0"/>
-              <a:t>2</a:t>
+              <a:t>3</a:t>
             </a:r>
             <a:endParaRPr kumimoji="1" lang="ja-JP" altLang="en-US" dirty="0"/>
           </a:p>
@@ -6941,10 +6942,298 @@
       </p:sp>
       <p:sp>
         <p:nvSpPr>
-          <p:cNvPr id="2" name="楕円 1">
+          <p:cNvPr id="31" name="テキスト ボックス 30">
             <a:extLst>
               <a:ext uri="{FF2B5EF4-FFF2-40B4-BE49-F238E27FC236}">
-                <a16:creationId xmlns:a16="http://schemas.microsoft.com/office/drawing/2014/main" id="{F98466EE-556B-7D77-6461-4135277DD2E2}"/>
+                <a16:creationId xmlns:a16="http://schemas.microsoft.com/office/drawing/2014/main" id="{48078D51-1E2C-A979-AB68-98E18890C6F1}"/>
+              </a:ext>
+            </a:extLst>
+          </p:cNvPr>
+          <p:cNvSpPr txBox="1"/>
+          <p:nvPr/>
+        </p:nvSpPr>
+        <p:spPr>
+          <a:xfrm>
+            <a:off x="770844" y="610017"/>
+            <a:ext cx="2739853" cy="400110"/>
+          </a:xfrm>
+          <a:prstGeom prst="rect">
+            <a:avLst/>
+          </a:prstGeom>
+          <a:noFill/>
+        </p:spPr>
+        <p:txBody>
+          <a:bodyPr wrap="none" rtlCol="0">
+            <a:spAutoFit/>
+          </a:bodyPr>
+          <a:lstStyle/>
+          <a:p>
+            <a:r>
+              <a:rPr lang="en-US" altLang="ja-JP" sz="2000" dirty="0">
+                <a:latin typeface="IBM Plex Sans JP SemiBold" panose="020B0703050203000203" pitchFamily="50" charset="-128"/>
+                <a:ea typeface="IBM Plex Sans JP SemiBold" panose="020B0703050203000203" pitchFamily="50" charset="-128"/>
+              </a:rPr>
+              <a:t>5. Gradient Filament</a:t>
+            </a:r>
+            <a:endParaRPr kumimoji="1" lang="ja-JP" altLang="en-US" sz="2400" b="1" dirty="0">
+              <a:latin typeface="IBM Plex Sans JP SemiBold" panose="020B0703050203000203" pitchFamily="50" charset="-128"/>
+              <a:ea typeface="IBM Plex Sans JP SemiBold" panose="020B0703050203000203" pitchFamily="50" charset="-128"/>
+            </a:endParaRPr>
+          </a:p>
+        </p:txBody>
+      </p:sp>
+      <p:sp>
+        <p:nvSpPr>
+          <p:cNvPr id="33" name="テキスト ボックス 32">
+            <a:extLst>
+              <a:ext uri="{FF2B5EF4-FFF2-40B4-BE49-F238E27FC236}">
+                <a16:creationId xmlns:a16="http://schemas.microsoft.com/office/drawing/2014/main" id="{117BFD2F-556D-35B9-3D3B-9934FD82183A}"/>
+              </a:ext>
+            </a:extLst>
+          </p:cNvPr>
+          <p:cNvSpPr txBox="1"/>
+          <p:nvPr/>
+        </p:nvSpPr>
+        <p:spPr>
+          <a:xfrm>
+            <a:off x="675778" y="4341274"/>
+            <a:ext cx="5642222" cy="246221"/>
+          </a:xfrm>
+          <a:prstGeom prst="rect">
+            <a:avLst/>
+          </a:prstGeom>
+          <a:noFill/>
+        </p:spPr>
+        <p:txBody>
+          <a:bodyPr wrap="square" rtlCol="0">
+            <a:spAutoFit/>
+          </a:bodyPr>
+          <a:lstStyle/>
+          <a:p>
+            <a:r>
+              <a:rPr lang="en-US" altLang="ja-JP" sz="1000" dirty="0">
+                <a:latin typeface="IBM Plex Sans JP" panose="020B0503050203000203" pitchFamily="50" charset="-128"/>
+                <a:ea typeface="IBM Plex Sans JP" panose="020B0503050203000203" pitchFamily="50" charset="-128"/>
+              </a:rPr>
+              <a:t>The following is the model configuration for Gradient Filament.</a:t>
+            </a:r>
+          </a:p>
+        </p:txBody>
+      </p:sp>
+      <p:pic>
+        <p:nvPicPr>
+          <p:cNvPr id="4" name="図 3">
+            <a:extLst>
+              <a:ext uri="{FF2B5EF4-FFF2-40B4-BE49-F238E27FC236}">
+                <a16:creationId xmlns:a16="http://schemas.microsoft.com/office/drawing/2014/main" id="{6E2D4FDB-94FA-C5AC-1B21-C26CC02FAC4D}"/>
+              </a:ext>
+            </a:extLst>
+          </p:cNvPr>
+          <p:cNvPicPr>
+            <a:picLocks noChangeAspect="1"/>
+          </p:cNvPicPr>
+          <p:nvPr/>
+        </p:nvPicPr>
+        <p:blipFill>
+          <a:blip r:embed="rId2"/>
+          <a:stretch>
+            <a:fillRect/>
+          </a:stretch>
+        </p:blipFill>
+        <p:spPr>
+          <a:xfrm>
+            <a:off x="666614" y="4667054"/>
+            <a:ext cx="5521536" cy="3874587"/>
+          </a:xfrm>
+          <a:prstGeom prst="rect">
+            <a:avLst/>
+          </a:prstGeom>
+        </p:spPr>
+      </p:pic>
+      <p:pic>
+        <p:nvPicPr>
+          <p:cNvPr id="12" name="図 11">
+            <a:extLst>
+              <a:ext uri="{FF2B5EF4-FFF2-40B4-BE49-F238E27FC236}">
+                <a16:creationId xmlns:a16="http://schemas.microsoft.com/office/drawing/2014/main" id="{891DA657-8E1F-7254-472E-9A128ADE33E9}"/>
+              </a:ext>
+            </a:extLst>
+          </p:cNvPr>
+          <p:cNvPicPr>
+            <a:picLocks noChangeAspect="1" noChangeArrowheads="1"/>
+          </p:cNvPicPr>
+          <p:nvPr/>
+        </p:nvPicPr>
+        <p:blipFill>
+          <a:blip r:embed="rId3">
+            <a:extLst>
+              <a:ext uri="{28A0092B-C50C-407E-A947-70E740481C1C}">
+                <a14:useLocalDpi xmlns:a14="http://schemas.microsoft.com/office/drawing/2010/main" val="0"/>
+              </a:ext>
+            </a:extLst>
+          </a:blip>
+          <a:srcRect/>
+          <a:stretch>
+            <a:fillRect/>
+          </a:stretch>
+        </p:blipFill>
+        <p:spPr bwMode="auto">
+          <a:xfrm>
+            <a:off x="609082" y="3243238"/>
+            <a:ext cx="5636600" cy="919080"/>
+          </a:xfrm>
+          <a:prstGeom prst="rect">
+            <a:avLst/>
+          </a:prstGeom>
+          <a:noFill/>
+          <a:extLst>
+            <a:ext uri="{909E8E84-426E-40DD-AFC4-6F175D3DCCD1}">
+              <a14:hiddenFill xmlns:a14="http://schemas.microsoft.com/office/drawing/2010/main">
+                <a:solidFill>
+                  <a:srgbClr val="FFFFFF"/>
+                </a:solidFill>
+              </a14:hiddenFill>
+            </a:ext>
+          </a:extLst>
+        </p:spPr>
+      </p:pic>
+      <p:sp>
+        <p:nvSpPr>
+          <p:cNvPr id="19" name="テキスト ボックス 18">
+            <a:extLst>
+              <a:ext uri="{FF2B5EF4-FFF2-40B4-BE49-F238E27FC236}">
+                <a16:creationId xmlns:a16="http://schemas.microsoft.com/office/drawing/2014/main" id="{2F436DDF-1FC5-E203-1F1E-B570A467D825}"/>
+              </a:ext>
+            </a:extLst>
+          </p:cNvPr>
+          <p:cNvSpPr txBox="1"/>
+          <p:nvPr/>
+        </p:nvSpPr>
+        <p:spPr>
+          <a:xfrm>
+            <a:off x="668508" y="1032957"/>
+            <a:ext cx="5649491" cy="2031325"/>
+          </a:xfrm>
+          <a:prstGeom prst="rect">
+            <a:avLst/>
+          </a:prstGeom>
+          <a:noFill/>
+        </p:spPr>
+        <p:txBody>
+          <a:bodyPr wrap="square" rtlCol="0">
+            <a:spAutoFit/>
+          </a:bodyPr>
+          <a:lstStyle/>
+          <a:p>
+            <a:r>
+              <a:rPr lang="en-US" altLang="ja-JP" sz="1000" dirty="0">
+                <a:latin typeface="IBM Plex Sans JP" panose="020B0503050203000203" pitchFamily="50" charset="-128"/>
+                <a:ea typeface="IBM Plex Sans JP" panose="020B0503050203000203" pitchFamily="50" charset="-128"/>
+              </a:rPr>
+              <a:t>The Gradient Filament Series provides multiple color-changing Profiles and Plates with different cycle counts. Details vary by model, so please refer to each model’s description.</a:t>
+            </a:r>
+          </a:p>
+          <a:p>
+            <a:endParaRPr lang="en-US" altLang="ja-JP" sz="1000" dirty="0">
+              <a:latin typeface="IBM Plex Sans JP" panose="020B0503050203000203" pitchFamily="50" charset="-128"/>
+              <a:ea typeface="IBM Plex Sans JP" panose="020B0503050203000203" pitchFamily="50" charset="-128"/>
+            </a:endParaRPr>
+          </a:p>
+          <a:p>
+            <a:pPr marL="171450" indent="-171450">
+              <a:buFont typeface="Arial" panose="020B0604020202020204" pitchFamily="34" charset="0"/>
+              <a:buChar char="•"/>
+            </a:pPr>
+            <a:r>
+              <a:rPr lang="en-US" altLang="ja-JP" sz="1000" dirty="0">
+                <a:latin typeface="IBM Plex Sans JP" panose="020B0503050203000203" pitchFamily="50" charset="-128"/>
+                <a:ea typeface="IBM Plex Sans JP" panose="020B0503050203000203" pitchFamily="50" charset="-128"/>
+              </a:rPr>
+              <a:t>Color Curve: Settings based on color combinations. This option allows you to select the optimal gradient for each color—for example, “Vivid” for cyan and yellow, or “Contrast” for white and magenta.</a:t>
+            </a:r>
+          </a:p>
+          <a:p>
+            <a:endParaRPr lang="en-US" altLang="ja-JP" sz="600" dirty="0">
+              <a:latin typeface="IBM Plex Sans JP" panose="020B0503050203000203" pitchFamily="50" charset="-128"/>
+              <a:ea typeface="IBM Plex Sans JP" panose="020B0503050203000203" pitchFamily="50" charset="-128"/>
+            </a:endParaRPr>
+          </a:p>
+          <a:p>
+            <a:pPr marL="171450" indent="-171450">
+              <a:buFont typeface="Arial" panose="020B0604020202020204" pitchFamily="34" charset="0"/>
+              <a:buChar char="•"/>
+            </a:pPr>
+            <a:r>
+              <a:rPr lang="en-US" altLang="ja-JP" sz="1000" dirty="0">
+                <a:latin typeface="IBM Plex Sans JP" panose="020B0503050203000203" pitchFamily="50" charset="-128"/>
+                <a:ea typeface="IBM Plex Sans JP" panose="020B0503050203000203" pitchFamily="50" charset="-128"/>
+              </a:rPr>
+              <a:t>Number of cycles: The number that determines the frequency of the gradient. One cycle is counted as one complete cycle in which the filament changes from A to B to A and back.</a:t>
+            </a:r>
+          </a:p>
+          <a:p>
+            <a:endParaRPr lang="en-US" altLang="ja-JP" sz="1000" dirty="0">
+              <a:latin typeface="IBM Plex Sans JP" panose="020B0503050203000203" pitchFamily="50" charset="-128"/>
+              <a:ea typeface="IBM Plex Sans JP" panose="020B0503050203000203" pitchFamily="50" charset="-128"/>
+            </a:endParaRPr>
+          </a:p>
+          <a:p>
+            <a:r>
+              <a:rPr lang="en-US" altLang="ja-JP" sz="1000" dirty="0">
+                <a:latin typeface="IBM Plex Sans JP" panose="020B0503050203000203" pitchFamily="50" charset="-128"/>
+                <a:ea typeface="IBM Plex Sans JP" panose="020B0503050203000203" pitchFamily="50" charset="-128"/>
+              </a:rPr>
+              <a:t>Example: To create a fast-cycle gradient filament using cyan and magenta, select an S4 Model, choose a 4-cycle Plate, and use the Vivid curve Profile due to the high color contrast.</a:t>
+            </a:r>
+            <a:endParaRPr kumimoji="1" lang="ja-JP" altLang="en-US" sz="1000" b="1" dirty="0">
+              <a:latin typeface="IBM Plex Sans JP" panose="020B0503050203000203" pitchFamily="50" charset="-128"/>
+              <a:ea typeface="IBM Plex Sans JP" panose="020B0503050203000203" pitchFamily="50" charset="-128"/>
+            </a:endParaRPr>
+          </a:p>
+        </p:txBody>
+      </p:sp>
+    </p:spTree>
+    <p:extLst>
+      <p:ext uri="{BB962C8B-B14F-4D97-AF65-F5344CB8AC3E}">
+        <p14:creationId xmlns:p14="http://schemas.microsoft.com/office/powerpoint/2010/main" val="3750189089"/>
+      </p:ext>
+    </p:extLst>
+  </p:cSld>
+  <p:clrMapOvr>
+    <a:masterClrMapping/>
+  </p:clrMapOvr>
+</p:sld>
+</file>
+
+<file path=ppt/slides/slide5.xml><?xml version="1.0" encoding="utf-8"?>
+<p:sld xmlns:a="http://schemas.openxmlformats.org/drawingml/2006/main" xmlns:r="http://schemas.openxmlformats.org/officeDocument/2006/relationships" xmlns:p="http://schemas.openxmlformats.org/presentationml/2006/main">
+  <p:cSld>
+    <p:spTree>
+      <p:nvGrpSpPr>
+        <p:cNvPr id="1" name="">
+          <a:extLst>
+            <a:ext uri="{FF2B5EF4-FFF2-40B4-BE49-F238E27FC236}">
+              <a16:creationId xmlns:a16="http://schemas.microsoft.com/office/drawing/2014/main" id="{A393C8C7-89F2-A94E-7AE8-9C887FB06CE5}"/>
+            </a:ext>
+          </a:extLst>
+        </p:cNvPr>
+        <p:cNvGrpSpPr/>
+        <p:nvPr/>
+      </p:nvGrpSpPr>
+      <p:grpSpPr>
+        <a:xfrm>
+          <a:off x="0" y="0"/>
+          <a:ext cx="0" cy="0"/>
+          <a:chOff x="0" y="0"/>
+          <a:chExt cx="0" cy="0"/>
+        </a:xfrm>
+      </p:grpSpPr>
+      <p:sp>
+        <p:nvSpPr>
+          <p:cNvPr id="30" name="正方形/長方形 29">
+            <a:extLst>
+              <a:ext uri="{FF2B5EF4-FFF2-40B4-BE49-F238E27FC236}">
+                <a16:creationId xmlns:a16="http://schemas.microsoft.com/office/drawing/2014/main" id="{9BFD9E26-596F-2011-FBE1-A1903F5B53C7}"/>
               </a:ext>
             </a:extLst>
           </p:cNvPr>
@@ -6953,12 +7242,29 @@
         </p:nvSpPr>
         <p:spPr>
           <a:xfrm>
-            <a:off x="546348" y="7301051"/>
-            <a:ext cx="204669" cy="204669"/>
-          </a:xfrm>
-          <a:prstGeom prst="ellipse">
+            <a:off x="51086" y="45268"/>
+            <a:ext cx="6790099" cy="9053465"/>
+          </a:xfrm>
+          <a:prstGeom prst="rect">
             <a:avLst/>
           </a:prstGeom>
+          <a:gradFill>
+            <a:gsLst>
+              <a:gs pos="50000">
+                <a:srgbClr val="6200E8"/>
+              </a:gs>
+              <a:gs pos="10000">
+                <a:srgbClr val="EE00B0"/>
+              </a:gs>
+              <a:gs pos="90000">
+                <a:srgbClr val="0095E5"/>
+              </a:gs>
+            </a:gsLst>
+            <a:lin ang="1800000" scaled="0"/>
+          </a:gradFill>
+          <a:ln>
+            <a:noFill/>
+          </a:ln>
         </p:spPr>
         <p:style>
           <a:lnRef idx="2">
@@ -6981,16 +7287,471 @@
           <a:lstStyle/>
           <a:p>
             <a:pPr algn="ctr"/>
+            <a:endParaRPr kumimoji="1" lang="ja-JP" altLang="en-US" dirty="0"/>
+          </a:p>
+        </p:txBody>
+      </p:sp>
+      <p:sp>
+        <p:nvSpPr>
+          <p:cNvPr id="5" name="正方形/長方形 4">
+            <a:extLst>
+              <a:ext uri="{FF2B5EF4-FFF2-40B4-BE49-F238E27FC236}">
+                <a16:creationId xmlns:a16="http://schemas.microsoft.com/office/drawing/2014/main" id="{9EF1218F-F1B3-05A2-4973-43F9783E40FF}"/>
+              </a:ext>
+            </a:extLst>
+          </p:cNvPr>
+          <p:cNvSpPr/>
+          <p:nvPr/>
+        </p:nvSpPr>
+        <p:spPr>
+          <a:xfrm>
+            <a:off x="17051" y="5531"/>
+            <a:ext cx="6858000" cy="9144000"/>
+          </a:xfrm>
+          <a:prstGeom prst="rect">
+            <a:avLst/>
+          </a:prstGeom>
+          <a:solidFill>
+            <a:schemeClr val="bg1"/>
+          </a:solidFill>
+          <a:ln>
+            <a:noFill/>
+          </a:ln>
+        </p:spPr>
+        <p:style>
+          <a:lnRef idx="2">
+            <a:schemeClr val="accent1">
+              <a:shade val="15000"/>
+            </a:schemeClr>
+          </a:lnRef>
+          <a:fillRef idx="1">
+            <a:schemeClr val="accent1"/>
+          </a:fillRef>
+          <a:effectRef idx="0">
+            <a:schemeClr val="accent1"/>
+          </a:effectRef>
+          <a:fontRef idx="minor">
+            <a:schemeClr val="lt1"/>
+          </a:fontRef>
+        </p:style>
+        <p:txBody>
+          <a:bodyPr rtlCol="0" anchor="ctr"/>
+          <a:lstStyle/>
+          <a:p>
+            <a:pPr algn="ctr"/>
             <a:endParaRPr kumimoji="1" lang="ja-JP" altLang="en-US"/>
           </a:p>
         </p:txBody>
       </p:sp>
-      <p:sp>
-        <p:nvSpPr>
-          <p:cNvPr id="31" name="テキスト ボックス 30">
+      <p:grpSp>
+        <p:nvGrpSpPr>
+          <p:cNvPr id="10" name="グループ化 9">
             <a:extLst>
               <a:ext uri="{FF2B5EF4-FFF2-40B4-BE49-F238E27FC236}">
-                <a16:creationId xmlns:a16="http://schemas.microsoft.com/office/drawing/2014/main" id="{48078D51-1E2C-A979-AB68-98E18890C6F1}"/>
+                <a16:creationId xmlns:a16="http://schemas.microsoft.com/office/drawing/2014/main" id="{A090BDEB-6B52-CBA6-0B35-95E9A7FB9262}"/>
+              </a:ext>
+            </a:extLst>
+          </p:cNvPr>
+          <p:cNvGrpSpPr/>
+          <p:nvPr/>
+        </p:nvGrpSpPr>
+        <p:grpSpPr>
+          <a:xfrm>
+            <a:off x="0" y="0"/>
+            <a:ext cx="6865269" cy="9144001"/>
+            <a:chOff x="0" y="0"/>
+            <a:chExt cx="6865269" cy="9144001"/>
+          </a:xfrm>
+        </p:grpSpPr>
+        <p:sp>
+          <p:nvSpPr>
+            <p:cNvPr id="6" name="正方形/長方形 5">
+              <a:extLst>
+                <a:ext uri="{FF2B5EF4-FFF2-40B4-BE49-F238E27FC236}">
+                  <a16:creationId xmlns:a16="http://schemas.microsoft.com/office/drawing/2014/main" id="{651A178C-FF5E-949F-8F5B-64390BD61530}"/>
+                </a:ext>
+              </a:extLst>
+            </p:cNvPr>
+            <p:cNvSpPr/>
+            <p:nvPr/>
+          </p:nvSpPr>
+          <p:spPr>
+            <a:xfrm>
+              <a:off x="0" y="0"/>
+              <a:ext cx="6858000" cy="432000"/>
+            </a:xfrm>
+            <a:prstGeom prst="rect">
+              <a:avLst/>
+            </a:prstGeom>
+            <a:solidFill>
+              <a:schemeClr val="accent2">
+                <a:lumMod val="60000"/>
+                <a:lumOff val="40000"/>
+                <a:alpha val="10000"/>
+              </a:schemeClr>
+            </a:solidFill>
+            <a:ln>
+              <a:solidFill>
+                <a:schemeClr val="accent2">
+                  <a:lumMod val="50000"/>
+                </a:schemeClr>
+              </a:solidFill>
+              <a:prstDash val="dash"/>
+            </a:ln>
+          </p:spPr>
+          <p:style>
+            <a:lnRef idx="2">
+              <a:schemeClr val="accent1">
+                <a:shade val="15000"/>
+              </a:schemeClr>
+            </a:lnRef>
+            <a:fillRef idx="1">
+              <a:schemeClr val="accent1"/>
+            </a:fillRef>
+            <a:effectRef idx="0">
+              <a:schemeClr val="accent1"/>
+            </a:effectRef>
+            <a:fontRef idx="minor">
+              <a:schemeClr val="lt1"/>
+            </a:fontRef>
+          </p:style>
+          <p:txBody>
+            <a:bodyPr rtlCol="0" anchor="ctr"/>
+            <a:lstStyle/>
+            <a:p>
+              <a:pPr algn="ctr"/>
+              <a:endParaRPr kumimoji="1" lang="ja-JP" altLang="en-US"/>
+            </a:p>
+          </p:txBody>
+        </p:sp>
+        <p:sp>
+          <p:nvSpPr>
+            <p:cNvPr id="7" name="正方形/長方形 6">
+              <a:extLst>
+                <a:ext uri="{FF2B5EF4-FFF2-40B4-BE49-F238E27FC236}">
+                  <a16:creationId xmlns:a16="http://schemas.microsoft.com/office/drawing/2014/main" id="{0152D3AF-6FBD-6AE4-015F-6DE247DE7A68}"/>
+                </a:ext>
+              </a:extLst>
+            </p:cNvPr>
+            <p:cNvSpPr/>
+            <p:nvPr/>
+          </p:nvSpPr>
+          <p:spPr>
+            <a:xfrm>
+              <a:off x="0" y="8712000"/>
+              <a:ext cx="6858000" cy="432000"/>
+            </a:xfrm>
+            <a:prstGeom prst="rect">
+              <a:avLst/>
+            </a:prstGeom>
+            <a:solidFill>
+              <a:schemeClr val="accent2">
+                <a:lumMod val="60000"/>
+                <a:lumOff val="40000"/>
+                <a:alpha val="10000"/>
+              </a:schemeClr>
+            </a:solidFill>
+            <a:ln>
+              <a:solidFill>
+                <a:schemeClr val="accent2">
+                  <a:lumMod val="50000"/>
+                </a:schemeClr>
+              </a:solidFill>
+              <a:prstDash val="dash"/>
+            </a:ln>
+          </p:spPr>
+          <p:style>
+            <a:lnRef idx="2">
+              <a:schemeClr val="accent1">
+                <a:shade val="15000"/>
+              </a:schemeClr>
+            </a:lnRef>
+            <a:fillRef idx="1">
+              <a:schemeClr val="accent1"/>
+            </a:fillRef>
+            <a:effectRef idx="0">
+              <a:schemeClr val="accent1"/>
+            </a:effectRef>
+            <a:fontRef idx="minor">
+              <a:schemeClr val="lt1"/>
+            </a:fontRef>
+          </p:style>
+          <p:txBody>
+            <a:bodyPr rtlCol="0" anchor="ctr"/>
+            <a:lstStyle/>
+            <a:p>
+              <a:pPr algn="ctr"/>
+              <a:endParaRPr kumimoji="1" lang="ja-JP" altLang="en-US"/>
+            </a:p>
+          </p:txBody>
+        </p:sp>
+        <p:sp>
+          <p:nvSpPr>
+            <p:cNvPr id="8" name="正方形/長方形 7">
+              <a:extLst>
+                <a:ext uri="{FF2B5EF4-FFF2-40B4-BE49-F238E27FC236}">
+                  <a16:creationId xmlns:a16="http://schemas.microsoft.com/office/drawing/2014/main" id="{8DE08037-68E8-2936-43CC-32EB2FE9D9F9}"/>
+                </a:ext>
+              </a:extLst>
+            </p:cNvPr>
+            <p:cNvSpPr/>
+            <p:nvPr/>
+          </p:nvSpPr>
+          <p:spPr>
+            <a:xfrm>
+              <a:off x="0" y="1"/>
+              <a:ext cx="540000" cy="9144000"/>
+            </a:xfrm>
+            <a:prstGeom prst="rect">
+              <a:avLst/>
+            </a:prstGeom>
+            <a:solidFill>
+              <a:schemeClr val="accent2">
+                <a:lumMod val="60000"/>
+                <a:lumOff val="40000"/>
+                <a:alpha val="10000"/>
+              </a:schemeClr>
+            </a:solidFill>
+            <a:ln>
+              <a:solidFill>
+                <a:schemeClr val="accent2">
+                  <a:lumMod val="50000"/>
+                </a:schemeClr>
+              </a:solidFill>
+              <a:prstDash val="dash"/>
+            </a:ln>
+          </p:spPr>
+          <p:style>
+            <a:lnRef idx="2">
+              <a:schemeClr val="accent1">
+                <a:shade val="15000"/>
+              </a:schemeClr>
+            </a:lnRef>
+            <a:fillRef idx="1">
+              <a:schemeClr val="accent1"/>
+            </a:fillRef>
+            <a:effectRef idx="0">
+              <a:schemeClr val="accent1"/>
+            </a:effectRef>
+            <a:fontRef idx="minor">
+              <a:schemeClr val="lt1"/>
+            </a:fontRef>
+          </p:style>
+          <p:txBody>
+            <a:bodyPr rtlCol="0" anchor="ctr"/>
+            <a:lstStyle/>
+            <a:p>
+              <a:pPr algn="ctr"/>
+              <a:endParaRPr kumimoji="1" lang="ja-JP" altLang="en-US" dirty="0"/>
+            </a:p>
+          </p:txBody>
+        </p:sp>
+        <p:sp>
+          <p:nvSpPr>
+            <p:cNvPr id="9" name="正方形/長方形 8">
+              <a:extLst>
+                <a:ext uri="{FF2B5EF4-FFF2-40B4-BE49-F238E27FC236}">
+                  <a16:creationId xmlns:a16="http://schemas.microsoft.com/office/drawing/2014/main" id="{EC91F1F0-5A4A-5676-DD78-20A7D0AFFA95}"/>
+                </a:ext>
+              </a:extLst>
+            </p:cNvPr>
+            <p:cNvSpPr/>
+            <p:nvPr/>
+          </p:nvSpPr>
+          <p:spPr>
+            <a:xfrm>
+              <a:off x="6325269" y="0"/>
+              <a:ext cx="540000" cy="9144000"/>
+            </a:xfrm>
+            <a:prstGeom prst="rect">
+              <a:avLst/>
+            </a:prstGeom>
+            <a:solidFill>
+              <a:schemeClr val="accent2">
+                <a:lumMod val="60000"/>
+                <a:lumOff val="40000"/>
+                <a:alpha val="10000"/>
+              </a:schemeClr>
+            </a:solidFill>
+            <a:ln>
+              <a:solidFill>
+                <a:schemeClr val="accent2">
+                  <a:lumMod val="50000"/>
+                </a:schemeClr>
+              </a:solidFill>
+              <a:prstDash val="dash"/>
+            </a:ln>
+          </p:spPr>
+          <p:style>
+            <a:lnRef idx="2">
+              <a:schemeClr val="accent1">
+                <a:shade val="15000"/>
+              </a:schemeClr>
+            </a:lnRef>
+            <a:fillRef idx="1">
+              <a:schemeClr val="accent1"/>
+            </a:fillRef>
+            <a:effectRef idx="0">
+              <a:schemeClr val="accent1"/>
+            </a:effectRef>
+            <a:fontRef idx="minor">
+              <a:schemeClr val="lt1"/>
+            </a:fontRef>
+          </p:style>
+          <p:txBody>
+            <a:bodyPr rtlCol="0" anchor="ctr"/>
+            <a:lstStyle/>
+            <a:p>
+              <a:pPr algn="ctr"/>
+              <a:endParaRPr kumimoji="1" lang="ja-JP" altLang="en-US"/>
+            </a:p>
+          </p:txBody>
+        </p:sp>
+      </p:grpSp>
+      <p:sp>
+        <p:nvSpPr>
+          <p:cNvPr id="13" name="正方形/長方形 12">
+            <a:extLst>
+              <a:ext uri="{FF2B5EF4-FFF2-40B4-BE49-F238E27FC236}">
+                <a16:creationId xmlns:a16="http://schemas.microsoft.com/office/drawing/2014/main" id="{1AB0EAAB-5276-A6E3-A021-21246EBDE68F}"/>
+              </a:ext>
+            </a:extLst>
+          </p:cNvPr>
+          <p:cNvSpPr/>
+          <p:nvPr/>
+        </p:nvSpPr>
+        <p:spPr>
+          <a:xfrm>
+            <a:off x="554537" y="452468"/>
+            <a:ext cx="5756193" cy="54000"/>
+          </a:xfrm>
+          <a:prstGeom prst="rect">
+            <a:avLst/>
+          </a:prstGeom>
+        </p:spPr>
+        <p:style>
+          <a:lnRef idx="2">
+            <a:schemeClr val="accent1">
+              <a:shade val="15000"/>
+            </a:schemeClr>
+          </a:lnRef>
+          <a:fillRef idx="1">
+            <a:schemeClr val="accent1"/>
+          </a:fillRef>
+          <a:effectRef idx="0">
+            <a:schemeClr val="accent1"/>
+          </a:effectRef>
+          <a:fontRef idx="minor">
+            <a:schemeClr val="lt1"/>
+          </a:fontRef>
+        </p:style>
+        <p:txBody>
+          <a:bodyPr rtlCol="0" anchor="ctr"/>
+          <a:lstStyle/>
+          <a:p>
+            <a:pPr algn="ctr"/>
+            <a:endParaRPr kumimoji="1" lang="ja-JP" altLang="en-US"/>
+          </a:p>
+        </p:txBody>
+      </p:sp>
+      <p:sp>
+        <p:nvSpPr>
+          <p:cNvPr id="15" name="正方形/長方形 14">
+            <a:extLst>
+              <a:ext uri="{FF2B5EF4-FFF2-40B4-BE49-F238E27FC236}">
+                <a16:creationId xmlns:a16="http://schemas.microsoft.com/office/drawing/2014/main" id="{46C8B53A-D491-E224-F099-718526CCC672}"/>
+              </a:ext>
+            </a:extLst>
+          </p:cNvPr>
+          <p:cNvSpPr/>
+          <p:nvPr/>
+        </p:nvSpPr>
+        <p:spPr>
+          <a:xfrm>
+            <a:off x="554538" y="8661917"/>
+            <a:ext cx="2592000" cy="54000"/>
+          </a:xfrm>
+          <a:prstGeom prst="rect">
+            <a:avLst/>
+          </a:prstGeom>
+        </p:spPr>
+        <p:style>
+          <a:lnRef idx="2">
+            <a:schemeClr val="accent1">
+              <a:shade val="15000"/>
+            </a:schemeClr>
+          </a:lnRef>
+          <a:fillRef idx="1">
+            <a:schemeClr val="accent1"/>
+          </a:fillRef>
+          <a:effectRef idx="0">
+            <a:schemeClr val="accent1"/>
+          </a:effectRef>
+          <a:fontRef idx="minor">
+            <a:schemeClr val="lt1"/>
+          </a:fontRef>
+        </p:style>
+        <p:txBody>
+          <a:bodyPr rtlCol="0" anchor="ctr"/>
+          <a:lstStyle/>
+          <a:p>
+            <a:pPr algn="ctr"/>
+            <a:endParaRPr kumimoji="1" lang="ja-JP" altLang="en-US"/>
+          </a:p>
+        </p:txBody>
+      </p:sp>
+      <p:sp>
+        <p:nvSpPr>
+          <p:cNvPr id="16" name="正方形/長方形 15">
+            <a:extLst>
+              <a:ext uri="{FF2B5EF4-FFF2-40B4-BE49-F238E27FC236}">
+                <a16:creationId xmlns:a16="http://schemas.microsoft.com/office/drawing/2014/main" id="{28C97F63-617D-5B0B-66C2-00B8674BC71D}"/>
+              </a:ext>
+            </a:extLst>
+          </p:cNvPr>
+          <p:cNvSpPr/>
+          <p:nvPr/>
+        </p:nvSpPr>
+        <p:spPr>
+          <a:xfrm>
+            <a:off x="3734844" y="8661917"/>
+            <a:ext cx="2592000" cy="54000"/>
+          </a:xfrm>
+          <a:prstGeom prst="rect">
+            <a:avLst/>
+          </a:prstGeom>
+        </p:spPr>
+        <p:style>
+          <a:lnRef idx="2">
+            <a:schemeClr val="accent1">
+              <a:shade val="15000"/>
+            </a:schemeClr>
+          </a:lnRef>
+          <a:fillRef idx="1">
+            <a:schemeClr val="accent1"/>
+          </a:fillRef>
+          <a:effectRef idx="0">
+            <a:schemeClr val="accent1"/>
+          </a:effectRef>
+          <a:fontRef idx="minor">
+            <a:schemeClr val="lt1"/>
+          </a:fontRef>
+        </p:style>
+        <p:txBody>
+          <a:bodyPr rtlCol="0" anchor="ctr"/>
+          <a:lstStyle/>
+          <a:p>
+            <a:pPr algn="ctr"/>
+            <a:endParaRPr kumimoji="1" lang="ja-JP" altLang="en-US"/>
+          </a:p>
+        </p:txBody>
+      </p:sp>
+      <p:sp>
+        <p:nvSpPr>
+          <p:cNvPr id="17" name="テキスト ボックス 16">
+            <a:extLst>
+              <a:ext uri="{FF2B5EF4-FFF2-40B4-BE49-F238E27FC236}">
+                <a16:creationId xmlns:a16="http://schemas.microsoft.com/office/drawing/2014/main" id="{D90DDA51-B1AE-20A7-A699-251D7682CB62}"/>
               </a:ext>
             </a:extLst>
           </p:cNvPr>
@@ -6999,8 +7760,8 @@
         </p:nvSpPr>
         <p:spPr>
           <a:xfrm>
-            <a:off x="770844" y="610017"/>
-            <a:ext cx="2739853" cy="400110"/>
+            <a:off x="3163826" y="8511531"/>
+            <a:ext cx="575734" cy="369332"/>
           </a:xfrm>
           <a:prstGeom prst="rect">
             <a:avLst/>
@@ -7008,31 +7769,72 @@
           <a:noFill/>
         </p:spPr>
         <p:txBody>
-          <a:bodyPr wrap="none" rtlCol="0">
+          <a:bodyPr wrap="square" rtlCol="0" anchor="ctr">
             <a:spAutoFit/>
           </a:bodyPr>
           <a:lstStyle/>
           <a:p>
-            <a:r>
-              <a:rPr lang="en-US" altLang="ja-JP" sz="2000" dirty="0">
-                <a:latin typeface="IBM Plex Sans JP SemiBold" panose="020B0703050203000203" pitchFamily="50" charset="-128"/>
-                <a:ea typeface="IBM Plex Sans JP SemiBold" panose="020B0703050203000203" pitchFamily="50" charset="-128"/>
-              </a:rPr>
-              <a:t>5. Gradient Filament</a:t>
-            </a:r>
-            <a:endParaRPr kumimoji="1" lang="ja-JP" altLang="en-US" sz="2400" b="1" dirty="0">
-              <a:latin typeface="IBM Plex Sans JP SemiBold" panose="020B0703050203000203" pitchFamily="50" charset="-128"/>
-              <a:ea typeface="IBM Plex Sans JP SemiBold" panose="020B0703050203000203" pitchFamily="50" charset="-128"/>
-            </a:endParaRPr>
-          </a:p>
-        </p:txBody>
-      </p:sp>
-      <p:sp>
-        <p:nvSpPr>
-          <p:cNvPr id="32" name="テキスト ボックス 31">
+            <a:pPr algn="ctr"/>
+            <a:r>
+              <a:rPr kumimoji="1" lang="en-US" altLang="ja-JP" dirty="0"/>
+              <a:t>4</a:t>
+            </a:r>
+            <a:endParaRPr kumimoji="1" lang="ja-JP" altLang="en-US" dirty="0"/>
+          </a:p>
+        </p:txBody>
+      </p:sp>
+      <p:sp>
+        <p:nvSpPr>
+          <p:cNvPr id="2" name="楕円 1">
             <a:extLst>
               <a:ext uri="{FF2B5EF4-FFF2-40B4-BE49-F238E27FC236}">
-                <a16:creationId xmlns:a16="http://schemas.microsoft.com/office/drawing/2014/main" id="{F974243A-BE39-3111-BDC0-1688AF9439B9}"/>
+                <a16:creationId xmlns:a16="http://schemas.microsoft.com/office/drawing/2014/main" id="{6374B802-2C7D-61EC-FB1C-193F664D3C7B}"/>
+              </a:ext>
+            </a:extLst>
+          </p:cNvPr>
+          <p:cNvSpPr/>
+          <p:nvPr/>
+        </p:nvSpPr>
+        <p:spPr>
+          <a:xfrm>
+            <a:off x="546348" y="817076"/>
+            <a:ext cx="204669" cy="204669"/>
+          </a:xfrm>
+          <a:prstGeom prst="ellipse">
+            <a:avLst/>
+          </a:prstGeom>
+        </p:spPr>
+        <p:style>
+          <a:lnRef idx="2">
+            <a:schemeClr val="accent1">
+              <a:shade val="15000"/>
+            </a:schemeClr>
+          </a:lnRef>
+          <a:fillRef idx="1">
+            <a:schemeClr val="accent1"/>
+          </a:fillRef>
+          <a:effectRef idx="0">
+            <a:schemeClr val="accent1"/>
+          </a:effectRef>
+          <a:fontRef idx="minor">
+            <a:schemeClr val="lt1"/>
+          </a:fontRef>
+        </p:style>
+        <p:txBody>
+          <a:bodyPr rtlCol="0" anchor="ctr"/>
+          <a:lstStyle/>
+          <a:p>
+            <a:pPr algn="ctr"/>
+            <a:endParaRPr kumimoji="1" lang="ja-JP" altLang="en-US"/>
+          </a:p>
+        </p:txBody>
+      </p:sp>
+      <p:sp>
+        <p:nvSpPr>
+          <p:cNvPr id="34" name="テキスト ボックス 33">
+            <a:extLst>
+              <a:ext uri="{FF2B5EF4-FFF2-40B4-BE49-F238E27FC236}">
+                <a16:creationId xmlns:a16="http://schemas.microsoft.com/office/drawing/2014/main" id="{CBC6D4FE-402E-B8B5-1423-80EA899F669B}"/>
               </a:ext>
             </a:extLst>
           </p:cNvPr>
@@ -7041,102 +7843,7 @@
         </p:nvSpPr>
         <p:spPr>
           <a:xfrm>
-            <a:off x="668508" y="1032957"/>
-            <a:ext cx="5649491" cy="861774"/>
-          </a:xfrm>
-          <a:prstGeom prst="rect">
-            <a:avLst/>
-          </a:prstGeom>
-          <a:noFill/>
-        </p:spPr>
-        <p:txBody>
-          <a:bodyPr wrap="square" rtlCol="0">
-            <a:spAutoFit/>
-          </a:bodyPr>
-          <a:lstStyle/>
-          <a:p>
-            <a:r>
-              <a:rPr lang="en-US" altLang="ja-JP" sz="1000" dirty="0">
-                <a:latin typeface="IBM Plex Sans JP" panose="020B0503050203000203" pitchFamily="50" charset="-128"/>
-                <a:ea typeface="IBM Plex Sans JP" panose="020B0503050203000203" pitchFamily="50" charset="-128"/>
-              </a:rPr>
-              <a:t>The Gradient Filament Series provides multiple color-changing Profiles and Plates with different cycle counts. Details vary by model, so please refer to each model’s description.</a:t>
-            </a:r>
-          </a:p>
-          <a:p>
-            <a:endParaRPr lang="en-US" altLang="ja-JP" sz="1000" dirty="0">
-              <a:latin typeface="IBM Plex Sans JP" panose="020B0503050203000203" pitchFamily="50" charset="-128"/>
-              <a:ea typeface="IBM Plex Sans JP" panose="020B0503050203000203" pitchFamily="50" charset="-128"/>
-            </a:endParaRPr>
-          </a:p>
-          <a:p>
-            <a:r>
-              <a:rPr lang="en-US" altLang="ja-JP" sz="1000" dirty="0">
-                <a:latin typeface="IBM Plex Sans JP" panose="020B0503050203000203" pitchFamily="50" charset="-128"/>
-                <a:ea typeface="IBM Plex Sans JP" panose="020B0503050203000203" pitchFamily="50" charset="-128"/>
-              </a:rPr>
-              <a:t>Example: To create a fast-cycle gradient filament using cyan and magenta, select an S4 Model, choose a 4-cycle Plate, and use the Vivid curve Profile due to the high color contrast.</a:t>
-            </a:r>
-            <a:endParaRPr kumimoji="1" lang="ja-JP" altLang="en-US" sz="1000" b="1" dirty="0">
-              <a:latin typeface="IBM Plex Sans JP" panose="020B0503050203000203" pitchFamily="50" charset="-128"/>
-              <a:ea typeface="IBM Plex Sans JP" panose="020B0503050203000203" pitchFamily="50" charset="-128"/>
-            </a:endParaRPr>
-          </a:p>
-        </p:txBody>
-      </p:sp>
-      <p:sp>
-        <p:nvSpPr>
-          <p:cNvPr id="33" name="テキスト ボックス 32">
-            <a:extLst>
-              <a:ext uri="{FF2B5EF4-FFF2-40B4-BE49-F238E27FC236}">
-                <a16:creationId xmlns:a16="http://schemas.microsoft.com/office/drawing/2014/main" id="{117BFD2F-556D-35B9-3D3B-9934FD82183A}"/>
-              </a:ext>
-            </a:extLst>
-          </p:cNvPr>
-          <p:cNvSpPr txBox="1"/>
-          <p:nvPr/>
-        </p:nvSpPr>
-        <p:spPr>
-          <a:xfrm>
-            <a:off x="675778" y="3011477"/>
-            <a:ext cx="5642222" cy="246221"/>
-          </a:xfrm>
-          <a:prstGeom prst="rect">
-            <a:avLst/>
-          </a:prstGeom>
-          <a:noFill/>
-        </p:spPr>
-        <p:txBody>
-          <a:bodyPr wrap="square" rtlCol="0">
-            <a:spAutoFit/>
-          </a:bodyPr>
-          <a:lstStyle/>
-          <a:p>
-            <a:r>
-              <a:rPr lang="en-US" altLang="ja-JP" sz="1000" dirty="0">
-                <a:latin typeface="IBM Plex Sans JP" panose="020B0503050203000203" pitchFamily="50" charset="-128"/>
-                <a:ea typeface="IBM Plex Sans JP" panose="020B0503050203000203" pitchFamily="50" charset="-128"/>
-              </a:rPr>
-              <a:t>The following is the model configuration for Gradient Filament.</a:t>
-            </a:r>
-          </a:p>
-        </p:txBody>
-      </p:sp>
-      <p:sp>
-        <p:nvSpPr>
-          <p:cNvPr id="34" name="テキスト ボックス 33">
-            <a:extLst>
-              <a:ext uri="{FF2B5EF4-FFF2-40B4-BE49-F238E27FC236}">
-                <a16:creationId xmlns:a16="http://schemas.microsoft.com/office/drawing/2014/main" id="{2D9D80EE-7B63-AF1B-1B3A-EA5DC86D0696}"/>
-              </a:ext>
-            </a:extLst>
-          </p:cNvPr>
-          <p:cNvSpPr txBox="1"/>
-          <p:nvPr/>
-        </p:nvSpPr>
-        <p:spPr>
-          <a:xfrm>
-            <a:off x="778114" y="7268269"/>
+            <a:off x="778114" y="784294"/>
             <a:ext cx="1923925" cy="338554"/>
           </a:xfrm>
           <a:prstGeom prst="rect">
@@ -7169,7 +7876,7 @@
           <p:cNvPr id="35" name="テキスト ボックス 34">
             <a:extLst>
               <a:ext uri="{FF2B5EF4-FFF2-40B4-BE49-F238E27FC236}">
-                <a16:creationId xmlns:a16="http://schemas.microsoft.com/office/drawing/2014/main" id="{D11D4DCF-F707-995B-6436-8A7DA1522C33}"/>
+                <a16:creationId xmlns:a16="http://schemas.microsoft.com/office/drawing/2014/main" id="{32A2A4DF-78D0-3AE6-5C01-95CD744AB7F1}"/>
               </a:ext>
             </a:extLst>
           </p:cNvPr>
@@ -7178,7 +7885,7 @@
         </p:nvSpPr>
         <p:spPr>
           <a:xfrm>
-            <a:off x="638323" y="7599215"/>
+            <a:off x="638323" y="1115240"/>
             <a:ext cx="5649491" cy="507831"/>
           </a:xfrm>
           <a:prstGeom prst="rect">
@@ -7210,94 +7917,20 @@
             </a:r>
           </a:p>
           <a:p>
-            <a:endParaRPr kumimoji="1" lang="ja-JP" altLang="en-US" sz="900" b="1" dirty="0">
-              <a:latin typeface="IBM Plex Sans JP" panose="020B0503050203000203" pitchFamily="50" charset="-128"/>
-              <a:ea typeface="IBM Plex Sans JP" panose="020B0503050203000203" pitchFamily="50" charset="-128"/>
-            </a:endParaRPr>
-          </a:p>
-        </p:txBody>
-      </p:sp>
-      <p:pic>
-        <p:nvPicPr>
-          <p:cNvPr id="36" name="図 35">
-            <a:extLst>
-              <a:ext uri="{FF2B5EF4-FFF2-40B4-BE49-F238E27FC236}">
-                <a16:creationId xmlns:a16="http://schemas.microsoft.com/office/drawing/2014/main" id="{4A2E15D4-B4F1-FC30-49B0-998127E330E2}"/>
-              </a:ext>
-            </a:extLst>
-          </p:cNvPr>
-          <p:cNvPicPr>
-            <a:picLocks noChangeAspect="1"/>
-          </p:cNvPicPr>
-          <p:nvPr/>
-        </p:nvPicPr>
-        <p:blipFill>
-          <a:blip r:embed="rId2"/>
-          <a:stretch>
-            <a:fillRect/>
-          </a:stretch>
-        </p:blipFill>
-        <p:spPr>
-          <a:xfrm>
-            <a:off x="633073" y="1909692"/>
-            <a:ext cx="5588622" cy="913760"/>
-          </a:xfrm>
-          <a:prstGeom prst="rect">
-            <a:avLst/>
-          </a:prstGeom>
-        </p:spPr>
-      </p:pic>
-      <p:pic>
-        <p:nvPicPr>
-          <p:cNvPr id="37" name="図 36">
-            <a:extLst>
-              <a:ext uri="{FF2B5EF4-FFF2-40B4-BE49-F238E27FC236}">
-                <a16:creationId xmlns:a16="http://schemas.microsoft.com/office/drawing/2014/main" id="{B45BD161-DA0D-5CE8-8162-DC38C4F2F313}"/>
-              </a:ext>
-            </a:extLst>
-          </p:cNvPr>
-          <p:cNvPicPr>
-            <a:picLocks noChangeAspect="1" noChangeArrowheads="1"/>
-          </p:cNvPicPr>
-          <p:nvPr/>
-        </p:nvPicPr>
-        <p:blipFill>
-          <a:blip r:embed="rId3">
-            <a:extLst>
-              <a:ext uri="{28A0092B-C50C-407E-A947-70E740481C1C}">
-                <a14:useLocalDpi xmlns:a14="http://schemas.microsoft.com/office/drawing/2010/main" val="0"/>
-              </a:ext>
-            </a:extLst>
-          </a:blip>
-          <a:srcRect/>
-          <a:stretch>
-            <a:fillRect/>
-          </a:stretch>
-        </p:blipFill>
-        <p:spPr bwMode="auto">
-          <a:xfrm>
-            <a:off x="587545" y="3188861"/>
-            <a:ext cx="5679677" cy="4002590"/>
-          </a:xfrm>
-          <a:prstGeom prst="rect">
-            <a:avLst/>
-          </a:prstGeom>
-          <a:noFill/>
-          <a:extLst>
-            <a:ext uri="{909E8E84-426E-40DD-AFC4-6F175D3DCCD1}">
-              <a14:hiddenFill xmlns:a14="http://schemas.microsoft.com/office/drawing/2010/main">
-                <a:solidFill>
-                  <a:srgbClr val="FFFFFF"/>
-                </a:solidFill>
-              </a14:hiddenFill>
-            </a:ext>
-          </a:extLst>
-        </p:spPr>
-      </p:pic>
+            <a:r>
+              <a:rPr lang="en-US" altLang="ja-JP" sz="900" dirty="0">
+                <a:latin typeface="IBM Plex Sans JP" panose="020B0503050203000203" pitchFamily="50" charset="-128"/>
+                <a:ea typeface="IBM Plex Sans JP" panose="020B0503050203000203" pitchFamily="50" charset="-128"/>
+              </a:rPr>
+              <a:t>Ver.1.11  2026-08-08  Revisions to align with the Japanese version</a:t>
+            </a:r>
+          </a:p>
+        </p:txBody>
+      </p:sp>
     </p:spTree>
     <p:extLst>
       <p:ext uri="{BB962C8B-B14F-4D97-AF65-F5344CB8AC3E}">
-        <p14:creationId xmlns:p14="http://schemas.microsoft.com/office/powerpoint/2010/main" val="3750189089"/>
+        <p14:creationId xmlns:p14="http://schemas.microsoft.com/office/powerpoint/2010/main" val="3727320542"/>
       </p:ext>
     </p:extLst>
   </p:cSld>
@@ -7307,7 +7940,7 @@
 </p:sld>
 </file>
 
-<file path=ppt/slides/slide5.xml><?xml version="1.0" encoding="utf-8"?>
+<file path=ppt/slides/slide6.xml><?xml version="1.0" encoding="utf-8"?>
 <p:sld xmlns:a="http://schemas.openxmlformats.org/drawingml/2006/main" xmlns:r="http://schemas.openxmlformats.org/officeDocument/2006/relationships" xmlns:p="http://schemas.openxmlformats.org/presentationml/2006/main">
   <p:cSld>
     <p:spTree>
@@ -8182,36 +8815,6 @@
           </a:p>
         </p:txBody>
       </p:sp>
-      <p:pic>
-        <p:nvPicPr>
-          <p:cNvPr id="24" name="図 23">
-            <a:extLst>
-              <a:ext uri="{FF2B5EF4-FFF2-40B4-BE49-F238E27FC236}">
-                <a16:creationId xmlns:a16="http://schemas.microsoft.com/office/drawing/2014/main" id="{5F2979AD-644B-ADCD-5CC2-84EB3A43695A}"/>
-              </a:ext>
-            </a:extLst>
-          </p:cNvPr>
-          <p:cNvPicPr>
-            <a:picLocks noChangeAspect="1"/>
-          </p:cNvPicPr>
-          <p:nvPr/>
-        </p:nvPicPr>
-        <p:blipFill>
-          <a:blip r:embed="rId2"/>
-          <a:stretch>
-            <a:fillRect/>
-          </a:stretch>
-        </p:blipFill>
-        <p:spPr>
-          <a:xfrm>
-            <a:off x="551490" y="5293717"/>
-            <a:ext cx="5759241" cy="1144558"/>
-          </a:xfrm>
-          <a:prstGeom prst="rect">
-            <a:avLst/>
-          </a:prstGeom>
-        </p:spPr>
-      </p:pic>
       <p:sp>
         <p:nvSpPr>
           <p:cNvPr id="25" name="テキスト ボックス 24">
@@ -8403,6 +9006,53 @@
           </a:p>
         </p:txBody>
       </p:sp>
+      <p:pic>
+        <p:nvPicPr>
+          <p:cNvPr id="4" name="図 3">
+            <a:extLst>
+              <a:ext uri="{FF2B5EF4-FFF2-40B4-BE49-F238E27FC236}">
+                <a16:creationId xmlns:a16="http://schemas.microsoft.com/office/drawing/2014/main" id="{8A8FE461-7AA8-8B0B-6152-72DC79CCBDC3}"/>
+              </a:ext>
+            </a:extLst>
+          </p:cNvPr>
+          <p:cNvPicPr>
+            <a:picLocks noChangeAspect="1" noChangeArrowheads="1"/>
+          </p:cNvPicPr>
+          <p:nvPr/>
+        </p:nvPicPr>
+        <p:blipFill>
+          <a:blip r:embed="rId2">
+            <a:extLst>
+              <a:ext uri="{28A0092B-C50C-407E-A947-70E740481C1C}">
+                <a14:useLocalDpi xmlns:a14="http://schemas.microsoft.com/office/drawing/2010/main" val="0"/>
+              </a:ext>
+            </a:extLst>
+          </a:blip>
+          <a:srcRect/>
+          <a:stretch>
+            <a:fillRect/>
+          </a:stretch>
+        </p:blipFill>
+        <p:spPr bwMode="auto">
+          <a:xfrm>
+            <a:off x="464213" y="5205559"/>
+            <a:ext cx="6022648" cy="1283693"/>
+          </a:xfrm>
+          <a:prstGeom prst="rect">
+            <a:avLst/>
+          </a:prstGeom>
+          <a:noFill/>
+          <a:extLst>
+            <a:ext uri="{909E8E84-426E-40DD-AFC4-6F175D3DCCD1}">
+              <a14:hiddenFill xmlns:a14="http://schemas.microsoft.com/office/drawing/2010/main">
+                <a:solidFill>
+                  <a:srgbClr val="FFFFFF"/>
+                </a:solidFill>
+              </a14:hiddenFill>
+            </a:ext>
+          </a:extLst>
+        </p:spPr>
+      </p:pic>
     </p:spTree>
     <p:extLst>
       <p:ext uri="{BB962C8B-B14F-4D97-AF65-F5344CB8AC3E}">
@@ -8416,7 +9066,7 @@
 </p:sld>
 </file>
 
-<file path=ppt/slides/slide6.xml><?xml version="1.0" encoding="utf-8"?>
+<file path=ppt/slides/slide7.xml><?xml version="1.0" encoding="utf-8"?>
 <p:sld xmlns:a="http://schemas.openxmlformats.org/drawingml/2006/main" xmlns:r="http://schemas.openxmlformats.org/officeDocument/2006/relationships" xmlns:p="http://schemas.openxmlformats.org/presentationml/2006/main">
   <p:cSld>
     <p:spTree>
@@ -9239,7 +9889,7 @@
 </p:sld>
 </file>
 
-<file path=ppt/slides/slide7.xml><?xml version="1.0" encoding="utf-8"?>
+<file path=ppt/slides/slide8.xml><?xml version="1.0" encoding="utf-8"?>
 <p:sld xmlns:a="http://schemas.openxmlformats.org/drawingml/2006/main" xmlns:r="http://schemas.openxmlformats.org/officeDocument/2006/relationships" xmlns:p="http://schemas.openxmlformats.org/presentationml/2006/main">
   <p:cSld>
     <p:spTree>
@@ -9339,7 +9989,7 @@
         </p:nvSpPr>
         <p:spPr>
           <a:xfrm>
-            <a:off x="-3233" y="0"/>
+            <a:off x="-3234" y="0"/>
             <a:ext cx="6861231" cy="9144000"/>
           </a:xfrm>
           <a:custGeom>
@@ -9648,7 +10298,7 @@
         </p:blipFill>
         <p:spPr bwMode="auto">
           <a:xfrm>
-            <a:off x="633074" y="1909692"/>
+            <a:off x="6711145" y="3652920"/>
             <a:ext cx="5636600" cy="919080"/>
           </a:xfrm>
           <a:prstGeom prst="rect">
@@ -9760,7 +10410,7 @@
         <p:spPr>
           <a:xfrm>
             <a:off x="668508" y="1032957"/>
-            <a:ext cx="5649491" cy="861774"/>
+            <a:ext cx="5649491" cy="2031325"/>
           </a:xfrm>
           <a:prstGeom prst="rect">
             <a:avLst/>
@@ -9779,6 +10429,44 @@
                 <a:ea typeface="IBM Plex Sans JP" panose="020B0503050203000203" pitchFamily="50" charset="-128"/>
               </a:rPr>
               <a:t>The Gradient Filament Series provides multiple color-changing Profiles and Plates with different cycle counts. Details vary by model, so please refer to each model’s description.</a:t>
+            </a:r>
+          </a:p>
+          <a:p>
+            <a:endParaRPr lang="en-US" altLang="ja-JP" sz="1000" dirty="0">
+              <a:latin typeface="IBM Plex Sans JP" panose="020B0503050203000203" pitchFamily="50" charset="-128"/>
+              <a:ea typeface="IBM Plex Sans JP" panose="020B0503050203000203" pitchFamily="50" charset="-128"/>
+            </a:endParaRPr>
+          </a:p>
+          <a:p>
+            <a:pPr marL="171450" indent="-171450">
+              <a:buFont typeface="Arial" panose="020B0604020202020204" pitchFamily="34" charset="0"/>
+              <a:buChar char="•"/>
+            </a:pPr>
+            <a:r>
+              <a:rPr lang="en-US" altLang="ja-JP" sz="1000" dirty="0">
+                <a:latin typeface="IBM Plex Sans JP" panose="020B0503050203000203" pitchFamily="50" charset="-128"/>
+                <a:ea typeface="IBM Plex Sans JP" panose="020B0503050203000203" pitchFamily="50" charset="-128"/>
+              </a:rPr>
+              <a:t>Color Curve: Settings based on color combinations. This option allows you to select the optimal gradient for each color—for example, “Vivid” for cyan and yellow, or “Contrast” for white and magenta.</a:t>
+            </a:r>
+          </a:p>
+          <a:p>
+            <a:endParaRPr lang="en-US" altLang="ja-JP" sz="600" dirty="0">
+              <a:latin typeface="IBM Plex Sans JP" panose="020B0503050203000203" pitchFamily="50" charset="-128"/>
+              <a:ea typeface="IBM Plex Sans JP" panose="020B0503050203000203" pitchFamily="50" charset="-128"/>
+            </a:endParaRPr>
+          </a:p>
+          <a:p>
+            <a:pPr marL="171450" indent="-171450">
+              <a:buFont typeface="Arial" panose="020B0604020202020204" pitchFamily="34" charset="0"/>
+              <a:buChar char="•"/>
+            </a:pPr>
+            <a:r>
+              <a:rPr lang="en-US" altLang="ja-JP" sz="1000" dirty="0">
+                <a:latin typeface="IBM Plex Sans JP" panose="020B0503050203000203" pitchFamily="50" charset="-128"/>
+                <a:ea typeface="IBM Plex Sans JP" panose="020B0503050203000203" pitchFamily="50" charset="-128"/>
+              </a:rPr>
+              <a:t>Number of cycles: The number that determines the frequency of the gradient. One cycle is counted as one complete cycle in which the filament changes from A to B to A and back.</a:t>
             </a:r>
           </a:p>
           <a:p>

--- a/Documents/Original/FlexChroma_Tour_Guide_EN.pptx
+++ b/Documents/Original/FlexChroma_Tour_Guide_EN.pptx
@@ -12,7 +12,8 @@
     <p:sldId id="265" r:id="rId6"/>
     <p:sldId id="263" r:id="rId7"/>
     <p:sldId id="264" r:id="rId8"/>
-    <p:sldId id="262" r:id="rId9"/>
+    <p:sldId id="266" r:id="rId9"/>
+    <p:sldId id="267" r:id="rId10"/>
   </p:sldIdLst>
   <p:sldSz cx="6858000" cy="9144000" type="screen4x3"/>
   <p:notesSz cx="7104063" cy="10234613"/>
@@ -5217,7 +5218,7 @@
         <p:spPr>
           <a:xfrm>
             <a:off x="2381276" y="1883364"/>
-            <a:ext cx="1952779" cy="307777"/>
+            <a:ext cx="1790875" cy="307777"/>
           </a:xfrm>
           <a:prstGeom prst="rect">
             <a:avLst/>
@@ -5235,7 +5236,7 @@
                 <a:latin typeface="IBM Plex Sans JP" panose="020B0503050203000203" pitchFamily="50" charset="-128"/>
                 <a:ea typeface="IBM Plex Sans JP" panose="020B0503050203000203" pitchFamily="50" charset="-128"/>
               </a:rPr>
-              <a:t>Ver.1.10  2026.7.22</a:t>
+              <a:t>Ver.1.11  2026.8.8</a:t>
             </a:r>
             <a:endParaRPr kumimoji="1" lang="ja-JP" altLang="en-US" sz="1400" dirty="0">
               <a:latin typeface="IBM Plex Sans JP" panose="020B0503050203000203" pitchFamily="50" charset="-128"/>
@@ -7913,7 +7914,7 @@
                 <a:latin typeface="IBM Plex Sans JP" panose="020B0503050203000203" pitchFamily="50" charset="-128"/>
                 <a:ea typeface="IBM Plex Sans JP" panose="020B0503050203000203" pitchFamily="50" charset="-128"/>
               </a:rPr>
-              <a:t>Ver.1.10  2026-07-02  Revisions for Integrated Design</a:t>
+              <a:t>Ver.1.10  2026-07-22  Revisions for Integrated Design</a:t>
             </a:r>
           </a:p>
           <a:p>
@@ -8612,7 +8613,7 @@
         <p:spPr>
           <a:xfrm>
             <a:off x="2381276" y="1883364"/>
-            <a:ext cx="1952779" cy="307777"/>
+            <a:ext cx="1790875" cy="307777"/>
           </a:xfrm>
           <a:prstGeom prst="rect">
             <a:avLst/>
@@ -8630,7 +8631,7 @@
                 <a:latin typeface="IBM Plex Sans JP" panose="020B0503050203000203" pitchFamily="50" charset="-128"/>
                 <a:ea typeface="IBM Plex Sans JP" panose="020B0503050203000203" pitchFamily="50" charset="-128"/>
               </a:rPr>
-              <a:t>Ver.1.10  2026.7.22</a:t>
+              <a:t>Ver.1.11  2026.8.8</a:t>
             </a:r>
             <a:endParaRPr kumimoji="1" lang="ja-JP" altLang="en-US" sz="1400" dirty="0">
               <a:latin typeface="IBM Plex Sans JP" panose="020B0503050203000203" pitchFamily="50" charset="-128"/>
@@ -9897,7 +9898,7 @@
         <p:cNvPr id="1" name="">
           <a:extLst>
             <a:ext uri="{FF2B5EF4-FFF2-40B4-BE49-F238E27FC236}">
-              <a16:creationId xmlns:a16="http://schemas.microsoft.com/office/drawing/2014/main" id="{3D99E812-8D39-99F5-1D23-0E1A450CC131}"/>
+              <a16:creationId xmlns:a16="http://schemas.microsoft.com/office/drawing/2014/main" id="{3F39D162-0972-E73B-EA5B-12D928783FAF}"/>
             </a:ext>
           </a:extLst>
         </p:cNvPr>
@@ -9914,10 +9915,10 @@
       </p:grpSpPr>
       <p:sp>
         <p:nvSpPr>
-          <p:cNvPr id="3" name="正方形/長方形 2">
+          <p:cNvPr id="30" name="正方形/長方形 29">
             <a:extLst>
               <a:ext uri="{FF2B5EF4-FFF2-40B4-BE49-F238E27FC236}">
-                <a16:creationId xmlns:a16="http://schemas.microsoft.com/office/drawing/2014/main" id="{6D89B353-9D95-712D-2512-32F299577803}"/>
+                <a16:creationId xmlns:a16="http://schemas.microsoft.com/office/drawing/2014/main" id="{41C40E49-5FA1-E53B-CA28-AD02E4FA19E1}"/>
               </a:ext>
             </a:extLst>
           </p:cNvPr>
@@ -9926,7 +9927,7 @@
         </p:nvSpPr>
         <p:spPr>
           <a:xfrm>
-            <a:off x="33951" y="45268"/>
+            <a:off x="51086" y="45268"/>
             <a:ext cx="6790099" cy="9053465"/>
           </a:xfrm>
           <a:prstGeom prst="rect">
@@ -9977,10 +9978,10 @@
       </p:sp>
       <p:sp>
         <p:nvSpPr>
-          <p:cNvPr id="7" name="フリーフォーム: 図形 6">
+          <p:cNvPr id="18" name="フリーフォーム: 図形 17">
             <a:extLst>
               <a:ext uri="{FF2B5EF4-FFF2-40B4-BE49-F238E27FC236}">
-                <a16:creationId xmlns:a16="http://schemas.microsoft.com/office/drawing/2014/main" id="{EBB0D2A0-3A2E-56E5-5FE5-78980A9D36F4}"/>
+                <a16:creationId xmlns:a16="http://schemas.microsoft.com/office/drawing/2014/main" id="{9909E367-C232-F8D9-9E16-57CEC232B45C}"/>
               </a:ext>
             </a:extLst>
           </p:cNvPr>
@@ -9989,244 +9990,195 @@
         </p:nvSpPr>
         <p:spPr>
           <a:xfrm>
-            <a:off x="-3234" y="0"/>
-            <a:ext cx="6861231" cy="9144000"/>
+            <a:off x="17051" y="5531"/>
+            <a:ext cx="6858000" cy="9144000"/>
           </a:xfrm>
           <a:custGeom>
             <a:avLst/>
             <a:gdLst>
-              <a:gd name="connsiteX0" fmla="*/ 3739836 w 6861231"/>
-              <a:gd name="connsiteY0" fmla="*/ 8661917 h 9144000"/>
-              <a:gd name="connsiteX1" fmla="*/ 3739836 w 6861231"/>
-              <a:gd name="connsiteY1" fmla="*/ 8715917 h 9144000"/>
-              <a:gd name="connsiteX2" fmla="*/ 6333058 w 6861231"/>
-              <a:gd name="connsiteY2" fmla="*/ 8715917 h 9144000"/>
-              <a:gd name="connsiteX3" fmla="*/ 6333058 w 6861231"/>
-              <a:gd name="connsiteY3" fmla="*/ 8661917 h 9144000"/>
-              <a:gd name="connsiteX4" fmla="*/ 558032 w 6861231"/>
-              <a:gd name="connsiteY4" fmla="*/ 8661917 h 9144000"/>
-              <a:gd name="connsiteX5" fmla="*/ 558032 w 6861231"/>
-              <a:gd name="connsiteY5" fmla="*/ 8715917 h 9144000"/>
-              <a:gd name="connsiteX6" fmla="*/ 3151253 w 6861231"/>
-              <a:gd name="connsiteY6" fmla="*/ 8715917 h 9144000"/>
-              <a:gd name="connsiteX7" fmla="*/ 3151253 w 6861231"/>
-              <a:gd name="connsiteY7" fmla="*/ 8661917 h 9144000"/>
-              <a:gd name="connsiteX8" fmla="*/ 651915 w 6861231"/>
-              <a:gd name="connsiteY8" fmla="*/ 7301051 h 9144000"/>
-              <a:gd name="connsiteX9" fmla="*/ 549580 w 6861231"/>
-              <a:gd name="connsiteY9" fmla="*/ 7403386 h 9144000"/>
-              <a:gd name="connsiteX10" fmla="*/ 651915 w 6861231"/>
-              <a:gd name="connsiteY10" fmla="*/ 7505721 h 9144000"/>
-              <a:gd name="connsiteX11" fmla="*/ 754250 w 6861231"/>
-              <a:gd name="connsiteY11" fmla="*/ 7403386 h 9144000"/>
-              <a:gd name="connsiteX12" fmla="*/ 651915 w 6861231"/>
-              <a:gd name="connsiteY12" fmla="*/ 7301051 h 9144000"/>
-              <a:gd name="connsiteX13" fmla="*/ 672058 w 6861231"/>
-              <a:gd name="connsiteY13" fmla="*/ 677902 h 9144000"/>
-              <a:gd name="connsiteX14" fmla="*/ 569674 w 6861231"/>
-              <a:gd name="connsiteY14" fmla="*/ 780237 h 9144000"/>
-              <a:gd name="connsiteX15" fmla="*/ 672058 w 6861231"/>
-              <a:gd name="connsiteY15" fmla="*/ 882572 h 9144000"/>
-              <a:gd name="connsiteX16" fmla="*/ 774441 w 6861231"/>
-              <a:gd name="connsiteY16" fmla="*/ 780237 h 9144000"/>
-              <a:gd name="connsiteX17" fmla="*/ 672058 w 6861231"/>
-              <a:gd name="connsiteY17" fmla="*/ 677902 h 9144000"/>
-              <a:gd name="connsiteX18" fmla="*/ 558031 w 6861231"/>
-              <a:gd name="connsiteY18" fmla="*/ 452468 h 9144000"/>
-              <a:gd name="connsiteX19" fmla="*/ 558031 w 6861231"/>
-              <a:gd name="connsiteY19" fmla="*/ 506468 h 9144000"/>
-              <a:gd name="connsiteX20" fmla="*/ 6316936 w 6861231"/>
-              <a:gd name="connsiteY20" fmla="*/ 506468 h 9144000"/>
-              <a:gd name="connsiteX21" fmla="*/ 6316936 w 6861231"/>
-              <a:gd name="connsiteY21" fmla="*/ 452468 h 9144000"/>
-              <a:gd name="connsiteX22" fmla="*/ 0 w 6861231"/>
-              <a:gd name="connsiteY22" fmla="*/ 0 h 9144000"/>
-              <a:gd name="connsiteX23" fmla="*/ 6861231 w 6861231"/>
-              <a:gd name="connsiteY23" fmla="*/ 0 h 9144000"/>
-              <a:gd name="connsiteX24" fmla="*/ 6861231 w 6861231"/>
-              <a:gd name="connsiteY24" fmla="*/ 9144000 h 9144000"/>
-              <a:gd name="connsiteX25" fmla="*/ 0 w 6861231"/>
-              <a:gd name="connsiteY25" fmla="*/ 9144000 h 9144000"/>
+              <a:gd name="csX0" fmla="*/ 3717793 w 6858000"/>
+              <a:gd name="csY0" fmla="*/ 8656386 h 9144000"/>
+              <a:gd name="csX1" fmla="*/ 3717793 w 6858000"/>
+              <a:gd name="csY1" fmla="*/ 8710386 h 9144000"/>
+              <a:gd name="csX2" fmla="*/ 6309793 w 6858000"/>
+              <a:gd name="csY2" fmla="*/ 8710386 h 9144000"/>
+              <a:gd name="csX3" fmla="*/ 6309793 w 6858000"/>
+              <a:gd name="csY3" fmla="*/ 8656386 h 9144000"/>
+              <a:gd name="csX4" fmla="*/ 537487 w 6858000"/>
+              <a:gd name="csY4" fmla="*/ 8656386 h 9144000"/>
+              <a:gd name="csX5" fmla="*/ 537487 w 6858000"/>
+              <a:gd name="csY5" fmla="*/ 8710386 h 9144000"/>
+              <a:gd name="csX6" fmla="*/ 3129487 w 6858000"/>
+              <a:gd name="csY6" fmla="*/ 8710386 h 9144000"/>
+              <a:gd name="csX7" fmla="*/ 3129487 w 6858000"/>
+              <a:gd name="csY7" fmla="*/ 8656386 h 9144000"/>
+              <a:gd name="csX8" fmla="*/ 651459 w 6858000"/>
+              <a:gd name="csY8" fmla="*/ 672371 h 9144000"/>
+              <a:gd name="csX9" fmla="*/ 549124 w 6858000"/>
+              <a:gd name="csY9" fmla="*/ 774706 h 9144000"/>
+              <a:gd name="csX10" fmla="*/ 651459 w 6858000"/>
+              <a:gd name="csY10" fmla="*/ 877041 h 9144000"/>
+              <a:gd name="csX11" fmla="*/ 753794 w 6858000"/>
+              <a:gd name="csY11" fmla="*/ 774706 h 9144000"/>
+              <a:gd name="csX12" fmla="*/ 651459 w 6858000"/>
+              <a:gd name="csY12" fmla="*/ 672371 h 9144000"/>
+              <a:gd name="csX13" fmla="*/ 537486 w 6858000"/>
+              <a:gd name="csY13" fmla="*/ 446937 h 9144000"/>
+              <a:gd name="csX14" fmla="*/ 537486 w 6858000"/>
+              <a:gd name="csY14" fmla="*/ 500937 h 9144000"/>
+              <a:gd name="csX15" fmla="*/ 6293679 w 6858000"/>
+              <a:gd name="csY15" fmla="*/ 500937 h 9144000"/>
+              <a:gd name="csX16" fmla="*/ 6293679 w 6858000"/>
+              <a:gd name="csY16" fmla="*/ 446937 h 9144000"/>
+              <a:gd name="csX17" fmla="*/ 0 w 6858000"/>
+              <a:gd name="csY17" fmla="*/ 0 h 9144000"/>
+              <a:gd name="csX18" fmla="*/ 6858000 w 6858000"/>
+              <a:gd name="csY18" fmla="*/ 0 h 9144000"/>
+              <a:gd name="csX19" fmla="*/ 6858000 w 6858000"/>
+              <a:gd name="csY19" fmla="*/ 9144000 h 9144000"/>
+              <a:gd name="csX20" fmla="*/ 0 w 6858000"/>
+              <a:gd name="csY20" fmla="*/ 9144000 h 9144000"/>
             </a:gdLst>
             <a:ahLst/>
             <a:cxnLst>
               <a:cxn ang="0">
-                <a:pos x="connsiteX0" y="connsiteY0"/>
+                <a:pos x="csX0" y="csY0"/>
               </a:cxn>
               <a:cxn ang="0">
-                <a:pos x="connsiteX1" y="connsiteY1"/>
+                <a:pos x="csX1" y="csY1"/>
               </a:cxn>
               <a:cxn ang="0">
-                <a:pos x="connsiteX2" y="connsiteY2"/>
+                <a:pos x="csX2" y="csY2"/>
               </a:cxn>
               <a:cxn ang="0">
-                <a:pos x="connsiteX3" y="connsiteY3"/>
+                <a:pos x="csX3" y="csY3"/>
               </a:cxn>
               <a:cxn ang="0">
-                <a:pos x="connsiteX4" y="connsiteY4"/>
+                <a:pos x="csX4" y="csY4"/>
               </a:cxn>
               <a:cxn ang="0">
-                <a:pos x="connsiteX5" y="connsiteY5"/>
+                <a:pos x="csX5" y="csY5"/>
               </a:cxn>
               <a:cxn ang="0">
-                <a:pos x="connsiteX6" y="connsiteY6"/>
+                <a:pos x="csX6" y="csY6"/>
               </a:cxn>
               <a:cxn ang="0">
-                <a:pos x="connsiteX7" y="connsiteY7"/>
+                <a:pos x="csX7" y="csY7"/>
               </a:cxn>
               <a:cxn ang="0">
-                <a:pos x="connsiteX8" y="connsiteY8"/>
+                <a:pos x="csX8" y="csY8"/>
               </a:cxn>
               <a:cxn ang="0">
-                <a:pos x="connsiteX9" y="connsiteY9"/>
+                <a:pos x="csX9" y="csY9"/>
               </a:cxn>
               <a:cxn ang="0">
-                <a:pos x="connsiteX10" y="connsiteY10"/>
+                <a:pos x="csX10" y="csY10"/>
               </a:cxn>
               <a:cxn ang="0">
-                <a:pos x="connsiteX11" y="connsiteY11"/>
+                <a:pos x="csX11" y="csY11"/>
               </a:cxn>
               <a:cxn ang="0">
-                <a:pos x="connsiteX12" y="connsiteY12"/>
+                <a:pos x="csX12" y="csY12"/>
               </a:cxn>
               <a:cxn ang="0">
-                <a:pos x="connsiteX13" y="connsiteY13"/>
+                <a:pos x="csX13" y="csY13"/>
               </a:cxn>
               <a:cxn ang="0">
-                <a:pos x="connsiteX14" y="connsiteY14"/>
+                <a:pos x="csX14" y="csY14"/>
               </a:cxn>
               <a:cxn ang="0">
-                <a:pos x="connsiteX15" y="connsiteY15"/>
+                <a:pos x="csX15" y="csY15"/>
               </a:cxn>
               <a:cxn ang="0">
-                <a:pos x="connsiteX16" y="connsiteY16"/>
+                <a:pos x="csX16" y="csY16"/>
               </a:cxn>
               <a:cxn ang="0">
-                <a:pos x="connsiteX17" y="connsiteY17"/>
+                <a:pos x="csX17" y="csY17"/>
               </a:cxn>
               <a:cxn ang="0">
-                <a:pos x="connsiteX18" y="connsiteY18"/>
+                <a:pos x="csX18" y="csY18"/>
               </a:cxn>
               <a:cxn ang="0">
-                <a:pos x="connsiteX19" y="connsiteY19"/>
+                <a:pos x="csX19" y="csY19"/>
               </a:cxn>
               <a:cxn ang="0">
-                <a:pos x="connsiteX20" y="connsiteY20"/>
-              </a:cxn>
-              <a:cxn ang="0">
-                <a:pos x="connsiteX21" y="connsiteY21"/>
-              </a:cxn>
-              <a:cxn ang="0">
-                <a:pos x="connsiteX22" y="connsiteY22"/>
-              </a:cxn>
-              <a:cxn ang="0">
-                <a:pos x="connsiteX23" y="connsiteY23"/>
-              </a:cxn>
-              <a:cxn ang="0">
-                <a:pos x="connsiteX24" y="connsiteY24"/>
-              </a:cxn>
-              <a:cxn ang="0">
-                <a:pos x="connsiteX25" y="connsiteY25"/>
+                <a:pos x="csX20" y="csY20"/>
               </a:cxn>
             </a:cxnLst>
             <a:rect l="l" t="t" r="r" b="b"/>
             <a:pathLst>
-              <a:path w="6861231" h="9144000">
+              <a:path w="6858000" h="9144000">
                 <a:moveTo>
-                  <a:pt x="3739836" y="8661917"/>
+                  <a:pt x="3717793" y="8656386"/>
                 </a:moveTo>
                 <a:lnTo>
-                  <a:pt x="3739836" y="8715917"/>
+                  <a:pt x="3717793" y="8710386"/>
                 </a:lnTo>
                 <a:lnTo>
-                  <a:pt x="6333058" y="8715917"/>
+                  <a:pt x="6309793" y="8710386"/>
                 </a:lnTo>
                 <a:lnTo>
-                  <a:pt x="6333058" y="8661917"/>
+                  <a:pt x="6309793" y="8656386"/>
                 </a:lnTo>
                 <a:close/>
                 <a:moveTo>
-                  <a:pt x="558032" y="8661917"/>
+                  <a:pt x="537487" y="8656386"/>
                 </a:moveTo>
                 <a:lnTo>
-                  <a:pt x="558032" y="8715917"/>
+                  <a:pt x="537487" y="8710386"/>
                 </a:lnTo>
                 <a:lnTo>
-                  <a:pt x="3151253" y="8715917"/>
+                  <a:pt x="3129487" y="8710386"/>
                 </a:lnTo>
                 <a:lnTo>
-                  <a:pt x="3151253" y="8661917"/>
+                  <a:pt x="3129487" y="8656386"/>
                 </a:lnTo>
                 <a:close/>
                 <a:moveTo>
-                  <a:pt x="651915" y="7301051"/>
+                  <a:pt x="651459" y="672371"/>
                 </a:moveTo>
                 <a:cubicBezTo>
-                  <a:pt x="595397" y="7301051"/>
-                  <a:pt x="549580" y="7346868"/>
-                  <a:pt x="549580" y="7403386"/>
+                  <a:pt x="594941" y="672371"/>
+                  <a:pt x="549124" y="718188"/>
+                  <a:pt x="549124" y="774706"/>
                 </a:cubicBezTo>
                 <a:cubicBezTo>
-                  <a:pt x="549580" y="7459904"/>
-                  <a:pt x="595397" y="7505721"/>
-                  <a:pt x="651915" y="7505721"/>
+                  <a:pt x="549124" y="831224"/>
+                  <a:pt x="594941" y="877041"/>
+                  <a:pt x="651459" y="877041"/>
                 </a:cubicBezTo>
                 <a:cubicBezTo>
-                  <a:pt x="708433" y="7505721"/>
-                  <a:pt x="754250" y="7459904"/>
-                  <a:pt x="754250" y="7403386"/>
+                  <a:pt x="707977" y="877041"/>
+                  <a:pt x="753794" y="831224"/>
+                  <a:pt x="753794" y="774706"/>
                 </a:cubicBezTo>
                 <a:cubicBezTo>
-                  <a:pt x="754250" y="7346868"/>
-                  <a:pt x="708433" y="7301051"/>
-                  <a:pt x="651915" y="7301051"/>
+                  <a:pt x="753794" y="718188"/>
+                  <a:pt x="707977" y="672371"/>
+                  <a:pt x="651459" y="672371"/>
                 </a:cubicBezTo>
                 <a:close/>
                 <a:moveTo>
-                  <a:pt x="672058" y="677902"/>
-                </a:moveTo>
-                <a:cubicBezTo>
-                  <a:pt x="615513" y="677902"/>
-                  <a:pt x="569674" y="723719"/>
-                  <a:pt x="569674" y="780237"/>
-                </a:cubicBezTo>
-                <a:cubicBezTo>
-                  <a:pt x="569674" y="836755"/>
-                  <a:pt x="615513" y="882572"/>
-                  <a:pt x="672058" y="882572"/>
-                </a:cubicBezTo>
-                <a:cubicBezTo>
-                  <a:pt x="728602" y="882572"/>
-                  <a:pt x="774441" y="836755"/>
-                  <a:pt x="774441" y="780237"/>
-                </a:cubicBezTo>
-                <a:cubicBezTo>
-                  <a:pt x="774441" y="723719"/>
-                  <a:pt x="728602" y="677902"/>
-                  <a:pt x="672058" y="677902"/>
-                </a:cubicBezTo>
-                <a:close/>
-                <a:moveTo>
-                  <a:pt x="558031" y="452468"/>
+                  <a:pt x="537486" y="446937"/>
                 </a:moveTo>
                 <a:lnTo>
-                  <a:pt x="558031" y="506468"/>
+                  <a:pt x="537486" y="500937"/>
                 </a:lnTo>
                 <a:lnTo>
-                  <a:pt x="6316936" y="506468"/>
+                  <a:pt x="6293679" y="500937"/>
                 </a:lnTo>
                 <a:lnTo>
-                  <a:pt x="6316936" y="452468"/>
+                  <a:pt x="6293679" y="446937"/>
                 </a:lnTo>
                 <a:close/>
                 <a:moveTo>
                   <a:pt x="0" y="0"/>
                 </a:moveTo>
                 <a:lnTo>
-                  <a:pt x="6861231" y="0"/>
+                  <a:pt x="6858000" y="0"/>
                 </a:lnTo>
                 <a:lnTo>
-                  <a:pt x="6861231" y="9144000"/>
+                  <a:pt x="6858000" y="9144000"/>
                 </a:lnTo>
                 <a:lnTo>
                   <a:pt x="0" y="9144000"/>
@@ -10269,12 +10221,159 @@
           </a:p>
         </p:txBody>
       </p:sp>
+      <p:sp>
+        <p:nvSpPr>
+          <p:cNvPr id="17" name="テキスト ボックス 16">
+            <a:extLst>
+              <a:ext uri="{FF2B5EF4-FFF2-40B4-BE49-F238E27FC236}">
+                <a16:creationId xmlns:a16="http://schemas.microsoft.com/office/drawing/2014/main" id="{CF4FD039-D677-D485-74F5-B3E184B86557}"/>
+              </a:ext>
+            </a:extLst>
+          </p:cNvPr>
+          <p:cNvSpPr txBox="1"/>
+          <p:nvPr/>
+        </p:nvSpPr>
+        <p:spPr>
+          <a:xfrm>
+            <a:off x="3163826" y="8511531"/>
+            <a:ext cx="575734" cy="369332"/>
+          </a:xfrm>
+          <a:prstGeom prst="rect">
+            <a:avLst/>
+          </a:prstGeom>
+          <a:noFill/>
+        </p:spPr>
+        <p:txBody>
+          <a:bodyPr wrap="square" rtlCol="0" anchor="ctr">
+            <a:spAutoFit/>
+          </a:bodyPr>
+          <a:lstStyle/>
+          <a:p>
+            <a:pPr algn="ctr"/>
+            <a:r>
+              <a:rPr kumimoji="1" lang="en-US" altLang="ja-JP" dirty="0"/>
+              <a:t>3</a:t>
+            </a:r>
+            <a:endParaRPr kumimoji="1" lang="ja-JP" altLang="en-US" dirty="0"/>
+          </a:p>
+        </p:txBody>
+      </p:sp>
+      <p:sp>
+        <p:nvSpPr>
+          <p:cNvPr id="31" name="テキスト ボックス 30">
+            <a:extLst>
+              <a:ext uri="{FF2B5EF4-FFF2-40B4-BE49-F238E27FC236}">
+                <a16:creationId xmlns:a16="http://schemas.microsoft.com/office/drawing/2014/main" id="{402917BB-FF52-F269-CC95-0E12909AB302}"/>
+              </a:ext>
+            </a:extLst>
+          </p:cNvPr>
+          <p:cNvSpPr txBox="1"/>
+          <p:nvPr/>
+        </p:nvSpPr>
+        <p:spPr>
+          <a:xfrm>
+            <a:off x="770844" y="610017"/>
+            <a:ext cx="2739853" cy="400110"/>
+          </a:xfrm>
+          <a:prstGeom prst="rect">
+            <a:avLst/>
+          </a:prstGeom>
+          <a:noFill/>
+        </p:spPr>
+        <p:txBody>
+          <a:bodyPr wrap="none" rtlCol="0">
+            <a:spAutoFit/>
+          </a:bodyPr>
+          <a:lstStyle/>
+          <a:p>
+            <a:r>
+              <a:rPr lang="en-US" altLang="ja-JP" sz="2000" dirty="0">
+                <a:latin typeface="IBM Plex Sans JP SemiBold" panose="020B0703050203000203" pitchFamily="50" charset="-128"/>
+                <a:ea typeface="IBM Plex Sans JP SemiBold" panose="020B0703050203000203" pitchFamily="50" charset="-128"/>
+              </a:rPr>
+              <a:t>5. Gradient Filament</a:t>
+            </a:r>
+            <a:endParaRPr kumimoji="1" lang="ja-JP" altLang="en-US" sz="2400" b="1" dirty="0">
+              <a:latin typeface="IBM Plex Sans JP SemiBold" panose="020B0703050203000203" pitchFamily="50" charset="-128"/>
+              <a:ea typeface="IBM Plex Sans JP SemiBold" panose="020B0703050203000203" pitchFamily="50" charset="-128"/>
+            </a:endParaRPr>
+          </a:p>
+        </p:txBody>
+      </p:sp>
+      <p:sp>
+        <p:nvSpPr>
+          <p:cNvPr id="33" name="テキスト ボックス 32">
+            <a:extLst>
+              <a:ext uri="{FF2B5EF4-FFF2-40B4-BE49-F238E27FC236}">
+                <a16:creationId xmlns:a16="http://schemas.microsoft.com/office/drawing/2014/main" id="{9C424B16-8EDA-50E2-DF24-F9EDAC56C05B}"/>
+              </a:ext>
+            </a:extLst>
+          </p:cNvPr>
+          <p:cNvSpPr txBox="1"/>
+          <p:nvPr/>
+        </p:nvSpPr>
+        <p:spPr>
+          <a:xfrm>
+            <a:off x="675778" y="4341274"/>
+            <a:ext cx="5642222" cy="246221"/>
+          </a:xfrm>
+          <a:prstGeom prst="rect">
+            <a:avLst/>
+          </a:prstGeom>
+          <a:noFill/>
+        </p:spPr>
+        <p:txBody>
+          <a:bodyPr wrap="square" rtlCol="0">
+            <a:spAutoFit/>
+          </a:bodyPr>
+          <a:lstStyle/>
+          <a:p>
+            <a:r>
+              <a:rPr lang="en-US" altLang="ja-JP" sz="1000" dirty="0">
+                <a:latin typeface="IBM Plex Sans JP" panose="020B0503050203000203" pitchFamily="50" charset="-128"/>
+                <a:ea typeface="IBM Plex Sans JP" panose="020B0503050203000203" pitchFamily="50" charset="-128"/>
+              </a:rPr>
+              <a:t>The following is the model configuration for Gradient Filament.</a:t>
+            </a:r>
+          </a:p>
+        </p:txBody>
+      </p:sp>
       <p:pic>
         <p:nvPicPr>
           <p:cNvPr id="4" name="図 3">
             <a:extLst>
               <a:ext uri="{FF2B5EF4-FFF2-40B4-BE49-F238E27FC236}">
-                <a16:creationId xmlns:a16="http://schemas.microsoft.com/office/drawing/2014/main" id="{65EBD496-4320-F95D-E4F6-46AE1204BBFD}"/>
+                <a16:creationId xmlns:a16="http://schemas.microsoft.com/office/drawing/2014/main" id="{3FA3831D-D4BD-0548-916E-1ED70DB39443}"/>
+              </a:ext>
+            </a:extLst>
+          </p:cNvPr>
+          <p:cNvPicPr>
+            <a:picLocks noChangeAspect="1"/>
+          </p:cNvPicPr>
+          <p:nvPr/>
+        </p:nvPicPr>
+        <p:blipFill>
+          <a:blip r:embed="rId2"/>
+          <a:stretch>
+            <a:fillRect/>
+          </a:stretch>
+        </p:blipFill>
+        <p:spPr>
+          <a:xfrm>
+            <a:off x="666614" y="4667054"/>
+            <a:ext cx="5521536" cy="3874587"/>
+          </a:xfrm>
+          <a:prstGeom prst="rect">
+            <a:avLst/>
+          </a:prstGeom>
+        </p:spPr>
+      </p:pic>
+      <p:pic>
+        <p:nvPicPr>
+          <p:cNvPr id="12" name="図 11">
+            <a:extLst>
+              <a:ext uri="{FF2B5EF4-FFF2-40B4-BE49-F238E27FC236}">
+                <a16:creationId xmlns:a16="http://schemas.microsoft.com/office/drawing/2014/main" id="{F961B068-E9D8-B96D-B744-D3A22DDD5E18}"/>
               </a:ext>
             </a:extLst>
           </p:cNvPr>
@@ -10284,7 +10383,7 @@
           <p:nvPr/>
         </p:nvPicPr>
         <p:blipFill>
-          <a:blip r:embed="rId2">
+          <a:blip r:embed="rId3">
             <a:extLst>
               <a:ext uri="{28A0092B-C50C-407E-A947-70E740481C1C}">
                 <a14:useLocalDpi xmlns:a14="http://schemas.microsoft.com/office/drawing/2010/main" val="0"/>
@@ -10298,7 +10397,7 @@
         </p:blipFill>
         <p:spPr bwMode="auto">
           <a:xfrm>
-            <a:off x="6711145" y="3652920"/>
+            <a:off x="609082" y="3243238"/>
             <a:ext cx="5636600" cy="919080"/>
           </a:xfrm>
           <a:prstGeom prst="rect">
@@ -10318,10 +10417,10 @@
       </p:pic>
       <p:sp>
         <p:nvSpPr>
-          <p:cNvPr id="17" name="テキスト ボックス 16">
+          <p:cNvPr id="19" name="テキスト ボックス 18">
             <a:extLst>
               <a:ext uri="{FF2B5EF4-FFF2-40B4-BE49-F238E27FC236}">
-                <a16:creationId xmlns:a16="http://schemas.microsoft.com/office/drawing/2014/main" id="{DDFACC84-E7FE-11C7-6620-F3DEFEB06920}"/>
+                <a16:creationId xmlns:a16="http://schemas.microsoft.com/office/drawing/2014/main" id="{EC269278-E84C-3A0D-7F7F-F9CC24F59D7B}"/>
               </a:ext>
             </a:extLst>
           </p:cNvPr>
@@ -10330,8 +10429,8 @@
         </p:nvSpPr>
         <p:spPr>
           <a:xfrm>
-            <a:off x="3163826" y="8511531"/>
-            <a:ext cx="575734" cy="369332"/>
+            <a:off x="668508" y="1032957"/>
+            <a:ext cx="5649491" cy="2031325"/>
           </a:xfrm>
           <a:prstGeom prst="rect">
             <a:avLst/>
@@ -10339,26 +10438,428 @@
           <a:noFill/>
         </p:spPr>
         <p:txBody>
-          <a:bodyPr wrap="square" rtlCol="0" anchor="ctr">
+          <a:bodyPr wrap="square" rtlCol="0">
             <a:spAutoFit/>
           </a:bodyPr>
           <a:lstStyle/>
           <a:p>
-            <a:pPr algn="ctr"/>
-            <a:r>
-              <a:rPr kumimoji="1" lang="en-US" altLang="ja-JP" dirty="0"/>
-              <a:t>3</a:t>
-            </a:r>
-            <a:endParaRPr kumimoji="1" lang="ja-JP" altLang="en-US" dirty="0"/>
-          </a:p>
-        </p:txBody>
-      </p:sp>
-      <p:sp>
-        <p:nvSpPr>
-          <p:cNvPr id="18" name="テキスト ボックス 17">
+            <a:r>
+              <a:rPr lang="en-US" altLang="ja-JP" sz="1000" dirty="0">
+                <a:latin typeface="IBM Plex Sans JP" panose="020B0503050203000203" pitchFamily="50" charset="-128"/>
+                <a:ea typeface="IBM Plex Sans JP" panose="020B0503050203000203" pitchFamily="50" charset="-128"/>
+              </a:rPr>
+              <a:t>The Gradient Filament Series provides multiple color-changing Profiles and Plates with different cycle counts. Details vary by model, so please refer to each model’s description.</a:t>
+            </a:r>
+          </a:p>
+          <a:p>
+            <a:endParaRPr lang="en-US" altLang="ja-JP" sz="1000" dirty="0">
+              <a:latin typeface="IBM Plex Sans JP" panose="020B0503050203000203" pitchFamily="50" charset="-128"/>
+              <a:ea typeface="IBM Plex Sans JP" panose="020B0503050203000203" pitchFamily="50" charset="-128"/>
+            </a:endParaRPr>
+          </a:p>
+          <a:p>
+            <a:pPr marL="171450" indent="-171450">
+              <a:buFont typeface="Arial" panose="020B0604020202020204" pitchFamily="34" charset="0"/>
+              <a:buChar char="•"/>
+            </a:pPr>
+            <a:r>
+              <a:rPr lang="en-US" altLang="ja-JP" sz="1000" dirty="0">
+                <a:latin typeface="IBM Plex Sans JP" panose="020B0503050203000203" pitchFamily="50" charset="-128"/>
+                <a:ea typeface="IBM Plex Sans JP" panose="020B0503050203000203" pitchFamily="50" charset="-128"/>
+              </a:rPr>
+              <a:t>Color Curve: Settings based on color combinations. This option allows you to select the optimal gradient for each color—for example, “Vivid” for cyan and yellow, or “Contrast” for white and magenta.</a:t>
+            </a:r>
+          </a:p>
+          <a:p>
+            <a:endParaRPr lang="en-US" altLang="ja-JP" sz="600" dirty="0">
+              <a:latin typeface="IBM Plex Sans JP" panose="020B0503050203000203" pitchFamily="50" charset="-128"/>
+              <a:ea typeface="IBM Plex Sans JP" panose="020B0503050203000203" pitchFamily="50" charset="-128"/>
+            </a:endParaRPr>
+          </a:p>
+          <a:p>
+            <a:pPr marL="171450" indent="-171450">
+              <a:buFont typeface="Arial" panose="020B0604020202020204" pitchFamily="34" charset="0"/>
+              <a:buChar char="•"/>
+            </a:pPr>
+            <a:r>
+              <a:rPr lang="en-US" altLang="ja-JP" sz="1000" dirty="0">
+                <a:latin typeface="IBM Plex Sans JP" panose="020B0503050203000203" pitchFamily="50" charset="-128"/>
+                <a:ea typeface="IBM Plex Sans JP" panose="020B0503050203000203" pitchFamily="50" charset="-128"/>
+              </a:rPr>
+              <a:t>Number of cycles: The number that determines the frequency of the gradient. One cycle is counted as one complete cycle in which the filament changes from A to B to A and back.</a:t>
+            </a:r>
+          </a:p>
+          <a:p>
+            <a:endParaRPr lang="en-US" altLang="ja-JP" sz="1000" dirty="0">
+              <a:latin typeface="IBM Plex Sans JP" panose="020B0503050203000203" pitchFamily="50" charset="-128"/>
+              <a:ea typeface="IBM Plex Sans JP" panose="020B0503050203000203" pitchFamily="50" charset="-128"/>
+            </a:endParaRPr>
+          </a:p>
+          <a:p>
+            <a:r>
+              <a:rPr lang="en-US" altLang="ja-JP" sz="1000" dirty="0">
+                <a:latin typeface="IBM Plex Sans JP" panose="020B0503050203000203" pitchFamily="50" charset="-128"/>
+                <a:ea typeface="IBM Plex Sans JP" panose="020B0503050203000203" pitchFamily="50" charset="-128"/>
+              </a:rPr>
+              <a:t>Example: To create a fast-cycle gradient filament using cyan and magenta, select an S4 Model, choose a 4-cycle Plate, and use the Vivid curve Profile due to the high color contrast.</a:t>
+            </a:r>
+            <a:endParaRPr kumimoji="1" lang="ja-JP" altLang="en-US" sz="1000" b="1" dirty="0">
+              <a:latin typeface="IBM Plex Sans JP" panose="020B0503050203000203" pitchFamily="50" charset="-128"/>
+              <a:ea typeface="IBM Plex Sans JP" panose="020B0503050203000203" pitchFamily="50" charset="-128"/>
+            </a:endParaRPr>
+          </a:p>
+        </p:txBody>
+      </p:sp>
+    </p:spTree>
+    <p:extLst>
+      <p:ext uri="{BB962C8B-B14F-4D97-AF65-F5344CB8AC3E}">
+        <p14:creationId xmlns:p14="http://schemas.microsoft.com/office/powerpoint/2010/main" val="4292805330"/>
+      </p:ext>
+    </p:extLst>
+  </p:cSld>
+  <p:clrMapOvr>
+    <a:masterClrMapping/>
+  </p:clrMapOvr>
+</p:sld>
+</file>
+
+<file path=ppt/slides/slide9.xml><?xml version="1.0" encoding="utf-8"?>
+<p:sld xmlns:a="http://schemas.openxmlformats.org/drawingml/2006/main" xmlns:r="http://schemas.openxmlformats.org/officeDocument/2006/relationships" xmlns:p="http://schemas.openxmlformats.org/presentationml/2006/main">
+  <p:cSld>
+    <p:spTree>
+      <p:nvGrpSpPr>
+        <p:cNvPr id="1" name="">
+          <a:extLst>
+            <a:ext uri="{FF2B5EF4-FFF2-40B4-BE49-F238E27FC236}">
+              <a16:creationId xmlns:a16="http://schemas.microsoft.com/office/drawing/2014/main" id="{7125A6E3-FC4A-AC00-A897-53FC35BE1199}"/>
+            </a:ext>
+          </a:extLst>
+        </p:cNvPr>
+        <p:cNvGrpSpPr/>
+        <p:nvPr/>
+      </p:nvGrpSpPr>
+      <p:grpSpPr>
+        <a:xfrm>
+          <a:off x="0" y="0"/>
+          <a:ext cx="0" cy="0"/>
+          <a:chOff x="0" y="0"/>
+          <a:chExt cx="0" cy="0"/>
+        </a:xfrm>
+      </p:grpSpPr>
+      <p:sp>
+        <p:nvSpPr>
+          <p:cNvPr id="30" name="正方形/長方形 29">
             <a:extLst>
               <a:ext uri="{FF2B5EF4-FFF2-40B4-BE49-F238E27FC236}">
-                <a16:creationId xmlns:a16="http://schemas.microsoft.com/office/drawing/2014/main" id="{AEF844E9-5EE0-D507-0BE6-EA50C139ECC5}"/>
+                <a16:creationId xmlns:a16="http://schemas.microsoft.com/office/drawing/2014/main" id="{53908D35-F986-58BC-278C-A39AF70B18D9}"/>
+              </a:ext>
+            </a:extLst>
+          </p:cNvPr>
+          <p:cNvSpPr/>
+          <p:nvPr/>
+        </p:nvSpPr>
+        <p:spPr>
+          <a:xfrm>
+            <a:off x="51086" y="45268"/>
+            <a:ext cx="6790099" cy="9053465"/>
+          </a:xfrm>
+          <a:prstGeom prst="rect">
+            <a:avLst/>
+          </a:prstGeom>
+          <a:gradFill>
+            <a:gsLst>
+              <a:gs pos="50000">
+                <a:srgbClr val="6200E8"/>
+              </a:gs>
+              <a:gs pos="10000">
+                <a:srgbClr val="EE00B0"/>
+              </a:gs>
+              <a:gs pos="90000">
+                <a:srgbClr val="0095E5"/>
+              </a:gs>
+            </a:gsLst>
+            <a:lin ang="1800000" scaled="0"/>
+          </a:gradFill>
+          <a:ln>
+            <a:noFill/>
+          </a:ln>
+        </p:spPr>
+        <p:style>
+          <a:lnRef idx="2">
+            <a:schemeClr val="accent1">
+              <a:shade val="15000"/>
+            </a:schemeClr>
+          </a:lnRef>
+          <a:fillRef idx="1">
+            <a:schemeClr val="accent1"/>
+          </a:fillRef>
+          <a:effectRef idx="0">
+            <a:schemeClr val="accent1"/>
+          </a:effectRef>
+          <a:fontRef idx="minor">
+            <a:schemeClr val="lt1"/>
+          </a:fontRef>
+        </p:style>
+        <p:txBody>
+          <a:bodyPr rtlCol="0" anchor="ctr"/>
+          <a:lstStyle/>
+          <a:p>
+            <a:pPr algn="ctr"/>
+            <a:endParaRPr kumimoji="1" lang="ja-JP" altLang="en-US" dirty="0"/>
+          </a:p>
+        </p:txBody>
+      </p:sp>
+      <p:sp>
+        <p:nvSpPr>
+          <p:cNvPr id="12" name="フリーフォーム: 図形 11">
+            <a:extLst>
+              <a:ext uri="{FF2B5EF4-FFF2-40B4-BE49-F238E27FC236}">
+                <a16:creationId xmlns:a16="http://schemas.microsoft.com/office/drawing/2014/main" id="{B1005370-E423-EBFF-F31C-32291B3DE46C}"/>
+              </a:ext>
+            </a:extLst>
+          </p:cNvPr>
+          <p:cNvSpPr/>
+          <p:nvPr/>
+        </p:nvSpPr>
+        <p:spPr>
+          <a:xfrm>
+            <a:off x="17051" y="5531"/>
+            <a:ext cx="6858000" cy="9144000"/>
+          </a:xfrm>
+          <a:custGeom>
+            <a:avLst/>
+            <a:gdLst>
+              <a:gd name="csX0" fmla="*/ 3717793 w 6858000"/>
+              <a:gd name="csY0" fmla="*/ 8656386 h 9144000"/>
+              <a:gd name="csX1" fmla="*/ 3717793 w 6858000"/>
+              <a:gd name="csY1" fmla="*/ 8710386 h 9144000"/>
+              <a:gd name="csX2" fmla="*/ 6309793 w 6858000"/>
+              <a:gd name="csY2" fmla="*/ 8710386 h 9144000"/>
+              <a:gd name="csX3" fmla="*/ 6309793 w 6858000"/>
+              <a:gd name="csY3" fmla="*/ 8656386 h 9144000"/>
+              <a:gd name="csX4" fmla="*/ 537487 w 6858000"/>
+              <a:gd name="csY4" fmla="*/ 8656386 h 9144000"/>
+              <a:gd name="csX5" fmla="*/ 537487 w 6858000"/>
+              <a:gd name="csY5" fmla="*/ 8710386 h 9144000"/>
+              <a:gd name="csX6" fmla="*/ 3129487 w 6858000"/>
+              <a:gd name="csY6" fmla="*/ 8710386 h 9144000"/>
+              <a:gd name="csX7" fmla="*/ 3129487 w 6858000"/>
+              <a:gd name="csY7" fmla="*/ 8656386 h 9144000"/>
+              <a:gd name="csX8" fmla="*/ 631632 w 6858000"/>
+              <a:gd name="csY8" fmla="*/ 811545 h 9144000"/>
+              <a:gd name="csX9" fmla="*/ 529297 w 6858000"/>
+              <a:gd name="csY9" fmla="*/ 913880 h 9144000"/>
+              <a:gd name="csX10" fmla="*/ 631632 w 6858000"/>
+              <a:gd name="csY10" fmla="*/ 1016215 h 9144000"/>
+              <a:gd name="csX11" fmla="*/ 733967 w 6858000"/>
+              <a:gd name="csY11" fmla="*/ 913880 h 9144000"/>
+              <a:gd name="csX12" fmla="*/ 631632 w 6858000"/>
+              <a:gd name="csY12" fmla="*/ 811545 h 9144000"/>
+              <a:gd name="csX13" fmla="*/ 537486 w 6858000"/>
+              <a:gd name="csY13" fmla="*/ 446937 h 9144000"/>
+              <a:gd name="csX14" fmla="*/ 537486 w 6858000"/>
+              <a:gd name="csY14" fmla="*/ 500937 h 9144000"/>
+              <a:gd name="csX15" fmla="*/ 6293679 w 6858000"/>
+              <a:gd name="csY15" fmla="*/ 500937 h 9144000"/>
+              <a:gd name="csX16" fmla="*/ 6293679 w 6858000"/>
+              <a:gd name="csY16" fmla="*/ 446937 h 9144000"/>
+              <a:gd name="csX17" fmla="*/ 0 w 6858000"/>
+              <a:gd name="csY17" fmla="*/ 0 h 9144000"/>
+              <a:gd name="csX18" fmla="*/ 6858000 w 6858000"/>
+              <a:gd name="csY18" fmla="*/ 0 h 9144000"/>
+              <a:gd name="csX19" fmla="*/ 6858000 w 6858000"/>
+              <a:gd name="csY19" fmla="*/ 9144000 h 9144000"/>
+              <a:gd name="csX20" fmla="*/ 0 w 6858000"/>
+              <a:gd name="csY20" fmla="*/ 9144000 h 9144000"/>
+            </a:gdLst>
+            <a:ahLst/>
+            <a:cxnLst>
+              <a:cxn ang="0">
+                <a:pos x="csX0" y="csY0"/>
+              </a:cxn>
+              <a:cxn ang="0">
+                <a:pos x="csX1" y="csY1"/>
+              </a:cxn>
+              <a:cxn ang="0">
+                <a:pos x="csX2" y="csY2"/>
+              </a:cxn>
+              <a:cxn ang="0">
+                <a:pos x="csX3" y="csY3"/>
+              </a:cxn>
+              <a:cxn ang="0">
+                <a:pos x="csX4" y="csY4"/>
+              </a:cxn>
+              <a:cxn ang="0">
+                <a:pos x="csX5" y="csY5"/>
+              </a:cxn>
+              <a:cxn ang="0">
+                <a:pos x="csX6" y="csY6"/>
+              </a:cxn>
+              <a:cxn ang="0">
+                <a:pos x="csX7" y="csY7"/>
+              </a:cxn>
+              <a:cxn ang="0">
+                <a:pos x="csX8" y="csY8"/>
+              </a:cxn>
+              <a:cxn ang="0">
+                <a:pos x="csX9" y="csY9"/>
+              </a:cxn>
+              <a:cxn ang="0">
+                <a:pos x="csX10" y="csY10"/>
+              </a:cxn>
+              <a:cxn ang="0">
+                <a:pos x="csX11" y="csY11"/>
+              </a:cxn>
+              <a:cxn ang="0">
+                <a:pos x="csX12" y="csY12"/>
+              </a:cxn>
+              <a:cxn ang="0">
+                <a:pos x="csX13" y="csY13"/>
+              </a:cxn>
+              <a:cxn ang="0">
+                <a:pos x="csX14" y="csY14"/>
+              </a:cxn>
+              <a:cxn ang="0">
+                <a:pos x="csX15" y="csY15"/>
+              </a:cxn>
+              <a:cxn ang="0">
+                <a:pos x="csX16" y="csY16"/>
+              </a:cxn>
+              <a:cxn ang="0">
+                <a:pos x="csX17" y="csY17"/>
+              </a:cxn>
+              <a:cxn ang="0">
+                <a:pos x="csX18" y="csY18"/>
+              </a:cxn>
+              <a:cxn ang="0">
+                <a:pos x="csX19" y="csY19"/>
+              </a:cxn>
+              <a:cxn ang="0">
+                <a:pos x="csX20" y="csY20"/>
+              </a:cxn>
+            </a:cxnLst>
+            <a:rect l="l" t="t" r="r" b="b"/>
+            <a:pathLst>
+              <a:path w="6858000" h="9144000">
+                <a:moveTo>
+                  <a:pt x="3717793" y="8656386"/>
+                </a:moveTo>
+                <a:lnTo>
+                  <a:pt x="3717793" y="8710386"/>
+                </a:lnTo>
+                <a:lnTo>
+                  <a:pt x="6309793" y="8710386"/>
+                </a:lnTo>
+                <a:lnTo>
+                  <a:pt x="6309793" y="8656386"/>
+                </a:lnTo>
+                <a:close/>
+                <a:moveTo>
+                  <a:pt x="537487" y="8656386"/>
+                </a:moveTo>
+                <a:lnTo>
+                  <a:pt x="537487" y="8710386"/>
+                </a:lnTo>
+                <a:lnTo>
+                  <a:pt x="3129487" y="8710386"/>
+                </a:lnTo>
+                <a:lnTo>
+                  <a:pt x="3129487" y="8656386"/>
+                </a:lnTo>
+                <a:close/>
+                <a:moveTo>
+                  <a:pt x="631632" y="811545"/>
+                </a:moveTo>
+                <a:cubicBezTo>
+                  <a:pt x="575114" y="811545"/>
+                  <a:pt x="529297" y="857362"/>
+                  <a:pt x="529297" y="913880"/>
+                </a:cubicBezTo>
+                <a:cubicBezTo>
+                  <a:pt x="529297" y="970398"/>
+                  <a:pt x="575114" y="1016215"/>
+                  <a:pt x="631632" y="1016215"/>
+                </a:cubicBezTo>
+                <a:cubicBezTo>
+                  <a:pt x="688150" y="1016215"/>
+                  <a:pt x="733967" y="970398"/>
+                  <a:pt x="733967" y="913880"/>
+                </a:cubicBezTo>
+                <a:cubicBezTo>
+                  <a:pt x="733967" y="857362"/>
+                  <a:pt x="688150" y="811545"/>
+                  <a:pt x="631632" y="811545"/>
+                </a:cubicBezTo>
+                <a:close/>
+                <a:moveTo>
+                  <a:pt x="537486" y="446937"/>
+                </a:moveTo>
+                <a:lnTo>
+                  <a:pt x="537486" y="500937"/>
+                </a:lnTo>
+                <a:lnTo>
+                  <a:pt x="6293679" y="500937"/>
+                </a:lnTo>
+                <a:lnTo>
+                  <a:pt x="6293679" y="446937"/>
+                </a:lnTo>
+                <a:close/>
+                <a:moveTo>
+                  <a:pt x="0" y="0"/>
+                </a:moveTo>
+                <a:lnTo>
+                  <a:pt x="6858000" y="0"/>
+                </a:lnTo>
+                <a:lnTo>
+                  <a:pt x="6858000" y="9144000"/>
+                </a:lnTo>
+                <a:lnTo>
+                  <a:pt x="0" y="9144000"/>
+                </a:lnTo>
+                <a:close/>
+              </a:path>
+            </a:pathLst>
+          </a:custGeom>
+          <a:solidFill>
+            <a:schemeClr val="bg1"/>
+          </a:solidFill>
+          <a:ln>
+            <a:noFill/>
+          </a:ln>
+        </p:spPr>
+        <p:style>
+          <a:lnRef idx="2">
+            <a:schemeClr val="accent1">
+              <a:shade val="15000"/>
+            </a:schemeClr>
+          </a:lnRef>
+          <a:fillRef idx="1">
+            <a:schemeClr val="accent1"/>
+          </a:fillRef>
+          <a:effectRef idx="0">
+            <a:schemeClr val="accent1"/>
+          </a:effectRef>
+          <a:fontRef idx="minor">
+            <a:schemeClr val="lt1"/>
+          </a:fontRef>
+        </p:style>
+        <p:txBody>
+          <a:bodyPr wrap="square" rtlCol="0" anchor="ctr">
+            <a:noAutofit/>
+          </a:bodyPr>
+          <a:lstStyle/>
+          <a:p>
+            <a:pPr algn="ctr"/>
+            <a:endParaRPr kumimoji="1" lang="ja-JP" altLang="en-US"/>
+          </a:p>
+        </p:txBody>
+      </p:sp>
+      <p:sp>
+        <p:nvSpPr>
+          <p:cNvPr id="17" name="テキスト ボックス 16">
+            <a:extLst>
+              <a:ext uri="{FF2B5EF4-FFF2-40B4-BE49-F238E27FC236}">
+                <a16:creationId xmlns:a16="http://schemas.microsoft.com/office/drawing/2014/main" id="{6F944542-F688-AA88-F03D-72137284BC20}"/>
               </a:ext>
             </a:extLst>
           </p:cNvPr>
@@ -10367,8 +10868,8 @@
         </p:nvSpPr>
         <p:spPr>
           <a:xfrm>
-            <a:off x="770844" y="610017"/>
-            <a:ext cx="2739853" cy="400110"/>
+            <a:off x="3163826" y="8511531"/>
+            <a:ext cx="575734" cy="369332"/>
           </a:xfrm>
           <a:prstGeom prst="rect">
             <a:avLst/>
@@ -10376,31 +10877,26 @@
           <a:noFill/>
         </p:spPr>
         <p:txBody>
-          <a:bodyPr wrap="none" rtlCol="0">
+          <a:bodyPr wrap="square" rtlCol="0" anchor="ctr">
             <a:spAutoFit/>
           </a:bodyPr>
           <a:lstStyle/>
           <a:p>
-            <a:r>
-              <a:rPr lang="en-US" altLang="ja-JP" sz="2000" dirty="0">
-                <a:latin typeface="IBM Plex Sans JP SemiBold" panose="020B0703050203000203" pitchFamily="50" charset="-128"/>
-                <a:ea typeface="IBM Plex Sans JP SemiBold" panose="020B0703050203000203" pitchFamily="50" charset="-128"/>
-              </a:rPr>
-              <a:t>5. Gradient Filament</a:t>
-            </a:r>
-            <a:endParaRPr kumimoji="1" lang="ja-JP" altLang="en-US" sz="2400" b="1" dirty="0">
-              <a:latin typeface="IBM Plex Sans JP SemiBold" panose="020B0703050203000203" pitchFamily="50" charset="-128"/>
-              <a:ea typeface="IBM Plex Sans JP SemiBold" panose="020B0703050203000203" pitchFamily="50" charset="-128"/>
-            </a:endParaRPr>
-          </a:p>
-        </p:txBody>
-      </p:sp>
-      <p:sp>
-        <p:nvSpPr>
-          <p:cNvPr id="19" name="テキスト ボックス 18">
+            <a:pPr algn="ctr"/>
+            <a:r>
+              <a:rPr kumimoji="1" lang="en-US" altLang="ja-JP" dirty="0"/>
+              <a:t>4</a:t>
+            </a:r>
+            <a:endParaRPr kumimoji="1" lang="ja-JP" altLang="en-US" dirty="0"/>
+          </a:p>
+        </p:txBody>
+      </p:sp>
+      <p:sp>
+        <p:nvSpPr>
+          <p:cNvPr id="34" name="テキスト ボックス 33">
             <a:extLst>
               <a:ext uri="{FF2B5EF4-FFF2-40B4-BE49-F238E27FC236}">
-                <a16:creationId xmlns:a16="http://schemas.microsoft.com/office/drawing/2014/main" id="{79E1405D-DAD0-B18A-CDD6-7E8756624CA9}"/>
+                <a16:creationId xmlns:a16="http://schemas.microsoft.com/office/drawing/2014/main" id="{5C2CABC6-218E-C4AF-5D73-A13394AD5453}"/>
               </a:ext>
             </a:extLst>
           </p:cNvPr>
@@ -10409,8 +10905,8 @@
         </p:nvSpPr>
         <p:spPr>
           <a:xfrm>
-            <a:off x="668508" y="1032957"/>
-            <a:ext cx="5649491" cy="2031325"/>
+            <a:off x="778114" y="784294"/>
+            <a:ext cx="1923925" cy="338554"/>
           </a:xfrm>
           <a:prstGeom prst="rect">
             <a:avLst/>
@@ -10418,84 +10914,31 @@
           <a:noFill/>
         </p:spPr>
         <p:txBody>
-          <a:bodyPr wrap="square" rtlCol="0">
+          <a:bodyPr wrap="none" rtlCol="0">
             <a:spAutoFit/>
           </a:bodyPr>
           <a:lstStyle/>
           <a:p>
             <a:r>
-              <a:rPr lang="en-US" altLang="ja-JP" sz="1000" dirty="0">
-                <a:latin typeface="IBM Plex Sans JP" panose="020B0503050203000203" pitchFamily="50" charset="-128"/>
-                <a:ea typeface="IBM Plex Sans JP" panose="020B0503050203000203" pitchFamily="50" charset="-128"/>
+              <a:rPr lang="en-US" altLang="ja-JP" sz="1600" dirty="0">
+                <a:latin typeface="IBM Plex Sans JP SemiBold" panose="020B0703050203000203" pitchFamily="50" charset="-128"/>
+                <a:ea typeface="IBM Plex Sans JP SemiBold" panose="020B0703050203000203" pitchFamily="50" charset="-128"/>
               </a:rPr>
-              <a:t>The Gradient Filament Series provides multiple color-changing Profiles and Plates with different cycle counts. Details vary by model, so please refer to each model’s description.</a:t>
-            </a:r>
-          </a:p>
-          <a:p>
-            <a:endParaRPr lang="en-US" altLang="ja-JP" sz="1000" dirty="0">
-              <a:latin typeface="IBM Plex Sans JP" panose="020B0503050203000203" pitchFamily="50" charset="-128"/>
-              <a:ea typeface="IBM Plex Sans JP" panose="020B0503050203000203" pitchFamily="50" charset="-128"/>
+              <a:t>6. Update History</a:t>
+            </a:r>
+            <a:endParaRPr kumimoji="1" lang="ja-JP" altLang="en-US" b="1" dirty="0">
+              <a:latin typeface="IBM Plex Sans JP SemiBold" panose="020B0703050203000203" pitchFamily="50" charset="-128"/>
+              <a:ea typeface="IBM Plex Sans JP SemiBold" panose="020B0703050203000203" pitchFamily="50" charset="-128"/>
             </a:endParaRPr>
           </a:p>
-          <a:p>
-            <a:pPr marL="171450" indent="-171450">
-              <a:buFont typeface="Arial" panose="020B0604020202020204" pitchFamily="34" charset="0"/>
-              <a:buChar char="•"/>
-            </a:pPr>
-            <a:r>
-              <a:rPr lang="en-US" altLang="ja-JP" sz="1000" dirty="0">
-                <a:latin typeface="IBM Plex Sans JP" panose="020B0503050203000203" pitchFamily="50" charset="-128"/>
-                <a:ea typeface="IBM Plex Sans JP" panose="020B0503050203000203" pitchFamily="50" charset="-128"/>
-              </a:rPr>
-              <a:t>Color Curve: Settings based on color combinations. This option allows you to select the optimal gradient for each color—for example, “Vivid” for cyan and yellow, or “Contrast” for white and magenta.</a:t>
-            </a:r>
-          </a:p>
-          <a:p>
-            <a:endParaRPr lang="en-US" altLang="ja-JP" sz="600" dirty="0">
-              <a:latin typeface="IBM Plex Sans JP" panose="020B0503050203000203" pitchFamily="50" charset="-128"/>
-              <a:ea typeface="IBM Plex Sans JP" panose="020B0503050203000203" pitchFamily="50" charset="-128"/>
-            </a:endParaRPr>
-          </a:p>
-          <a:p>
-            <a:pPr marL="171450" indent="-171450">
-              <a:buFont typeface="Arial" panose="020B0604020202020204" pitchFamily="34" charset="0"/>
-              <a:buChar char="•"/>
-            </a:pPr>
-            <a:r>
-              <a:rPr lang="en-US" altLang="ja-JP" sz="1000" dirty="0">
-                <a:latin typeface="IBM Plex Sans JP" panose="020B0503050203000203" pitchFamily="50" charset="-128"/>
-                <a:ea typeface="IBM Plex Sans JP" panose="020B0503050203000203" pitchFamily="50" charset="-128"/>
-              </a:rPr>
-              <a:t>Number of cycles: The number that determines the frequency of the gradient. One cycle is counted as one complete cycle in which the filament changes from A to B to A and back.</a:t>
-            </a:r>
-          </a:p>
-          <a:p>
-            <a:endParaRPr lang="en-US" altLang="ja-JP" sz="1000" dirty="0">
-              <a:latin typeface="IBM Plex Sans JP" panose="020B0503050203000203" pitchFamily="50" charset="-128"/>
-              <a:ea typeface="IBM Plex Sans JP" panose="020B0503050203000203" pitchFamily="50" charset="-128"/>
-            </a:endParaRPr>
-          </a:p>
-          <a:p>
-            <a:r>
-              <a:rPr lang="en-US" altLang="ja-JP" sz="1000" dirty="0">
-                <a:latin typeface="IBM Plex Sans JP" panose="020B0503050203000203" pitchFamily="50" charset="-128"/>
-                <a:ea typeface="IBM Plex Sans JP" panose="020B0503050203000203" pitchFamily="50" charset="-128"/>
-              </a:rPr>
-              <a:t>Example: To create a fast-cycle gradient filament using cyan and magenta, select an S4 Model, choose a 4-cycle Plate, and use the Vivid curve Profile due to the high color contrast.</a:t>
-            </a:r>
-            <a:endParaRPr kumimoji="1" lang="ja-JP" altLang="en-US" sz="1000" b="1" dirty="0">
-              <a:latin typeface="IBM Plex Sans JP" panose="020B0503050203000203" pitchFamily="50" charset="-128"/>
-              <a:ea typeface="IBM Plex Sans JP" panose="020B0503050203000203" pitchFamily="50" charset="-128"/>
-            </a:endParaRPr>
-          </a:p>
-        </p:txBody>
-      </p:sp>
-      <p:sp>
-        <p:nvSpPr>
-          <p:cNvPr id="25" name="テキスト ボックス 24">
+        </p:txBody>
+      </p:sp>
+      <p:sp>
+        <p:nvSpPr>
+          <p:cNvPr id="35" name="テキスト ボックス 34">
             <a:extLst>
               <a:ext uri="{FF2B5EF4-FFF2-40B4-BE49-F238E27FC236}">
-                <a16:creationId xmlns:a16="http://schemas.microsoft.com/office/drawing/2014/main" id="{7ED3E711-A061-E5B5-882E-75E8B78F5498}"/>
+                <a16:creationId xmlns:a16="http://schemas.microsoft.com/office/drawing/2014/main" id="{5FE1D15C-58BD-0ED2-6FA9-EDDD3C3FFB7D}"/>
               </a:ext>
             </a:extLst>
           </p:cNvPr>
@@ -10504,87 +10947,7 @@
         </p:nvSpPr>
         <p:spPr>
           <a:xfrm>
-            <a:off x="675778" y="2965281"/>
-            <a:ext cx="5642222" cy="246221"/>
-          </a:xfrm>
-          <a:prstGeom prst="rect">
-            <a:avLst/>
-          </a:prstGeom>
-          <a:noFill/>
-        </p:spPr>
-        <p:txBody>
-          <a:bodyPr wrap="square" rtlCol="0">
-            <a:spAutoFit/>
-          </a:bodyPr>
-          <a:lstStyle/>
-          <a:p>
-            <a:r>
-              <a:rPr lang="en-US" altLang="ja-JP" sz="1000" dirty="0">
-                <a:latin typeface="IBM Plex Sans JP" panose="020B0503050203000203" pitchFamily="50" charset="-128"/>
-                <a:ea typeface="IBM Plex Sans JP" panose="020B0503050203000203" pitchFamily="50" charset="-128"/>
-              </a:rPr>
-              <a:t>The following is the model configuration for Gradient Filament.</a:t>
-            </a:r>
-          </a:p>
-        </p:txBody>
-      </p:sp>
-      <p:sp>
-        <p:nvSpPr>
-          <p:cNvPr id="5" name="テキスト ボックス 4">
-            <a:extLst>
-              <a:ext uri="{FF2B5EF4-FFF2-40B4-BE49-F238E27FC236}">
-                <a16:creationId xmlns:a16="http://schemas.microsoft.com/office/drawing/2014/main" id="{46940E87-7400-BF59-728F-D232492BBE36}"/>
-              </a:ext>
-            </a:extLst>
-          </p:cNvPr>
-          <p:cNvSpPr txBox="1"/>
-          <p:nvPr/>
-        </p:nvSpPr>
-        <p:spPr>
-          <a:xfrm>
-            <a:off x="778114" y="7268269"/>
-            <a:ext cx="1923925" cy="338554"/>
-          </a:xfrm>
-          <a:prstGeom prst="rect">
-            <a:avLst/>
-          </a:prstGeom>
-          <a:noFill/>
-        </p:spPr>
-        <p:txBody>
-          <a:bodyPr wrap="none" rtlCol="0">
-            <a:spAutoFit/>
-          </a:bodyPr>
-          <a:lstStyle/>
-          <a:p>
-            <a:r>
-              <a:rPr lang="en-US" altLang="ja-JP" sz="1600" dirty="0">
-                <a:latin typeface="IBM Plex Sans JP SemiBold" panose="020B0703050203000203" pitchFamily="50" charset="-128"/>
-                <a:ea typeface="IBM Plex Sans JP SemiBold" panose="020B0703050203000203" pitchFamily="50" charset="-128"/>
-              </a:rPr>
-              <a:t>6. Update History</a:t>
-            </a:r>
-            <a:endParaRPr kumimoji="1" lang="ja-JP" altLang="en-US" b="1" dirty="0">
-              <a:latin typeface="IBM Plex Sans JP SemiBold" panose="020B0703050203000203" pitchFamily="50" charset="-128"/>
-              <a:ea typeface="IBM Plex Sans JP SemiBold" panose="020B0703050203000203" pitchFamily="50" charset="-128"/>
-            </a:endParaRPr>
-          </a:p>
-        </p:txBody>
-      </p:sp>
-      <p:sp>
-        <p:nvSpPr>
-          <p:cNvPr id="6" name="テキスト ボックス 5">
-            <a:extLst>
-              <a:ext uri="{FF2B5EF4-FFF2-40B4-BE49-F238E27FC236}">
-                <a16:creationId xmlns:a16="http://schemas.microsoft.com/office/drawing/2014/main" id="{772E1925-419D-E6C3-9438-BD98D2BBDD58}"/>
-              </a:ext>
-            </a:extLst>
-          </p:cNvPr>
-          <p:cNvSpPr txBox="1"/>
-          <p:nvPr/>
-        </p:nvSpPr>
-        <p:spPr>
-          <a:xfrm>
-            <a:off x="638323" y="7599215"/>
+            <a:off x="638323" y="1115240"/>
             <a:ext cx="5649491" cy="507831"/>
           </a:xfrm>
           <a:prstGeom prst="rect">
@@ -10612,51 +10975,24 @@
                 <a:latin typeface="IBM Plex Sans JP" panose="020B0503050203000203" pitchFamily="50" charset="-128"/>
                 <a:ea typeface="IBM Plex Sans JP" panose="020B0503050203000203" pitchFamily="50" charset="-128"/>
               </a:rPr>
-              <a:t>Ver.1.10  2026-07-02  Revisions for Integrated Design</a:t>
-            </a:r>
-          </a:p>
-          <a:p>
-            <a:endParaRPr kumimoji="1" lang="ja-JP" altLang="en-US" sz="900" b="1" dirty="0">
-              <a:latin typeface="IBM Plex Sans JP" panose="020B0503050203000203" pitchFamily="50" charset="-128"/>
-              <a:ea typeface="IBM Plex Sans JP" panose="020B0503050203000203" pitchFamily="50" charset="-128"/>
-            </a:endParaRPr>
-          </a:p>
-        </p:txBody>
-      </p:sp>
-      <p:pic>
-        <p:nvPicPr>
-          <p:cNvPr id="9" name="図 8">
-            <a:extLst>
-              <a:ext uri="{FF2B5EF4-FFF2-40B4-BE49-F238E27FC236}">
-                <a16:creationId xmlns:a16="http://schemas.microsoft.com/office/drawing/2014/main" id="{0012A0F4-0BEF-52F9-839A-7754F15453D4}"/>
-              </a:ext>
-            </a:extLst>
-          </p:cNvPr>
-          <p:cNvPicPr>
-            <a:picLocks noChangeAspect="1"/>
-          </p:cNvPicPr>
-          <p:nvPr/>
-        </p:nvPicPr>
-        <p:blipFill>
-          <a:blip r:embed="rId3"/>
-          <a:stretch>
-            <a:fillRect/>
-          </a:stretch>
-        </p:blipFill>
-        <p:spPr>
-          <a:xfrm>
-            <a:off x="666614" y="3276700"/>
-            <a:ext cx="5521536" cy="3874587"/>
-          </a:xfrm>
-          <a:prstGeom prst="rect">
-            <a:avLst/>
-          </a:prstGeom>
-        </p:spPr>
-      </p:pic>
+              <a:t>Ver.1.10  2026-07-22  Revisions for Integrated Design</a:t>
+            </a:r>
+          </a:p>
+          <a:p>
+            <a:r>
+              <a:rPr lang="en-US" altLang="ja-JP" sz="900" dirty="0">
+                <a:latin typeface="IBM Plex Sans JP" panose="020B0503050203000203" pitchFamily="50" charset="-128"/>
+                <a:ea typeface="IBM Plex Sans JP" panose="020B0503050203000203" pitchFamily="50" charset="-128"/>
+              </a:rPr>
+              <a:t>Ver.1.11  2026-08-08  Revisions to align with the Japanese version</a:t>
+            </a:r>
+          </a:p>
+        </p:txBody>
+      </p:sp>
     </p:spTree>
     <p:extLst>
       <p:ext uri="{BB962C8B-B14F-4D97-AF65-F5344CB8AC3E}">
-        <p14:creationId xmlns:p14="http://schemas.microsoft.com/office/powerpoint/2010/main" val="3659034256"/>
+        <p14:creationId xmlns:p14="http://schemas.microsoft.com/office/powerpoint/2010/main" val="3082964952"/>
       </p:ext>
     </p:extLst>
   </p:cSld>

--- a/Documents/Original/FlexChroma_Tour_Guide_EN.pptx
+++ b/Documents/Original/FlexChroma_Tour_Guide_EN.pptx
@@ -251,7 +251,7 @@
           <a:p>
             <a:fld id="{71132294-360C-4425-B294-91EF6E97A591}" type="datetimeFigureOut">
               <a:rPr kumimoji="1" lang="ja-JP" altLang="en-US" smtClean="0"/>
-              <a:t>2026/8/8</a:t>
+              <a:t>2026/8/16</a:t>
             </a:fld>
             <a:endParaRPr kumimoji="1" lang="ja-JP" altLang="en-US"/>
           </a:p>
@@ -453,7 +453,7 @@
           <a:p>
             <a:fld id="{71132294-360C-4425-B294-91EF6E97A591}" type="datetimeFigureOut">
               <a:rPr kumimoji="1" lang="ja-JP" altLang="en-US" smtClean="0"/>
-              <a:t>2026/8/8</a:t>
+              <a:t>2026/8/16</a:t>
             </a:fld>
             <a:endParaRPr kumimoji="1" lang="ja-JP" altLang="en-US"/>
           </a:p>
@@ -665,7 +665,7 @@
           <a:p>
             <a:fld id="{71132294-360C-4425-B294-91EF6E97A591}" type="datetimeFigureOut">
               <a:rPr kumimoji="1" lang="ja-JP" altLang="en-US" smtClean="0"/>
-              <a:t>2026/8/8</a:t>
+              <a:t>2026/8/16</a:t>
             </a:fld>
             <a:endParaRPr kumimoji="1" lang="ja-JP" altLang="en-US"/>
           </a:p>
@@ -867,7 +867,7 @@
           <a:p>
             <a:fld id="{71132294-360C-4425-B294-91EF6E97A591}" type="datetimeFigureOut">
               <a:rPr kumimoji="1" lang="ja-JP" altLang="en-US" smtClean="0"/>
-              <a:t>2026/8/8</a:t>
+              <a:t>2026/8/16</a:t>
             </a:fld>
             <a:endParaRPr kumimoji="1" lang="ja-JP" altLang="en-US"/>
           </a:p>
@@ -1113,7 +1113,7 @@
           <a:p>
             <a:fld id="{71132294-360C-4425-B294-91EF6E97A591}" type="datetimeFigureOut">
               <a:rPr kumimoji="1" lang="ja-JP" altLang="en-US" smtClean="0"/>
-              <a:t>2026/8/8</a:t>
+              <a:t>2026/8/16</a:t>
             </a:fld>
             <a:endParaRPr kumimoji="1" lang="ja-JP" altLang="en-US"/>
           </a:p>
@@ -1409,7 +1409,7 @@
           <a:p>
             <a:fld id="{71132294-360C-4425-B294-91EF6E97A591}" type="datetimeFigureOut">
               <a:rPr kumimoji="1" lang="ja-JP" altLang="en-US" smtClean="0"/>
-              <a:t>2026/8/8</a:t>
+              <a:t>2026/8/16</a:t>
             </a:fld>
             <a:endParaRPr kumimoji="1" lang="ja-JP" altLang="en-US"/>
           </a:p>
@@ -1840,7 +1840,7 @@
           <a:p>
             <a:fld id="{71132294-360C-4425-B294-91EF6E97A591}" type="datetimeFigureOut">
               <a:rPr kumimoji="1" lang="ja-JP" altLang="en-US" smtClean="0"/>
-              <a:t>2026/8/8</a:t>
+              <a:t>2026/8/16</a:t>
             </a:fld>
             <a:endParaRPr kumimoji="1" lang="ja-JP" altLang="en-US"/>
           </a:p>
@@ -1958,7 +1958,7 @@
           <a:p>
             <a:fld id="{71132294-360C-4425-B294-91EF6E97A591}" type="datetimeFigureOut">
               <a:rPr kumimoji="1" lang="ja-JP" altLang="en-US" smtClean="0"/>
-              <a:t>2026/8/8</a:t>
+              <a:t>2026/8/16</a:t>
             </a:fld>
             <a:endParaRPr kumimoji="1" lang="ja-JP" altLang="en-US"/>
           </a:p>
@@ -2053,7 +2053,7 @@
           <a:p>
             <a:fld id="{71132294-360C-4425-B294-91EF6E97A591}" type="datetimeFigureOut">
               <a:rPr kumimoji="1" lang="ja-JP" altLang="en-US" smtClean="0"/>
-              <a:t>2026/8/8</a:t>
+              <a:t>2026/8/16</a:t>
             </a:fld>
             <a:endParaRPr kumimoji="1" lang="ja-JP" altLang="en-US"/>
           </a:p>
@@ -2362,7 +2362,7 @@
           <a:p>
             <a:fld id="{71132294-360C-4425-B294-91EF6E97A591}" type="datetimeFigureOut">
               <a:rPr kumimoji="1" lang="ja-JP" altLang="en-US" smtClean="0"/>
-              <a:t>2026/8/8</a:t>
+              <a:t>2026/8/16</a:t>
             </a:fld>
             <a:endParaRPr kumimoji="1" lang="ja-JP" altLang="en-US"/>
           </a:p>
@@ -2619,7 +2619,7 @@
           <a:p>
             <a:fld id="{71132294-360C-4425-B294-91EF6E97A591}" type="datetimeFigureOut">
               <a:rPr kumimoji="1" lang="ja-JP" altLang="en-US" smtClean="0"/>
-              <a:t>2026/8/8</a:t>
+              <a:t>2026/8/16</a:t>
             </a:fld>
             <a:endParaRPr kumimoji="1" lang="ja-JP" altLang="en-US"/>
           </a:p>
@@ -2864,7 +2864,7 @@
           <a:p>
             <a:fld id="{71132294-360C-4425-B294-91EF6E97A591}" type="datetimeFigureOut">
               <a:rPr kumimoji="1" lang="ja-JP" altLang="en-US" smtClean="0"/>
-              <a:t>2026/8/8</a:t>
+              <a:t>2026/8/16</a:t>
             </a:fld>
             <a:endParaRPr kumimoji="1" lang="ja-JP" altLang="en-US"/>
           </a:p>
@@ -4371,56 +4371,6 @@
       </p:sp>
       <p:sp>
         <p:nvSpPr>
-          <p:cNvPr id="2" name="テキスト ボックス 1">
-            <a:extLst>
-              <a:ext uri="{FF2B5EF4-FFF2-40B4-BE49-F238E27FC236}">
-                <a16:creationId xmlns:a16="http://schemas.microsoft.com/office/drawing/2014/main" id="{AB06514E-2962-A9E0-36A8-FFA8ABD714B3}"/>
-              </a:ext>
-            </a:extLst>
-          </p:cNvPr>
-          <p:cNvSpPr txBox="1"/>
-          <p:nvPr/>
-        </p:nvSpPr>
-        <p:spPr>
-          <a:xfrm>
-            <a:off x="968673" y="840586"/>
-            <a:ext cx="4966039" cy="584775"/>
-          </a:xfrm>
-          <a:prstGeom prst="rect">
-            <a:avLst/>
-          </a:prstGeom>
-          <a:noFill/>
-        </p:spPr>
-        <p:txBody>
-          <a:bodyPr wrap="none" rtlCol="0">
-            <a:spAutoFit/>
-          </a:bodyPr>
-          <a:lstStyle/>
-          <a:p>
-            <a:r>
-              <a:rPr lang="en-US" altLang="ja-JP" sz="3200" b="1" dirty="0">
-                <a:latin typeface="Segoe UI Semibold" panose="020B0702040204020203" pitchFamily="34" charset="0"/>
-                <a:ea typeface="IBM Plex Sans JP" panose="020B0503050203000203" pitchFamily="50" charset="-128"/>
-                <a:cs typeface="Segoe UI Semibold" panose="020B0702040204020203" pitchFamily="34" charset="0"/>
-              </a:rPr>
-              <a:t>FlexChroma™</a:t>
-            </a:r>
-            <a:r>
-              <a:rPr lang="en-US" altLang="ja-JP" sz="3200" b="1" dirty="0">
-                <a:latin typeface="IBM Plex Sans JP" panose="020B0503050203000203" pitchFamily="50" charset="-128"/>
-                <a:ea typeface="IBM Plex Sans JP" panose="020B0503050203000203" pitchFamily="50" charset="-128"/>
-              </a:rPr>
-              <a:t> Tour Guide</a:t>
-            </a:r>
-            <a:endParaRPr kumimoji="1" lang="ja-JP" altLang="en-US" sz="3200" b="1" dirty="0">
-              <a:latin typeface="IBM Plex Sans JP" panose="020B0503050203000203" pitchFamily="50" charset="-128"/>
-              <a:ea typeface="IBM Plex Sans JP" panose="020B0503050203000203" pitchFamily="50" charset="-128"/>
-            </a:endParaRPr>
-          </a:p>
-        </p:txBody>
-      </p:sp>
-      <p:sp>
-        <p:nvSpPr>
           <p:cNvPr id="14" name="楕円 13">
             <a:extLst>
               <a:ext uri="{FF2B5EF4-FFF2-40B4-BE49-F238E27FC236}">
@@ -4878,36 +4828,6 @@
           </a:p>
         </p:txBody>
       </p:sp>
-      <p:pic>
-        <p:nvPicPr>
-          <p:cNvPr id="33" name="図 32">
-            <a:extLst>
-              <a:ext uri="{FF2B5EF4-FFF2-40B4-BE49-F238E27FC236}">
-                <a16:creationId xmlns:a16="http://schemas.microsoft.com/office/drawing/2014/main" id="{373E7CFB-7ECE-1E91-69A3-DE952354F20A}"/>
-              </a:ext>
-            </a:extLst>
-          </p:cNvPr>
-          <p:cNvPicPr>
-            <a:picLocks noChangeAspect="1"/>
-          </p:cNvPicPr>
-          <p:nvPr/>
-        </p:nvPicPr>
-        <p:blipFill>
-          <a:blip r:embed="rId2"/>
-          <a:stretch>
-            <a:fillRect/>
-          </a:stretch>
-        </p:blipFill>
-        <p:spPr>
-          <a:xfrm>
-            <a:off x="551490" y="5293717"/>
-            <a:ext cx="5759241" cy="1144558"/>
-          </a:xfrm>
-          <a:prstGeom prst="rect">
-            <a:avLst/>
-          </a:prstGeom>
-        </p:spPr>
-      </p:pic>
       <p:grpSp>
         <p:nvGrpSpPr>
           <p:cNvPr id="23" name="グループ化 22">
@@ -5245,6 +5165,146 @@
           </a:p>
         </p:txBody>
       </p:sp>
+      <p:pic>
+        <p:nvPicPr>
+          <p:cNvPr id="12" name="図 11">
+            <a:extLst>
+              <a:ext uri="{FF2B5EF4-FFF2-40B4-BE49-F238E27FC236}">
+                <a16:creationId xmlns:a16="http://schemas.microsoft.com/office/drawing/2014/main" id="{29C610CC-9A58-FD90-CF1C-B086438406B0}"/>
+              </a:ext>
+            </a:extLst>
+          </p:cNvPr>
+          <p:cNvPicPr>
+            <a:picLocks noChangeAspect="1" noChangeArrowheads="1"/>
+          </p:cNvPicPr>
+          <p:nvPr/>
+        </p:nvPicPr>
+        <p:blipFill>
+          <a:blip r:embed="rId2">
+            <a:extLst>
+              <a:ext uri="{28A0092B-C50C-407E-A947-70E740481C1C}">
+                <a14:useLocalDpi xmlns:a14="http://schemas.microsoft.com/office/drawing/2010/main" val="0"/>
+              </a:ext>
+            </a:extLst>
+          </a:blip>
+          <a:srcRect/>
+          <a:stretch>
+            <a:fillRect/>
+          </a:stretch>
+        </p:blipFill>
+        <p:spPr bwMode="auto">
+          <a:xfrm>
+            <a:off x="604184" y="5309114"/>
+            <a:ext cx="5649629" cy="1100926"/>
+          </a:xfrm>
+          <a:prstGeom prst="rect">
+            <a:avLst/>
+          </a:prstGeom>
+          <a:noFill/>
+          <a:extLst>
+            <a:ext uri="{909E8E84-426E-40DD-AFC4-6F175D3DCCD1}">
+              <a14:hiddenFill xmlns:a14="http://schemas.microsoft.com/office/drawing/2010/main">
+                <a:solidFill>
+                  <a:srgbClr val="FFFFFF"/>
+                </a:solidFill>
+              </a14:hiddenFill>
+            </a:ext>
+          </a:extLst>
+        </p:spPr>
+      </p:pic>
+      <p:sp>
+        <p:nvSpPr>
+          <p:cNvPr id="13" name="テキスト ボックス 12">
+            <a:extLst>
+              <a:ext uri="{FF2B5EF4-FFF2-40B4-BE49-F238E27FC236}">
+                <a16:creationId xmlns:a16="http://schemas.microsoft.com/office/drawing/2014/main" id="{7425A56F-910B-B024-A78D-EFAC18825D1C}"/>
+              </a:ext>
+            </a:extLst>
+          </p:cNvPr>
+          <p:cNvSpPr txBox="1"/>
+          <p:nvPr/>
+        </p:nvSpPr>
+        <p:spPr>
+          <a:xfrm>
+            <a:off x="1398979" y="840586"/>
+            <a:ext cx="4701543" cy="584775"/>
+          </a:xfrm>
+          <a:prstGeom prst="rect">
+            <a:avLst/>
+          </a:prstGeom>
+          <a:noFill/>
+        </p:spPr>
+        <p:txBody>
+          <a:bodyPr wrap="none" rtlCol="0">
+            <a:spAutoFit/>
+          </a:bodyPr>
+          <a:lstStyle/>
+          <a:p>
+            <a:r>
+              <a:rPr lang="en-US" altLang="ja-JP" sz="3200" b="1" dirty="0">
+                <a:latin typeface="Segoe UI Semibold" panose="020B0702040204020203" pitchFamily="34" charset="0"/>
+                <a:ea typeface="IBM Plex Sans JP" panose="020B0503050203000203" pitchFamily="50" charset="-128"/>
+                <a:cs typeface="Segoe UI Semibold" panose="020B0702040204020203" pitchFamily="34" charset="0"/>
+              </a:rPr>
+              <a:t>FlexChroma</a:t>
+            </a:r>
+            <a:r>
+              <a:rPr lang="en-US" altLang="ja-JP" sz="3200" b="1" dirty="0">
+                <a:latin typeface="IBM Plex Sans JP" panose="020B0503050203000203" pitchFamily="50" charset="-128"/>
+                <a:ea typeface="IBM Plex Sans JP" panose="020B0503050203000203" pitchFamily="50" charset="-128"/>
+              </a:rPr>
+              <a:t> </a:t>
+            </a:r>
+            <a:r>
+              <a:rPr lang="en-US" altLang="ja-JP" sz="3000" b="1" dirty="0">
+                <a:latin typeface="IBM Plex Sans JP" panose="020B0503050203000203" pitchFamily="50" charset="-128"/>
+                <a:ea typeface="IBM Plex Sans JP" panose="020B0503050203000203" pitchFamily="50" charset="-128"/>
+              </a:rPr>
+              <a:t>Tour Guide</a:t>
+            </a:r>
+            <a:endParaRPr kumimoji="1" lang="ja-JP" altLang="en-US" sz="3000" b="1" dirty="0">
+              <a:latin typeface="IBM Plex Sans JP" panose="020B0503050203000203" pitchFamily="50" charset="-128"/>
+              <a:ea typeface="IBM Plex Sans JP" panose="020B0503050203000203" pitchFamily="50" charset="-128"/>
+            </a:endParaRPr>
+          </a:p>
+        </p:txBody>
+      </p:sp>
+      <p:pic>
+        <p:nvPicPr>
+          <p:cNvPr id="33" name="図 32">
+            <a:extLst>
+              <a:ext uri="{FF2B5EF4-FFF2-40B4-BE49-F238E27FC236}">
+                <a16:creationId xmlns:a16="http://schemas.microsoft.com/office/drawing/2014/main" id="{CC1B772D-A2DC-95B6-0C31-F976607EB633}"/>
+              </a:ext>
+            </a:extLst>
+          </p:cNvPr>
+          <p:cNvPicPr>
+            <a:picLocks noChangeAspect="1"/>
+          </p:cNvPicPr>
+          <p:nvPr/>
+        </p:nvPicPr>
+        <p:blipFill>
+          <a:blip r:embed="rId3">
+            <a:extLst>
+              <a:ext uri="{28A0092B-C50C-407E-A947-70E740481C1C}">
+                <a14:useLocalDpi xmlns:a14="http://schemas.microsoft.com/office/drawing/2010/main" val="0"/>
+              </a:ext>
+            </a:extLst>
+          </a:blip>
+          <a:stretch>
+            <a:fillRect/>
+          </a:stretch>
+        </p:blipFill>
+        <p:spPr>
+          <a:xfrm>
+            <a:off x="1051920" y="905041"/>
+            <a:ext cx="406869" cy="392227"/>
+          </a:xfrm>
+          <a:prstGeom prst="rect">
+            <a:avLst/>
+          </a:prstGeom>
+        </p:spPr>
+      </p:pic>
     </p:spTree>
     <p:extLst>
       <p:ext uri="{BB962C8B-B14F-4D97-AF65-F5344CB8AC3E}">
@@ -5850,7 +5910,7 @@
         </p:nvSpPr>
         <p:spPr>
           <a:xfrm>
-            <a:off x="566175" y="677902"/>
+            <a:off x="566175" y="667144"/>
             <a:ext cx="204669" cy="204669"/>
           </a:xfrm>
           <a:prstGeom prst="ellipse">
@@ -5896,7 +5956,7 @@
         </p:nvSpPr>
         <p:spPr>
           <a:xfrm>
-            <a:off x="566175" y="2644750"/>
+            <a:off x="566175" y="2537170"/>
             <a:ext cx="204669" cy="204669"/>
           </a:xfrm>
           <a:prstGeom prst="ellipse">
@@ -6041,7 +6101,7 @@
         </p:nvSpPr>
         <p:spPr>
           <a:xfrm>
-            <a:off x="770844" y="2574192"/>
+            <a:off x="770844" y="2482749"/>
             <a:ext cx="2379177" cy="400110"/>
           </a:xfrm>
           <a:prstGeom prst="rect">
@@ -6083,8 +6143,8 @@
         </p:nvSpPr>
         <p:spPr>
           <a:xfrm>
-            <a:off x="668509" y="2953843"/>
-            <a:ext cx="5642222" cy="1169551"/>
+            <a:off x="668509" y="2862400"/>
+            <a:ext cx="5642222" cy="1123384"/>
           </a:xfrm>
           <a:prstGeom prst="rect">
             <a:avLst/>
@@ -6122,7 +6182,7 @@
             </a:r>
           </a:p>
           <a:p>
-            <a:endParaRPr lang="en-US" altLang="ja-JP" sz="1000" dirty="0">
+            <a:endParaRPr lang="en-US" altLang="ja-JP" sz="600" dirty="0">
               <a:latin typeface="IBM Plex Sans JP" panose="020B0503050203000203" pitchFamily="50" charset="-128"/>
               <a:ea typeface="IBM Plex Sans JP" panose="020B0503050203000203" pitchFamily="50" charset="-128"/>
             </a:endParaRPr>
@@ -6182,10 +6242,10 @@
       </p:sp>
       <p:pic>
         <p:nvPicPr>
-          <p:cNvPr id="26" name="図 25">
+          <p:cNvPr id="4" name="図 3">
             <a:extLst>
               <a:ext uri="{FF2B5EF4-FFF2-40B4-BE49-F238E27FC236}">
-                <a16:creationId xmlns:a16="http://schemas.microsoft.com/office/drawing/2014/main" id="{23874BB3-E688-0DEB-EE2D-8445FA682C78}"/>
+                <a16:creationId xmlns:a16="http://schemas.microsoft.com/office/drawing/2014/main" id="{4F8E8DE6-504D-BD3F-0399-F6F3D82CC265}"/>
               </a:ext>
             </a:extLst>
           </p:cNvPr>
@@ -6209,8 +6269,8 @@
         </p:blipFill>
         <p:spPr bwMode="auto">
           <a:xfrm>
-            <a:off x="770844" y="5325050"/>
-            <a:ext cx="5264196" cy="3270393"/>
+            <a:off x="709883" y="4074574"/>
+            <a:ext cx="5438111" cy="844458"/>
           </a:xfrm>
           <a:prstGeom prst="rect">
             <a:avLst/>
@@ -6229,40 +6289,10 @@
       </p:pic>
       <p:pic>
         <p:nvPicPr>
-          <p:cNvPr id="27" name="図 26">
+          <p:cNvPr id="18" name="図 17">
             <a:extLst>
               <a:ext uri="{FF2B5EF4-FFF2-40B4-BE49-F238E27FC236}">
-                <a16:creationId xmlns:a16="http://schemas.microsoft.com/office/drawing/2014/main" id="{EBD6A209-2D06-7463-8165-69E2412B2F21}"/>
-              </a:ext>
-            </a:extLst>
-          </p:cNvPr>
-          <p:cNvPicPr>
-            <a:picLocks noChangeAspect="1"/>
-          </p:cNvPicPr>
-          <p:nvPr/>
-        </p:nvPicPr>
-        <p:blipFill>
-          <a:blip r:embed="rId3"/>
-          <a:stretch>
-            <a:fillRect/>
-          </a:stretch>
-        </p:blipFill>
-        <p:spPr>
-          <a:xfrm>
-            <a:off x="709884" y="4100534"/>
-            <a:ext cx="5325156" cy="831813"/>
-          </a:xfrm>
-          <a:prstGeom prst="rect">
-            <a:avLst/>
-          </a:prstGeom>
-        </p:spPr>
-      </p:pic>
-      <p:pic>
-        <p:nvPicPr>
-          <p:cNvPr id="28" name="図 27">
-            <a:extLst>
-              <a:ext uri="{FF2B5EF4-FFF2-40B4-BE49-F238E27FC236}">
-                <a16:creationId xmlns:a16="http://schemas.microsoft.com/office/drawing/2014/main" id="{1382655B-80C9-15F1-61E0-4D073DBA1664}"/>
+                <a16:creationId xmlns:a16="http://schemas.microsoft.com/office/drawing/2014/main" id="{D3D432F2-CE44-FB23-1707-97B2149ADA46}"/>
               </a:ext>
             </a:extLst>
           </p:cNvPr>
@@ -6271,23 +6301,70 @@
           </p:cNvPicPr>
           <p:nvPr/>
         </p:nvPicPr>
-        <p:blipFill rotWithShape="1">
-          <a:blip r:embed="rId4">
+        <p:blipFill>
+          <a:blip r:embed="rId3">
             <a:extLst>
               <a:ext uri="{28A0092B-C50C-407E-A947-70E740481C1C}">
                 <a14:useLocalDpi xmlns:a14="http://schemas.microsoft.com/office/drawing/2010/main" val="0"/>
               </a:ext>
             </a:extLst>
           </a:blip>
-          <a:srcRect l="1747" r="2095" b="10009"/>
+          <a:srcRect/>
           <a:stretch>
             <a:fillRect/>
           </a:stretch>
         </p:blipFill>
         <p:spPr bwMode="auto">
           <a:xfrm>
-            <a:off x="1091915" y="1374795"/>
-            <a:ext cx="4561094" cy="1014727"/>
+            <a:off x="942794" y="5319864"/>
+            <a:ext cx="4882532" cy="3214119"/>
+          </a:xfrm>
+          <a:prstGeom prst="rect">
+            <a:avLst/>
+          </a:prstGeom>
+          <a:noFill/>
+          <a:extLst>
+            <a:ext uri="{909E8E84-426E-40DD-AFC4-6F175D3DCCD1}">
+              <a14:hiddenFill xmlns:a14="http://schemas.microsoft.com/office/drawing/2010/main">
+                <a:solidFill>
+                  <a:srgbClr val="FFFFFF"/>
+                </a:solidFill>
+              </a14:hiddenFill>
+            </a:ext>
+          </a:extLst>
+        </p:spPr>
+      </p:pic>
+      <p:pic>
+        <p:nvPicPr>
+          <p:cNvPr id="19" name="図 18">
+            <a:extLst>
+              <a:ext uri="{FF2B5EF4-FFF2-40B4-BE49-F238E27FC236}">
+                <a16:creationId xmlns:a16="http://schemas.microsoft.com/office/drawing/2014/main" id="{4B3870C2-DDA7-C3E6-2091-3D45703B2087}"/>
+              </a:ext>
+            </a:extLst>
+          </p:cNvPr>
+          <p:cNvPicPr>
+            <a:picLocks noChangeAspect="1" noChangeArrowheads="1"/>
+          </p:cNvPicPr>
+          <p:nvPr/>
+        </p:nvPicPr>
+        <p:blipFill>
+          <a:blip r:embed="rId4">
+            <a:extLst>
+              <a:ext uri="{28A0092B-C50C-407E-A947-70E740481C1C}">
+                <a14:useLocalDpi xmlns:a14="http://schemas.microsoft.com/office/drawing/2010/main" val="0"/>
+              </a:ext>
+            </a:extLst>
+          </a:blip>
+          <a:srcRect/>
+          <a:stretch>
+            <a:fillRect/>
+          </a:stretch>
+        </p:blipFill>
+        <p:spPr bwMode="auto">
+          <a:xfrm>
+            <a:off x="1344063" y="1376280"/>
+            <a:ext cx="4079993" cy="983677"/>
           </a:xfrm>
           <a:prstGeom prst="rect">
             <a:avLst/>
@@ -7051,12 +7128,107 @@
           </a:prstGeom>
         </p:spPr>
       </p:pic>
+      <p:sp>
+        <p:nvSpPr>
+          <p:cNvPr id="19" name="テキスト ボックス 18">
+            <a:extLst>
+              <a:ext uri="{FF2B5EF4-FFF2-40B4-BE49-F238E27FC236}">
+                <a16:creationId xmlns:a16="http://schemas.microsoft.com/office/drawing/2014/main" id="{2F436DDF-1FC5-E203-1F1E-B570A467D825}"/>
+              </a:ext>
+            </a:extLst>
+          </p:cNvPr>
+          <p:cNvSpPr txBox="1"/>
+          <p:nvPr/>
+        </p:nvSpPr>
+        <p:spPr>
+          <a:xfrm>
+            <a:off x="668508" y="1032957"/>
+            <a:ext cx="5649491" cy="2031325"/>
+          </a:xfrm>
+          <a:prstGeom prst="rect">
+            <a:avLst/>
+          </a:prstGeom>
+          <a:noFill/>
+        </p:spPr>
+        <p:txBody>
+          <a:bodyPr wrap="square" rtlCol="0">
+            <a:spAutoFit/>
+          </a:bodyPr>
+          <a:lstStyle/>
+          <a:p>
+            <a:r>
+              <a:rPr lang="en-US" altLang="ja-JP" sz="1000" dirty="0">
+                <a:latin typeface="IBM Plex Sans JP" panose="020B0503050203000203" pitchFamily="50" charset="-128"/>
+                <a:ea typeface="IBM Plex Sans JP" panose="020B0503050203000203" pitchFamily="50" charset="-128"/>
+              </a:rPr>
+              <a:t>The Gradient Filament Series provides multiple color-changing Profiles and Plates with different cycle counts. Details vary by model, so please refer to each model’s description.</a:t>
+            </a:r>
+          </a:p>
+          <a:p>
+            <a:endParaRPr lang="en-US" altLang="ja-JP" sz="1000" dirty="0">
+              <a:latin typeface="IBM Plex Sans JP" panose="020B0503050203000203" pitchFamily="50" charset="-128"/>
+              <a:ea typeface="IBM Plex Sans JP" panose="020B0503050203000203" pitchFamily="50" charset="-128"/>
+            </a:endParaRPr>
+          </a:p>
+          <a:p>
+            <a:pPr marL="171450" indent="-171450">
+              <a:buFont typeface="Arial" panose="020B0604020202020204" pitchFamily="34" charset="0"/>
+              <a:buChar char="•"/>
+            </a:pPr>
+            <a:r>
+              <a:rPr lang="en-US" altLang="ja-JP" sz="1000" dirty="0">
+                <a:latin typeface="IBM Plex Sans JP" panose="020B0503050203000203" pitchFamily="50" charset="-128"/>
+                <a:ea typeface="IBM Plex Sans JP" panose="020B0503050203000203" pitchFamily="50" charset="-128"/>
+              </a:rPr>
+              <a:t>Color Curve: Settings based on color combinations. This option allows you to select the optimal gradient for each color—for example, “Vivid” for cyan and yellow, or “Contrast” for white and magenta.</a:t>
+            </a:r>
+          </a:p>
+          <a:p>
+            <a:endParaRPr lang="en-US" altLang="ja-JP" sz="600" dirty="0">
+              <a:latin typeface="IBM Plex Sans JP" panose="020B0503050203000203" pitchFamily="50" charset="-128"/>
+              <a:ea typeface="IBM Plex Sans JP" panose="020B0503050203000203" pitchFamily="50" charset="-128"/>
+            </a:endParaRPr>
+          </a:p>
+          <a:p>
+            <a:pPr marL="171450" indent="-171450">
+              <a:buFont typeface="Arial" panose="020B0604020202020204" pitchFamily="34" charset="0"/>
+              <a:buChar char="•"/>
+            </a:pPr>
+            <a:r>
+              <a:rPr lang="en-US" altLang="ja-JP" sz="1000" dirty="0">
+                <a:latin typeface="IBM Plex Sans JP" panose="020B0503050203000203" pitchFamily="50" charset="-128"/>
+                <a:ea typeface="IBM Plex Sans JP" panose="020B0503050203000203" pitchFamily="50" charset="-128"/>
+              </a:rPr>
+              <a:t>Number of cycles: The number that determines the frequency of the gradient. One cycle is counted as one complete cycle in which the filament changes from A to B to A and back.</a:t>
+            </a:r>
+          </a:p>
+          <a:p>
+            <a:endParaRPr lang="en-US" altLang="ja-JP" sz="1000" dirty="0">
+              <a:latin typeface="IBM Plex Sans JP" panose="020B0503050203000203" pitchFamily="50" charset="-128"/>
+              <a:ea typeface="IBM Plex Sans JP" panose="020B0503050203000203" pitchFamily="50" charset="-128"/>
+            </a:endParaRPr>
+          </a:p>
+          <a:p>
+            <a:r>
+              <a:rPr lang="en-US" altLang="ja-JP" sz="1000" dirty="0">
+                <a:latin typeface="IBM Plex Sans JP" panose="020B0503050203000203" pitchFamily="50" charset="-128"/>
+                <a:ea typeface="IBM Plex Sans JP" panose="020B0503050203000203" pitchFamily="50" charset="-128"/>
+              </a:rPr>
+              <a:t>Example: To create a fast-cycle gradient filament using cyan and magenta, select an S4 Model, choose a 4-cycle Plate, and use the Vivid curve Profile due to the high color contrast.</a:t>
+            </a:r>
+            <a:endParaRPr kumimoji="1" lang="ja-JP" altLang="en-US" sz="1000" b="1" dirty="0">
+              <a:latin typeface="IBM Plex Sans JP" panose="020B0503050203000203" pitchFamily="50" charset="-128"/>
+              <a:ea typeface="IBM Plex Sans JP" panose="020B0503050203000203" pitchFamily="50" charset="-128"/>
+            </a:endParaRPr>
+          </a:p>
+        </p:txBody>
+      </p:sp>
       <p:pic>
         <p:nvPicPr>
-          <p:cNvPr id="12" name="図 11">
+          <p:cNvPr id="2" name="図 1">
             <a:extLst>
               <a:ext uri="{FF2B5EF4-FFF2-40B4-BE49-F238E27FC236}">
-                <a16:creationId xmlns:a16="http://schemas.microsoft.com/office/drawing/2014/main" id="{891DA657-8E1F-7254-472E-9A128ADE33E9}"/>
+                <a16:creationId xmlns:a16="http://schemas.microsoft.com/office/drawing/2014/main" id="{AF71E702-A1F1-BE0E-8E3E-B4CB70338F29}"/>
               </a:ext>
             </a:extLst>
           </p:cNvPr>
@@ -7080,8 +7252,8 @@
         </p:blipFill>
         <p:spPr bwMode="auto">
           <a:xfrm>
-            <a:off x="609082" y="3243238"/>
-            <a:ext cx="5636600" cy="919080"/>
+            <a:off x="620249" y="3243238"/>
+            <a:ext cx="5614266" cy="919080"/>
           </a:xfrm>
           <a:prstGeom prst="rect">
             <a:avLst/>
@@ -7098,101 +7270,6 @@
           </a:extLst>
         </p:spPr>
       </p:pic>
-      <p:sp>
-        <p:nvSpPr>
-          <p:cNvPr id="19" name="テキスト ボックス 18">
-            <a:extLst>
-              <a:ext uri="{FF2B5EF4-FFF2-40B4-BE49-F238E27FC236}">
-                <a16:creationId xmlns:a16="http://schemas.microsoft.com/office/drawing/2014/main" id="{2F436DDF-1FC5-E203-1F1E-B570A467D825}"/>
-              </a:ext>
-            </a:extLst>
-          </p:cNvPr>
-          <p:cNvSpPr txBox="1"/>
-          <p:nvPr/>
-        </p:nvSpPr>
-        <p:spPr>
-          <a:xfrm>
-            <a:off x="668508" y="1032957"/>
-            <a:ext cx="5649491" cy="2031325"/>
-          </a:xfrm>
-          <a:prstGeom prst="rect">
-            <a:avLst/>
-          </a:prstGeom>
-          <a:noFill/>
-        </p:spPr>
-        <p:txBody>
-          <a:bodyPr wrap="square" rtlCol="0">
-            <a:spAutoFit/>
-          </a:bodyPr>
-          <a:lstStyle/>
-          <a:p>
-            <a:r>
-              <a:rPr lang="en-US" altLang="ja-JP" sz="1000" dirty="0">
-                <a:latin typeface="IBM Plex Sans JP" panose="020B0503050203000203" pitchFamily="50" charset="-128"/>
-                <a:ea typeface="IBM Plex Sans JP" panose="020B0503050203000203" pitchFamily="50" charset="-128"/>
-              </a:rPr>
-              <a:t>The Gradient Filament Series provides multiple color-changing Profiles and Plates with different cycle counts. Details vary by model, so please refer to each model’s description.</a:t>
-            </a:r>
-          </a:p>
-          <a:p>
-            <a:endParaRPr lang="en-US" altLang="ja-JP" sz="1000" dirty="0">
-              <a:latin typeface="IBM Plex Sans JP" panose="020B0503050203000203" pitchFamily="50" charset="-128"/>
-              <a:ea typeface="IBM Plex Sans JP" panose="020B0503050203000203" pitchFamily="50" charset="-128"/>
-            </a:endParaRPr>
-          </a:p>
-          <a:p>
-            <a:pPr marL="171450" indent="-171450">
-              <a:buFont typeface="Arial" panose="020B0604020202020204" pitchFamily="34" charset="0"/>
-              <a:buChar char="•"/>
-            </a:pPr>
-            <a:r>
-              <a:rPr lang="en-US" altLang="ja-JP" sz="1000" dirty="0">
-                <a:latin typeface="IBM Plex Sans JP" panose="020B0503050203000203" pitchFamily="50" charset="-128"/>
-                <a:ea typeface="IBM Plex Sans JP" panose="020B0503050203000203" pitchFamily="50" charset="-128"/>
-              </a:rPr>
-              <a:t>Color Curve: Settings based on color combinations. This option allows you to select the optimal gradient for each color—for example, “Vivid” for cyan and yellow, or “Contrast” for white and magenta.</a:t>
-            </a:r>
-          </a:p>
-          <a:p>
-            <a:endParaRPr lang="en-US" altLang="ja-JP" sz="600" dirty="0">
-              <a:latin typeface="IBM Plex Sans JP" panose="020B0503050203000203" pitchFamily="50" charset="-128"/>
-              <a:ea typeface="IBM Plex Sans JP" panose="020B0503050203000203" pitchFamily="50" charset="-128"/>
-            </a:endParaRPr>
-          </a:p>
-          <a:p>
-            <a:pPr marL="171450" indent="-171450">
-              <a:buFont typeface="Arial" panose="020B0604020202020204" pitchFamily="34" charset="0"/>
-              <a:buChar char="•"/>
-            </a:pPr>
-            <a:r>
-              <a:rPr lang="en-US" altLang="ja-JP" sz="1000" dirty="0">
-                <a:latin typeface="IBM Plex Sans JP" panose="020B0503050203000203" pitchFamily="50" charset="-128"/>
-                <a:ea typeface="IBM Plex Sans JP" panose="020B0503050203000203" pitchFamily="50" charset="-128"/>
-              </a:rPr>
-              <a:t>Number of cycles: The number that determines the frequency of the gradient. One cycle is counted as one complete cycle in which the filament changes from A to B to A and back.</a:t>
-            </a:r>
-          </a:p>
-          <a:p>
-            <a:endParaRPr lang="en-US" altLang="ja-JP" sz="1000" dirty="0">
-              <a:latin typeface="IBM Plex Sans JP" panose="020B0503050203000203" pitchFamily="50" charset="-128"/>
-              <a:ea typeface="IBM Plex Sans JP" panose="020B0503050203000203" pitchFamily="50" charset="-128"/>
-            </a:endParaRPr>
-          </a:p>
-          <a:p>
-            <a:r>
-              <a:rPr lang="en-US" altLang="ja-JP" sz="1000" dirty="0">
-                <a:latin typeface="IBM Plex Sans JP" panose="020B0503050203000203" pitchFamily="50" charset="-128"/>
-                <a:ea typeface="IBM Plex Sans JP" panose="020B0503050203000203" pitchFamily="50" charset="-128"/>
-              </a:rPr>
-              <a:t>Example: To create a fast-cycle gradient filament using cyan and magenta, select an S4 Model, choose a 4-cycle Plate, and use the Vivid curve Profile due to the high color contrast.</a:t>
-            </a:r>
-            <a:endParaRPr kumimoji="1" lang="ja-JP" altLang="en-US" sz="1000" b="1" dirty="0">
-              <a:latin typeface="IBM Plex Sans JP" panose="020B0503050203000203" pitchFamily="50" charset="-128"/>
-              <a:ea typeface="IBM Plex Sans JP" panose="020B0503050203000203" pitchFamily="50" charset="-128"/>
-            </a:endParaRPr>
-          </a:p>
-        </p:txBody>
-      </p:sp>
     </p:spTree>
     <p:extLst>
       <p:ext uri="{BB962C8B-B14F-4D97-AF65-F5344CB8AC3E}">
@@ -8505,8 +8582,8 @@
         </p:nvSpPr>
         <p:spPr>
           <a:xfrm>
-            <a:off x="968673" y="840586"/>
-            <a:ext cx="4966039" cy="584775"/>
+            <a:off x="1398979" y="840586"/>
+            <a:ext cx="4701543" cy="584775"/>
           </a:xfrm>
           <a:prstGeom prst="rect">
             <a:avLst/>
@@ -8525,16 +8602,23 @@
                 <a:ea typeface="IBM Plex Sans JP" panose="020B0503050203000203" pitchFamily="50" charset="-128"/>
                 <a:cs typeface="Segoe UI Semibold" panose="020B0702040204020203" pitchFamily="34" charset="0"/>
               </a:rPr>
-              <a:t>FlexChroma™</a:t>
+              <a:t>FlexChroma</a:t>
             </a:r>
             <a:r>
               <a:rPr lang="en-US" altLang="ja-JP" sz="3200" b="1" dirty="0">
                 <a:latin typeface="IBM Plex Sans JP" panose="020B0503050203000203" pitchFamily="50" charset="-128"/>
                 <a:ea typeface="IBM Plex Sans JP" panose="020B0503050203000203" pitchFamily="50" charset="-128"/>
               </a:rPr>
-              <a:t> Tour Guide</a:t>
-            </a:r>
-            <a:endParaRPr kumimoji="1" lang="ja-JP" altLang="en-US" sz="3200" b="1" dirty="0">
+              <a:t> </a:t>
+            </a:r>
+            <a:r>
+              <a:rPr lang="en-US" altLang="ja-JP" sz="3000" b="1" dirty="0">
+                <a:latin typeface="IBM Plex Sans JP" panose="020B0503050203000203" pitchFamily="50" charset="-128"/>
+                <a:ea typeface="IBM Plex Sans JP" panose="020B0503050203000203" pitchFamily="50" charset="-128"/>
+              </a:rPr>
+              <a:t>Tour Guide</a:t>
+            </a:r>
+            <a:endParaRPr kumimoji="1" lang="ja-JP" altLang="en-US" sz="3000" b="1" dirty="0">
               <a:latin typeface="IBM Plex Sans JP" panose="020B0503050203000203" pitchFamily="50" charset="-128"/>
               <a:ea typeface="IBM Plex Sans JP" panose="020B0503050203000203" pitchFamily="50" charset="-128"/>
             </a:endParaRPr>
@@ -9009,10 +9093,10 @@
       </p:sp>
       <p:pic>
         <p:nvPicPr>
-          <p:cNvPr id="4" name="図 3">
+          <p:cNvPr id="6" name="図 5">
             <a:extLst>
               <a:ext uri="{FF2B5EF4-FFF2-40B4-BE49-F238E27FC236}">
-                <a16:creationId xmlns:a16="http://schemas.microsoft.com/office/drawing/2014/main" id="{8A8FE461-7AA8-8B0B-6152-72DC79CCBDC3}"/>
+                <a16:creationId xmlns:a16="http://schemas.microsoft.com/office/drawing/2014/main" id="{B714522D-D813-2462-0161-A0C7F73B894B}"/>
               </a:ext>
             </a:extLst>
           </p:cNvPr>
@@ -9036,8 +9120,8 @@
         </p:blipFill>
         <p:spPr bwMode="auto">
           <a:xfrm>
-            <a:off x="464213" y="5205559"/>
-            <a:ext cx="6022648" cy="1283693"/>
+            <a:off x="604184" y="5309114"/>
+            <a:ext cx="5649629" cy="1100926"/>
           </a:xfrm>
           <a:prstGeom prst="rect">
             <a:avLst/>
@@ -9052,6 +9136,42 @@
               </a14:hiddenFill>
             </a:ext>
           </a:extLst>
+        </p:spPr>
+      </p:pic>
+      <p:pic>
+        <p:nvPicPr>
+          <p:cNvPr id="8" name="図 7">
+            <a:extLst>
+              <a:ext uri="{FF2B5EF4-FFF2-40B4-BE49-F238E27FC236}">
+                <a16:creationId xmlns:a16="http://schemas.microsoft.com/office/drawing/2014/main" id="{3AE1B5FE-5164-7D3A-A4F5-C86E387B70FD}"/>
+              </a:ext>
+            </a:extLst>
+          </p:cNvPr>
+          <p:cNvPicPr>
+            <a:picLocks noChangeAspect="1"/>
+          </p:cNvPicPr>
+          <p:nvPr/>
+        </p:nvPicPr>
+        <p:blipFill>
+          <a:blip r:embed="rId3">
+            <a:extLst>
+              <a:ext uri="{28A0092B-C50C-407E-A947-70E740481C1C}">
+                <a14:useLocalDpi xmlns:a14="http://schemas.microsoft.com/office/drawing/2010/main" val="0"/>
+              </a:ext>
+            </a:extLst>
+          </a:blip>
+          <a:stretch>
+            <a:fillRect/>
+          </a:stretch>
+        </p:blipFill>
+        <p:spPr>
+          <a:xfrm>
+            <a:off x="1051920" y="905041"/>
+            <a:ext cx="406869" cy="392227"/>
+          </a:xfrm>
+          <a:prstGeom prst="rect">
+            <a:avLst/>
+          </a:prstGeom>
         </p:spPr>
       </p:pic>
     </p:spTree>
@@ -9738,10 +9858,10 @@
       </p:sp>
       <p:pic>
         <p:nvPicPr>
-          <p:cNvPr id="26" name="図 25">
+          <p:cNvPr id="9" name="図 8">
             <a:extLst>
               <a:ext uri="{FF2B5EF4-FFF2-40B4-BE49-F238E27FC236}">
-                <a16:creationId xmlns:a16="http://schemas.microsoft.com/office/drawing/2014/main" id="{D599B3A6-5BF1-475A-455C-4CE16066520F}"/>
+                <a16:creationId xmlns:a16="http://schemas.microsoft.com/office/drawing/2014/main" id="{DA01F81B-7D5D-1705-0678-04FC6D100831}"/>
               </a:ext>
             </a:extLst>
           </p:cNvPr>
@@ -9765,8 +9885,8 @@
         </p:blipFill>
         <p:spPr bwMode="auto">
           <a:xfrm>
-            <a:off x="770844" y="5325050"/>
-            <a:ext cx="5264196" cy="3270393"/>
+            <a:off x="709943" y="4074574"/>
+            <a:ext cx="5438111" cy="844458"/>
           </a:xfrm>
           <a:prstGeom prst="rect">
             <a:avLst/>
@@ -9785,10 +9905,10 @@
       </p:pic>
       <p:pic>
         <p:nvPicPr>
-          <p:cNvPr id="38" name="図 37">
+          <p:cNvPr id="13" name="図 12">
             <a:extLst>
               <a:ext uri="{FF2B5EF4-FFF2-40B4-BE49-F238E27FC236}">
-                <a16:creationId xmlns:a16="http://schemas.microsoft.com/office/drawing/2014/main" id="{24EE4D19-C95F-DECA-987F-D6FD0CAF2F69}"/>
+                <a16:creationId xmlns:a16="http://schemas.microsoft.com/office/drawing/2014/main" id="{5609B2BD-AD57-48F0-51D0-1811DE157760}"/>
               </a:ext>
             </a:extLst>
           </p:cNvPr>
@@ -9797,7 +9917,7 @@
           </p:cNvPicPr>
           <p:nvPr/>
         </p:nvPicPr>
-        <p:blipFill rotWithShape="1">
+        <p:blipFill>
           <a:blip r:embed="rId3">
             <a:extLst>
               <a:ext uri="{28A0092B-C50C-407E-A947-70E740481C1C}">
@@ -9805,15 +9925,15 @@
               </a:ext>
             </a:extLst>
           </a:blip>
-          <a:srcRect l="1747" r="2095" b="10009"/>
+          <a:srcRect/>
           <a:stretch>
             <a:fillRect/>
           </a:stretch>
         </p:blipFill>
         <p:spPr bwMode="auto">
           <a:xfrm>
-            <a:off x="1091915" y="1374795"/>
-            <a:ext cx="4561094" cy="1014727"/>
+            <a:off x="942794" y="5319864"/>
+            <a:ext cx="4882532" cy="3214119"/>
           </a:xfrm>
           <a:prstGeom prst="rect">
             <a:avLst/>
@@ -9832,10 +9952,10 @@
       </p:pic>
       <p:pic>
         <p:nvPicPr>
-          <p:cNvPr id="4" name="図 3">
+          <p:cNvPr id="5" name="図 4">
             <a:extLst>
               <a:ext uri="{FF2B5EF4-FFF2-40B4-BE49-F238E27FC236}">
-                <a16:creationId xmlns:a16="http://schemas.microsoft.com/office/drawing/2014/main" id="{31322046-DA05-E453-193E-B1947F2711C9}"/>
+                <a16:creationId xmlns:a16="http://schemas.microsoft.com/office/drawing/2014/main" id="{D0285320-9EA6-1332-51CF-5053CEB5A9FB}"/>
               </a:ext>
             </a:extLst>
           </p:cNvPr>
@@ -9859,8 +9979,8 @@
         </p:blipFill>
         <p:spPr bwMode="auto">
           <a:xfrm>
-            <a:off x="659626" y="4065069"/>
-            <a:ext cx="5529865" cy="863845"/>
+            <a:off x="1344063" y="1376280"/>
+            <a:ext cx="4079993" cy="983677"/>
           </a:xfrm>
           <a:prstGeom prst="rect">
             <a:avLst/>
@@ -10338,12 +10458,107 @@
           </a:p>
         </p:txBody>
       </p:sp>
+      <p:sp>
+        <p:nvSpPr>
+          <p:cNvPr id="19" name="テキスト ボックス 18">
+            <a:extLst>
+              <a:ext uri="{FF2B5EF4-FFF2-40B4-BE49-F238E27FC236}">
+                <a16:creationId xmlns:a16="http://schemas.microsoft.com/office/drawing/2014/main" id="{EC269278-E84C-3A0D-7F7F-F9CC24F59D7B}"/>
+              </a:ext>
+            </a:extLst>
+          </p:cNvPr>
+          <p:cNvSpPr txBox="1"/>
+          <p:nvPr/>
+        </p:nvSpPr>
+        <p:spPr>
+          <a:xfrm>
+            <a:off x="668508" y="1032957"/>
+            <a:ext cx="5649491" cy="2031325"/>
+          </a:xfrm>
+          <a:prstGeom prst="rect">
+            <a:avLst/>
+          </a:prstGeom>
+          <a:noFill/>
+        </p:spPr>
+        <p:txBody>
+          <a:bodyPr wrap="square" rtlCol="0">
+            <a:spAutoFit/>
+          </a:bodyPr>
+          <a:lstStyle/>
+          <a:p>
+            <a:r>
+              <a:rPr lang="en-US" altLang="ja-JP" sz="1000" dirty="0">
+                <a:latin typeface="IBM Plex Sans JP" panose="020B0503050203000203" pitchFamily="50" charset="-128"/>
+                <a:ea typeface="IBM Plex Sans JP" panose="020B0503050203000203" pitchFamily="50" charset="-128"/>
+              </a:rPr>
+              <a:t>The Gradient Filament Series provides multiple color-changing Profiles and Plates with different cycle counts. Details vary by model, so please refer to each model’s description.</a:t>
+            </a:r>
+          </a:p>
+          <a:p>
+            <a:endParaRPr lang="en-US" altLang="ja-JP" sz="1000" dirty="0">
+              <a:latin typeface="IBM Plex Sans JP" panose="020B0503050203000203" pitchFamily="50" charset="-128"/>
+              <a:ea typeface="IBM Plex Sans JP" panose="020B0503050203000203" pitchFamily="50" charset="-128"/>
+            </a:endParaRPr>
+          </a:p>
+          <a:p>
+            <a:pPr marL="171450" indent="-171450">
+              <a:buFont typeface="Arial" panose="020B0604020202020204" pitchFamily="34" charset="0"/>
+              <a:buChar char="•"/>
+            </a:pPr>
+            <a:r>
+              <a:rPr lang="en-US" altLang="ja-JP" sz="1000" dirty="0">
+                <a:latin typeface="IBM Plex Sans JP" panose="020B0503050203000203" pitchFamily="50" charset="-128"/>
+                <a:ea typeface="IBM Plex Sans JP" panose="020B0503050203000203" pitchFamily="50" charset="-128"/>
+              </a:rPr>
+              <a:t>Color Curve: Settings based on color combinations. This option allows you to select the optimal gradient for each color—for example, “Vivid” for cyan and yellow, or “Contrast” for white and magenta.</a:t>
+            </a:r>
+          </a:p>
+          <a:p>
+            <a:endParaRPr lang="en-US" altLang="ja-JP" sz="600" dirty="0">
+              <a:latin typeface="IBM Plex Sans JP" panose="020B0503050203000203" pitchFamily="50" charset="-128"/>
+              <a:ea typeface="IBM Plex Sans JP" panose="020B0503050203000203" pitchFamily="50" charset="-128"/>
+            </a:endParaRPr>
+          </a:p>
+          <a:p>
+            <a:pPr marL="171450" indent="-171450">
+              <a:buFont typeface="Arial" panose="020B0604020202020204" pitchFamily="34" charset="0"/>
+              <a:buChar char="•"/>
+            </a:pPr>
+            <a:r>
+              <a:rPr lang="en-US" altLang="ja-JP" sz="1000" dirty="0">
+                <a:latin typeface="IBM Plex Sans JP" panose="020B0503050203000203" pitchFamily="50" charset="-128"/>
+                <a:ea typeface="IBM Plex Sans JP" panose="020B0503050203000203" pitchFamily="50" charset="-128"/>
+              </a:rPr>
+              <a:t>Number of cycles: The number that determines the frequency of the gradient. One cycle is counted as one complete cycle in which the filament changes from A to B to A and back.</a:t>
+            </a:r>
+          </a:p>
+          <a:p>
+            <a:endParaRPr lang="en-US" altLang="ja-JP" sz="1000" dirty="0">
+              <a:latin typeface="IBM Plex Sans JP" panose="020B0503050203000203" pitchFamily="50" charset="-128"/>
+              <a:ea typeface="IBM Plex Sans JP" panose="020B0503050203000203" pitchFamily="50" charset="-128"/>
+            </a:endParaRPr>
+          </a:p>
+          <a:p>
+            <a:r>
+              <a:rPr lang="en-US" altLang="ja-JP" sz="1000" dirty="0">
+                <a:latin typeface="IBM Plex Sans JP" panose="020B0503050203000203" pitchFamily="50" charset="-128"/>
+                <a:ea typeface="IBM Plex Sans JP" panose="020B0503050203000203" pitchFamily="50" charset="-128"/>
+              </a:rPr>
+              <a:t>Example: To create a fast-cycle gradient filament using cyan and magenta, select an S4 Model, choose a 4-cycle Plate, and use the Vivid curve Profile due to the high color contrast.</a:t>
+            </a:r>
+            <a:endParaRPr kumimoji="1" lang="ja-JP" altLang="en-US" sz="1000" b="1" dirty="0">
+              <a:latin typeface="IBM Plex Sans JP" panose="020B0503050203000203" pitchFamily="50" charset="-128"/>
+              <a:ea typeface="IBM Plex Sans JP" panose="020B0503050203000203" pitchFamily="50" charset="-128"/>
+            </a:endParaRPr>
+          </a:p>
+        </p:txBody>
+      </p:sp>
       <p:pic>
         <p:nvPicPr>
-          <p:cNvPr id="4" name="図 3">
+          <p:cNvPr id="3" name="図 2">
             <a:extLst>
               <a:ext uri="{FF2B5EF4-FFF2-40B4-BE49-F238E27FC236}">
-                <a16:creationId xmlns:a16="http://schemas.microsoft.com/office/drawing/2014/main" id="{3FA3831D-D4BD-0548-916E-1ED70DB39443}"/>
+                <a16:creationId xmlns:a16="http://schemas.microsoft.com/office/drawing/2014/main" id="{4056AD40-236C-4314-6A42-E6C5542DF647}"/>
               </a:ext>
             </a:extLst>
           </p:cNvPr>
@@ -10360,7 +10575,7 @@
         </p:blipFill>
         <p:spPr>
           <a:xfrm>
-            <a:off x="666614" y="4667054"/>
+            <a:off x="694906" y="4667054"/>
             <a:ext cx="5521536" cy="3874587"/>
           </a:xfrm>
           <a:prstGeom prst="rect">
@@ -10370,10 +10585,10 @@
       </p:pic>
       <p:pic>
         <p:nvPicPr>
-          <p:cNvPr id="12" name="図 11">
+          <p:cNvPr id="6" name="図 5">
             <a:extLst>
               <a:ext uri="{FF2B5EF4-FFF2-40B4-BE49-F238E27FC236}">
-                <a16:creationId xmlns:a16="http://schemas.microsoft.com/office/drawing/2014/main" id="{F961B068-E9D8-B96D-B744-D3A22DDD5E18}"/>
+                <a16:creationId xmlns:a16="http://schemas.microsoft.com/office/drawing/2014/main" id="{64E9B330-3307-650C-201B-5C7CE0AF0A63}"/>
               </a:ext>
             </a:extLst>
           </p:cNvPr>
@@ -10397,8 +10612,8 @@
         </p:blipFill>
         <p:spPr bwMode="auto">
           <a:xfrm>
-            <a:off x="609082" y="3243238"/>
-            <a:ext cx="5636600" cy="919080"/>
+            <a:off x="638918" y="3243238"/>
+            <a:ext cx="5614266" cy="919080"/>
           </a:xfrm>
           <a:prstGeom prst="rect">
             <a:avLst/>
@@ -10415,101 +10630,6 @@
           </a:extLst>
         </p:spPr>
       </p:pic>
-      <p:sp>
-        <p:nvSpPr>
-          <p:cNvPr id="19" name="テキスト ボックス 18">
-            <a:extLst>
-              <a:ext uri="{FF2B5EF4-FFF2-40B4-BE49-F238E27FC236}">
-                <a16:creationId xmlns:a16="http://schemas.microsoft.com/office/drawing/2014/main" id="{EC269278-E84C-3A0D-7F7F-F9CC24F59D7B}"/>
-              </a:ext>
-            </a:extLst>
-          </p:cNvPr>
-          <p:cNvSpPr txBox="1"/>
-          <p:nvPr/>
-        </p:nvSpPr>
-        <p:spPr>
-          <a:xfrm>
-            <a:off x="668508" y="1032957"/>
-            <a:ext cx="5649491" cy="2031325"/>
-          </a:xfrm>
-          <a:prstGeom prst="rect">
-            <a:avLst/>
-          </a:prstGeom>
-          <a:noFill/>
-        </p:spPr>
-        <p:txBody>
-          <a:bodyPr wrap="square" rtlCol="0">
-            <a:spAutoFit/>
-          </a:bodyPr>
-          <a:lstStyle/>
-          <a:p>
-            <a:r>
-              <a:rPr lang="en-US" altLang="ja-JP" sz="1000" dirty="0">
-                <a:latin typeface="IBM Plex Sans JP" panose="020B0503050203000203" pitchFamily="50" charset="-128"/>
-                <a:ea typeface="IBM Plex Sans JP" panose="020B0503050203000203" pitchFamily="50" charset="-128"/>
-              </a:rPr>
-              <a:t>The Gradient Filament Series provides multiple color-changing Profiles and Plates with different cycle counts. Details vary by model, so please refer to each model’s description.</a:t>
-            </a:r>
-          </a:p>
-          <a:p>
-            <a:endParaRPr lang="en-US" altLang="ja-JP" sz="1000" dirty="0">
-              <a:latin typeface="IBM Plex Sans JP" panose="020B0503050203000203" pitchFamily="50" charset="-128"/>
-              <a:ea typeface="IBM Plex Sans JP" panose="020B0503050203000203" pitchFamily="50" charset="-128"/>
-            </a:endParaRPr>
-          </a:p>
-          <a:p>
-            <a:pPr marL="171450" indent="-171450">
-              <a:buFont typeface="Arial" panose="020B0604020202020204" pitchFamily="34" charset="0"/>
-              <a:buChar char="•"/>
-            </a:pPr>
-            <a:r>
-              <a:rPr lang="en-US" altLang="ja-JP" sz="1000" dirty="0">
-                <a:latin typeface="IBM Plex Sans JP" panose="020B0503050203000203" pitchFamily="50" charset="-128"/>
-                <a:ea typeface="IBM Plex Sans JP" panose="020B0503050203000203" pitchFamily="50" charset="-128"/>
-              </a:rPr>
-              <a:t>Color Curve: Settings based on color combinations. This option allows you to select the optimal gradient for each color—for example, “Vivid” for cyan and yellow, or “Contrast” for white and magenta.</a:t>
-            </a:r>
-          </a:p>
-          <a:p>
-            <a:endParaRPr lang="en-US" altLang="ja-JP" sz="600" dirty="0">
-              <a:latin typeface="IBM Plex Sans JP" panose="020B0503050203000203" pitchFamily="50" charset="-128"/>
-              <a:ea typeface="IBM Plex Sans JP" panose="020B0503050203000203" pitchFamily="50" charset="-128"/>
-            </a:endParaRPr>
-          </a:p>
-          <a:p>
-            <a:pPr marL="171450" indent="-171450">
-              <a:buFont typeface="Arial" panose="020B0604020202020204" pitchFamily="34" charset="0"/>
-              <a:buChar char="•"/>
-            </a:pPr>
-            <a:r>
-              <a:rPr lang="en-US" altLang="ja-JP" sz="1000" dirty="0">
-                <a:latin typeface="IBM Plex Sans JP" panose="020B0503050203000203" pitchFamily="50" charset="-128"/>
-                <a:ea typeface="IBM Plex Sans JP" panose="020B0503050203000203" pitchFamily="50" charset="-128"/>
-              </a:rPr>
-              <a:t>Number of cycles: The number that determines the frequency of the gradient. One cycle is counted as one complete cycle in which the filament changes from A to B to A and back.</a:t>
-            </a:r>
-          </a:p>
-          <a:p>
-            <a:endParaRPr lang="en-US" altLang="ja-JP" sz="1000" dirty="0">
-              <a:latin typeface="IBM Plex Sans JP" panose="020B0503050203000203" pitchFamily="50" charset="-128"/>
-              <a:ea typeface="IBM Plex Sans JP" panose="020B0503050203000203" pitchFamily="50" charset="-128"/>
-            </a:endParaRPr>
-          </a:p>
-          <a:p>
-            <a:r>
-              <a:rPr lang="en-US" altLang="ja-JP" sz="1000" dirty="0">
-                <a:latin typeface="IBM Plex Sans JP" panose="020B0503050203000203" pitchFamily="50" charset="-128"/>
-                <a:ea typeface="IBM Plex Sans JP" panose="020B0503050203000203" pitchFamily="50" charset="-128"/>
-              </a:rPr>
-              <a:t>Example: To create a fast-cycle gradient filament using cyan and magenta, select an S4 Model, choose a 4-cycle Plate, and use the Vivid curve Profile due to the high color contrast.</a:t>
-            </a:r>
-            <a:endParaRPr kumimoji="1" lang="ja-JP" altLang="en-US" sz="1000" b="1" dirty="0">
-              <a:latin typeface="IBM Plex Sans JP" panose="020B0503050203000203" pitchFamily="50" charset="-128"/>
-              <a:ea typeface="IBM Plex Sans JP" panose="020B0503050203000203" pitchFamily="50" charset="-128"/>
-            </a:endParaRPr>
-          </a:p>
-        </p:txBody>
-      </p:sp>
     </p:spTree>
     <p:extLst>
       <p:ext uri="{BB962C8B-B14F-4D97-AF65-F5344CB8AC3E}">
